--- a/강의자료/파이썬기초1_1-5차시.pptx
+++ b/강의자료/파이썬기초1_1-5차시.pptx
@@ -31689,11 +31689,11 @@
         <p:spPr>
           <a:xfrm>
             <a:off x="457200" y="1371600"/>
-            <a:ext cx="3977640" cy="2011680"/>
+            <a:ext cx="3977640" cy="2468880"/>
           </a:xfrm>
           <a:prstGeom prst="roundRect">
             <a:avLst>
-              <a:gd name="adj" fmla="val 3636"/>
+              <a:gd name="adj" fmla="val 2963"/>
             </a:avLst>
           </a:prstGeom>
           <a:solidFill>
@@ -31716,7 +31716,7 @@
         <p:spPr>
           <a:xfrm>
             <a:off x="621792" y="1481328"/>
-            <a:ext cx="3648456" cy="1792224"/>
+            <a:ext cx="3648456" cy="2249424"/>
           </a:xfrm>
           <a:prstGeom prst="rect">
             <a:avLst/>
@@ -31735,7 +31735,7 @@
               <a:buNone/>
             </a:pPr>
             <a:r>
-              <a:rPr lang="en-US" sz="1200" dirty="0">
+              <a:rPr lang="en-US" sz="1250" dirty="0">
                 <a:solidFill>
                   <a:srgbClr val="E5E7EB"/>
                 </a:solidFill>
@@ -31751,17 +31751,17 @@
               </a:lnSpc>
               <a:buNone/>
             </a:pPr>
-            <a:endParaRPr lang="en-US" sz="1200" dirty="0"/>
-          </a:p>
-          <a:p>
-            <a:pPr indent="0" marL="0">
-              <a:lnSpc>
-                <a:spcPct val="115000"/>
-              </a:lnSpc>
-              <a:buNone/>
-            </a:pPr>
-            <a:r>
-              <a:rPr lang="en-US" sz="1200" b="1" dirty="0">
+            <a:endParaRPr lang="en-US" sz="1250" dirty="0"/>
+          </a:p>
+          <a:p>
+            <a:pPr indent="0" marL="0">
+              <a:lnSpc>
+                <a:spcPct val="115000"/>
+              </a:lnSpc>
+              <a:buNone/>
+            </a:pPr>
+            <a:r>
+              <a:rPr lang="en-US" sz="1250" b="1" dirty="0">
                 <a:solidFill>
                   <a:srgbClr val="93C5FD"/>
                 </a:solidFill>
@@ -31778,7 +31778,7 @@
               <a:buNone/>
             </a:pPr>
             <a:r>
-              <a:rPr lang="en-US" sz="1200" dirty="0">
+              <a:rPr lang="en-US" sz="1250" dirty="0">
                 <a:solidFill>
                   <a:srgbClr val="E5E7EB"/>
                 </a:solidFill>
@@ -31795,7 +31795,7 @@
               <a:buNone/>
             </a:pPr>
             <a:r>
-              <a:rPr lang="en-US" sz="1200" dirty="0">
+              <a:rPr lang="en-US" sz="1250" dirty="0">
                 <a:solidFill>
                   <a:srgbClr val="94A3B8"/>
                 </a:solidFill>
@@ -31811,17 +31811,17 @@
               </a:lnSpc>
               <a:buNone/>
             </a:pPr>
-            <a:endParaRPr lang="en-US" sz="1200" dirty="0"/>
-          </a:p>
-          <a:p>
-            <a:pPr indent="0" marL="0">
-              <a:lnSpc>
-                <a:spcPct val="115000"/>
-              </a:lnSpc>
-              <a:buNone/>
-            </a:pPr>
-            <a:r>
-              <a:rPr lang="en-US" sz="1200" dirty="0">
+            <a:endParaRPr lang="en-US" sz="1250" dirty="0"/>
+          </a:p>
+          <a:p>
+            <a:pPr indent="0" marL="0">
+              <a:lnSpc>
+                <a:spcPct val="115000"/>
+              </a:lnSpc>
+              <a:buNone/>
+            </a:pPr>
+            <a:r>
+              <a:rPr lang="en-US" sz="1250" dirty="0">
                 <a:solidFill>
                   <a:srgbClr val="E5E7EB"/>
                 </a:solidFill>
@@ -31838,7 +31838,7 @@
               <a:buNone/>
             </a:pPr>
             <a:r>
-              <a:rPr lang="en-US" sz="1200" dirty="0">
+              <a:rPr lang="en-US" sz="1250" dirty="0">
                 <a:solidFill>
                   <a:srgbClr val="FCD34D"/>
                 </a:solidFill>
@@ -31854,17 +31854,17 @@
               </a:lnSpc>
               <a:buNone/>
             </a:pPr>
-            <a:endParaRPr lang="en-US" sz="1200" dirty="0"/>
-          </a:p>
-          <a:p>
-            <a:pPr indent="0" marL="0">
-              <a:lnSpc>
-                <a:spcPct val="115000"/>
-              </a:lnSpc>
-              <a:buNone/>
-            </a:pPr>
-            <a:r>
-              <a:rPr lang="en-US" sz="1200" b="1" dirty="0">
+            <a:endParaRPr lang="en-US" sz="1250" dirty="0"/>
+          </a:p>
+          <a:p>
+            <a:pPr indent="0" marL="0">
+              <a:lnSpc>
+                <a:spcPct val="115000"/>
+              </a:lnSpc>
+              <a:buNone/>
+            </a:pPr>
+            <a:r>
+              <a:rPr lang="en-US" sz="1250" b="1" dirty="0">
                 <a:solidFill>
                   <a:srgbClr val="93C5FD"/>
                 </a:solidFill>
@@ -31881,7 +31881,7 @@
               <a:buNone/>
             </a:pPr>
             <a:r>
-              <a:rPr lang="en-US" sz="1200" dirty="0">
+              <a:rPr lang="en-US" sz="1250" dirty="0">
                 <a:solidFill>
                   <a:srgbClr val="E5E7EB"/>
                 </a:solidFill>
@@ -31898,7 +31898,7 @@
               <a:buNone/>
             </a:pPr>
             <a:r>
-              <a:rPr lang="en-US" sz="1200" dirty="0">
+              <a:rPr lang="en-US" sz="1250" dirty="0">
                 <a:solidFill>
                   <a:srgbClr val="94A3B8"/>
                 </a:solidFill>
@@ -31914,17 +31914,17 @@
               </a:lnSpc>
               <a:buNone/>
             </a:pPr>
-            <a:endParaRPr lang="en-US" sz="1200" dirty="0"/>
-          </a:p>
-          <a:p>
-            <a:pPr indent="0" marL="0">
-              <a:lnSpc>
-                <a:spcPct val="115000"/>
-              </a:lnSpc>
-              <a:buNone/>
-            </a:pPr>
-            <a:r>
-              <a:rPr lang="en-US" sz="1200" dirty="0">
+            <a:endParaRPr lang="en-US" sz="1250" dirty="0"/>
+          </a:p>
+          <a:p>
+            <a:pPr indent="0" marL="0">
+              <a:lnSpc>
+                <a:spcPct val="115000"/>
+              </a:lnSpc>
+              <a:buNone/>
+            </a:pPr>
+            <a:r>
+              <a:rPr lang="en-US" sz="1250" dirty="0">
                 <a:solidFill>
                   <a:srgbClr val="E5E7EB"/>
                 </a:solidFill>
@@ -31941,7 +31941,7 @@
               <a:buNone/>
             </a:pPr>
             <a:r>
-              <a:rPr lang="en-US" sz="1200" dirty="0">
+              <a:rPr lang="en-US" sz="1250" dirty="0">
                 <a:solidFill>
                   <a:srgbClr val="FCD34D"/>
                 </a:solidFill>
@@ -31957,17 +31957,17 @@
               </a:lnSpc>
               <a:buNone/>
             </a:pPr>
-            <a:endParaRPr lang="en-US" sz="1200" dirty="0"/>
-          </a:p>
-          <a:p>
-            <a:pPr indent="0" marL="0">
-              <a:lnSpc>
-                <a:spcPct val="115000"/>
-              </a:lnSpc>
-              <a:buNone/>
-            </a:pPr>
-            <a:r>
-              <a:rPr lang="en-US" sz="1200" b="1" dirty="0">
+            <a:endParaRPr lang="en-US" sz="1250" dirty="0"/>
+          </a:p>
+          <a:p>
+            <a:pPr indent="0" marL="0">
+              <a:lnSpc>
+                <a:spcPct val="115000"/>
+              </a:lnSpc>
+              <a:buNone/>
+            </a:pPr>
+            <a:r>
+              <a:rPr lang="en-US" sz="1250" b="1" dirty="0">
                 <a:solidFill>
                   <a:srgbClr val="93C5FD"/>
                 </a:solidFill>
@@ -31984,7 +31984,7 @@
               <a:buNone/>
             </a:pPr>
             <a:r>
-              <a:rPr lang="en-US" sz="1200" dirty="0">
+              <a:rPr lang="en-US" sz="1250" dirty="0">
                 <a:solidFill>
                   <a:srgbClr val="E5E7EB"/>
                 </a:solidFill>
@@ -32001,7 +32001,7 @@
               <a:buNone/>
             </a:pPr>
             <a:r>
-              <a:rPr lang="en-US" sz="1200" dirty="0">
+              <a:rPr lang="en-US" sz="1250" dirty="0">
                 <a:solidFill>
                   <a:srgbClr val="94A3B8"/>
                 </a:solidFill>
@@ -32011,7 +32011,7 @@
               </a:rPr>
               <a:t># GOLD  ← 틀림</a:t>
             </a:r>
-            <a:endParaRPr lang="en-US" sz="1200" dirty="0"/>
+            <a:endParaRPr lang="en-US" sz="1250" dirty="0"/>
           </a:p>
         </p:txBody>
       </p:sp>
@@ -32024,11 +32024,11 @@
         <p:spPr>
           <a:xfrm>
             <a:off x="4709160" y="1371600"/>
-            <a:ext cx="3977640" cy="2011680"/>
+            <a:ext cx="3977640" cy="2468880"/>
           </a:xfrm>
           <a:prstGeom prst="roundRect">
             <a:avLst>
-              <a:gd name="adj" fmla="val 3636"/>
+              <a:gd name="adj" fmla="val 2963"/>
             </a:avLst>
           </a:prstGeom>
           <a:solidFill>
@@ -32051,7 +32051,7 @@
         <p:spPr>
           <a:xfrm>
             <a:off x="4873752" y="1481328"/>
-            <a:ext cx="3648456" cy="1792224"/>
+            <a:ext cx="3648456" cy="2249424"/>
           </a:xfrm>
           <a:prstGeom prst="rect">
             <a:avLst/>
@@ -32070,7 +32070,7 @@
               <a:buNone/>
             </a:pPr>
             <a:r>
-              <a:rPr lang="en-US" sz="1200" dirty="0">
+              <a:rPr lang="en-US" sz="1250" dirty="0">
                 <a:solidFill>
                   <a:srgbClr val="E5E7EB"/>
                 </a:solidFill>
@@ -32086,17 +32086,17 @@
               </a:lnSpc>
               <a:buNone/>
             </a:pPr>
-            <a:endParaRPr lang="en-US" sz="1200" dirty="0"/>
-          </a:p>
-          <a:p>
-            <a:pPr indent="0" marL="0">
-              <a:lnSpc>
-                <a:spcPct val="115000"/>
-              </a:lnSpc>
-              <a:buNone/>
-            </a:pPr>
-            <a:r>
-              <a:rPr lang="en-US" sz="1200" b="1" dirty="0">
+            <a:endParaRPr lang="en-US" sz="1250" dirty="0"/>
+          </a:p>
+          <a:p>
+            <a:pPr indent="0" marL="0">
+              <a:lnSpc>
+                <a:spcPct val="115000"/>
+              </a:lnSpc>
+              <a:buNone/>
+            </a:pPr>
+            <a:r>
+              <a:rPr lang="en-US" sz="1250" b="1" dirty="0">
                 <a:solidFill>
                   <a:srgbClr val="93C5FD"/>
                 </a:solidFill>
@@ -32113,7 +32113,7 @@
               <a:buNone/>
             </a:pPr>
             <a:r>
-              <a:rPr lang="en-US" sz="1200" dirty="0">
+              <a:rPr lang="en-US" sz="1250" dirty="0">
                 <a:solidFill>
                   <a:srgbClr val="E5E7EB"/>
                 </a:solidFill>
@@ -32130,7 +32130,7 @@
               <a:buNone/>
             </a:pPr>
             <a:r>
-              <a:rPr lang="en-US" sz="1200" dirty="0">
+              <a:rPr lang="en-US" sz="1250" dirty="0">
                 <a:solidFill>
                   <a:srgbClr val="94A3B8"/>
                 </a:solidFill>
@@ -32146,17 +32146,17 @@
               </a:lnSpc>
               <a:buNone/>
             </a:pPr>
-            <a:endParaRPr lang="en-US" sz="1200" dirty="0"/>
-          </a:p>
-          <a:p>
-            <a:pPr indent="0" marL="0">
-              <a:lnSpc>
-                <a:spcPct val="115000"/>
-              </a:lnSpc>
-              <a:buNone/>
-            </a:pPr>
-            <a:r>
-              <a:rPr lang="en-US" sz="1200" dirty="0">
+            <a:endParaRPr lang="en-US" sz="1250" dirty="0"/>
+          </a:p>
+          <a:p>
+            <a:pPr indent="0" marL="0">
+              <a:lnSpc>
+                <a:spcPct val="115000"/>
+              </a:lnSpc>
+              <a:buNone/>
+            </a:pPr>
+            <a:r>
+              <a:rPr lang="en-US" sz="1250" dirty="0">
                 <a:solidFill>
                   <a:srgbClr val="E5E7EB"/>
                 </a:solidFill>
@@ -32173,7 +32173,7 @@
               <a:buNone/>
             </a:pPr>
             <a:r>
-              <a:rPr lang="en-US" sz="1200" dirty="0">
+              <a:rPr lang="en-US" sz="1250" dirty="0">
                 <a:solidFill>
                   <a:srgbClr val="FCD34D"/>
                 </a:solidFill>
@@ -32189,17 +32189,17 @@
               </a:lnSpc>
               <a:buNone/>
             </a:pPr>
-            <a:endParaRPr lang="en-US" sz="1200" dirty="0"/>
-          </a:p>
-          <a:p>
-            <a:pPr indent="0" marL="0">
-              <a:lnSpc>
-                <a:spcPct val="115000"/>
-              </a:lnSpc>
-              <a:buNone/>
-            </a:pPr>
-            <a:r>
-              <a:rPr lang="en-US" sz="1200" b="1" dirty="0">
+            <a:endParaRPr lang="en-US" sz="1250" dirty="0"/>
+          </a:p>
+          <a:p>
+            <a:pPr indent="0" marL="0">
+              <a:lnSpc>
+                <a:spcPct val="115000"/>
+              </a:lnSpc>
+              <a:buNone/>
+            </a:pPr>
+            <a:r>
+              <a:rPr lang="en-US" sz="1250" b="1" dirty="0">
                 <a:solidFill>
                   <a:srgbClr val="93C5FD"/>
                 </a:solidFill>
@@ -32216,7 +32216,7 @@
               <a:buNone/>
             </a:pPr>
             <a:r>
-              <a:rPr lang="en-US" sz="1200" dirty="0">
+              <a:rPr lang="en-US" sz="1250" dirty="0">
                 <a:solidFill>
                   <a:srgbClr val="E5E7EB"/>
                 </a:solidFill>
@@ -32232,17 +32232,17 @@
               </a:lnSpc>
               <a:buNone/>
             </a:pPr>
-            <a:endParaRPr lang="en-US" sz="1200" dirty="0"/>
-          </a:p>
-          <a:p>
-            <a:pPr indent="0" marL="0">
-              <a:lnSpc>
-                <a:spcPct val="115000"/>
-              </a:lnSpc>
-              <a:buNone/>
-            </a:pPr>
-            <a:r>
-              <a:rPr lang="en-US" sz="1200" dirty="0">
+            <a:endParaRPr lang="en-US" sz="1250" dirty="0"/>
+          </a:p>
+          <a:p>
+            <a:pPr indent="0" marL="0">
+              <a:lnSpc>
+                <a:spcPct val="115000"/>
+              </a:lnSpc>
+              <a:buNone/>
+            </a:pPr>
+            <a:r>
+              <a:rPr lang="en-US" sz="1250" dirty="0">
                 <a:solidFill>
                   <a:srgbClr val="E5E7EB"/>
                 </a:solidFill>
@@ -32259,7 +32259,7 @@
               <a:buNone/>
             </a:pPr>
             <a:r>
-              <a:rPr lang="en-US" sz="1200" dirty="0">
+              <a:rPr lang="en-US" sz="1250" dirty="0">
                 <a:solidFill>
                   <a:srgbClr val="FCD34D"/>
                 </a:solidFill>
@@ -32275,17 +32275,17 @@
               </a:lnSpc>
               <a:buNone/>
             </a:pPr>
-            <a:endParaRPr lang="en-US" sz="1200" dirty="0"/>
-          </a:p>
-          <a:p>
-            <a:pPr indent="0" marL="0">
-              <a:lnSpc>
-                <a:spcPct val="115000"/>
-              </a:lnSpc>
-              <a:buNone/>
-            </a:pPr>
-            <a:r>
-              <a:rPr lang="en-US" sz="1200" b="1" dirty="0">
+            <a:endParaRPr lang="en-US" sz="1250" dirty="0"/>
+          </a:p>
+          <a:p>
+            <a:pPr indent="0" marL="0">
+              <a:lnSpc>
+                <a:spcPct val="115000"/>
+              </a:lnSpc>
+              <a:buNone/>
+            </a:pPr>
+            <a:r>
+              <a:rPr lang="en-US" sz="1250" b="1" dirty="0">
                 <a:solidFill>
                   <a:srgbClr val="93C5FD"/>
                 </a:solidFill>
@@ -32302,7 +32302,7 @@
               <a:buNone/>
             </a:pPr>
             <a:r>
-              <a:rPr lang="en-US" sz="1200" dirty="0">
+              <a:rPr lang="en-US" sz="1250" dirty="0">
                 <a:solidFill>
                   <a:srgbClr val="E5E7EB"/>
                 </a:solidFill>
@@ -32319,7 +32319,7 @@
               <a:buNone/>
             </a:pPr>
             <a:r>
-              <a:rPr lang="en-US" sz="1200" dirty="0">
+              <a:rPr lang="en-US" sz="1250" dirty="0">
                 <a:solidFill>
                   <a:srgbClr val="94A3B8"/>
                 </a:solidFill>
@@ -32329,7 +32329,7 @@
               </a:rPr>
               <a:t># CHALLENGER</a:t>
             </a:r>
-            <a:endParaRPr lang="en-US" sz="1200" dirty="0"/>
+            <a:endParaRPr lang="en-US" sz="1250" dirty="0"/>
           </a:p>
         </p:txBody>
       </p:sp>
@@ -32341,12 +32341,12 @@
         </p:nvSpPr>
         <p:spPr>
           <a:xfrm>
-            <a:off x="457200" y="3566160"/>
-            <a:ext cx="3977640" cy="1097280"/>
+            <a:off x="457200" y="3977640"/>
+            <a:ext cx="3977640" cy="685800"/>
           </a:xfrm>
           <a:prstGeom prst="roundRect">
             <a:avLst>
-              <a:gd name="adj" fmla="val 8333"/>
+              <a:gd name="adj" fmla="val 13333"/>
             </a:avLst>
           </a:prstGeom>
           <a:solidFill>
@@ -32368,7 +32368,7 @@
         </p:nvSpPr>
         <p:spPr>
           <a:xfrm>
-            <a:off x="685800" y="3730752"/>
+            <a:off x="685800" y="4142232"/>
             <a:ext cx="3520440" cy="365760"/>
           </a:xfrm>
           <a:prstGeom prst="rect">
@@ -32407,12 +32407,12 @@
         </p:nvSpPr>
         <p:spPr>
           <a:xfrm>
-            <a:off x="4709160" y="3566160"/>
-            <a:ext cx="3977640" cy="1097280"/>
+            <a:off x="4709160" y="3977640"/>
+            <a:ext cx="3977640" cy="685800"/>
           </a:xfrm>
           <a:prstGeom prst="roundRect">
             <a:avLst>
-              <a:gd name="adj" fmla="val 8333"/>
+              <a:gd name="adj" fmla="val 13333"/>
             </a:avLst>
           </a:prstGeom>
           <a:solidFill>
@@ -32434,7 +32434,7 @@
         </p:nvSpPr>
         <p:spPr>
           <a:xfrm>
-            <a:off x="4937760" y="3730752"/>
+            <a:off x="4937760" y="4142232"/>
             <a:ext cx="3520440" cy="365760"/>
           </a:xfrm>
           <a:prstGeom prst="rect">

--- a/강의자료/파이썬기초1_1-5차시.pptx
+++ b/강의자료/파이썬기초1_1-5차시.pptx
@@ -6274,7 +6274,7 @@
                 <a:ea typeface="Malgun Gothic" pitchFamily="34" charset="-122"/>
                 <a:cs typeface="Malgun Gothic" pitchFamily="34" charset="-120"/>
               </a:rPr>
-              <a:t>「파이프라인 실행」 → 터미널에 실제 출력 두 줄과 &lt;class 'str'&gt; 이 찍히고, 글자 길이 차트가 뜬다.</a:t>
+              <a:t>「파이프라인 실행」 → 터미널에 실제 출력 두 줄이 찍히고, print 가 찍은 글자 수 막대가 뜬다. sep·end 를 바꾸면 막대가 변한다.</a:t>
             </a:r>
             <a:endParaRPr lang="en-US" sz="1200" dirty="0"/>
           </a:p>
@@ -8204,7 +8204,7 @@
               <a:buNone/>
             </a:pPr>
             <a:r>
-              <a:rPr lang="en-US" sz="1250" dirty="0">
+              <a:rPr lang="en-US" sz="1245" dirty="0">
                 <a:solidFill>
                   <a:srgbClr val="E5E7EB"/>
                 </a:solidFill>
@@ -8221,7 +8221,7 @@
               <a:buNone/>
             </a:pPr>
             <a:r>
-              <a:rPr lang="en-US" sz="1250" dirty="0">
+              <a:rPr lang="en-US" sz="1245" dirty="0">
                 <a:solidFill>
                   <a:srgbClr val="FCD34D"/>
                 </a:solidFill>
@@ -8237,17 +8237,17 @@
               </a:lnSpc>
               <a:buNone/>
             </a:pPr>
-            <a:endParaRPr lang="en-US" sz="1250" dirty="0"/>
-          </a:p>
-          <a:p>
-            <a:pPr indent="0" marL="0">
-              <a:lnSpc>
-                <a:spcPct val="115000"/>
-              </a:lnSpc>
-              <a:buNone/>
-            </a:pPr>
-            <a:r>
-              <a:rPr lang="en-US" sz="1250" dirty="0">
+            <a:endParaRPr lang="en-US" sz="1245" dirty="0"/>
+          </a:p>
+          <a:p>
+            <a:pPr indent="0" marL="0">
+              <a:lnSpc>
+                <a:spcPct val="115000"/>
+              </a:lnSpc>
+              <a:buNone/>
+            </a:pPr>
+            <a:r>
+              <a:rPr lang="en-US" sz="1245" dirty="0">
                 <a:solidFill>
                   <a:srgbClr val="E5E7EB"/>
                 </a:solidFill>
@@ -8264,7 +8264,7 @@
               <a:buNone/>
             </a:pPr>
             <a:r>
-              <a:rPr lang="en-US" sz="1250" b="1" dirty="0">
+              <a:rPr lang="en-US" sz="1245" b="1" dirty="0">
                 <a:solidFill>
                   <a:srgbClr val="93C5FD"/>
                 </a:solidFill>
@@ -8281,7 +8281,7 @@
               <a:buNone/>
             </a:pPr>
             <a:r>
-              <a:rPr lang="en-US" sz="1250" dirty="0">
+              <a:rPr lang="en-US" sz="1245" dirty="0">
                 <a:solidFill>
                   <a:srgbClr val="E5E7EB"/>
                 </a:solidFill>
@@ -8297,17 +8297,17 @@
               </a:lnSpc>
               <a:buNone/>
             </a:pPr>
-            <a:endParaRPr lang="en-US" sz="1250" dirty="0"/>
-          </a:p>
-          <a:p>
-            <a:pPr indent="0" marL="0">
-              <a:lnSpc>
-                <a:spcPct val="115000"/>
-              </a:lnSpc>
-              <a:buNone/>
-            </a:pPr>
-            <a:r>
-              <a:rPr lang="en-US" sz="1250" b="1" dirty="0">
+            <a:endParaRPr lang="en-US" sz="1245" dirty="0"/>
+          </a:p>
+          <a:p>
+            <a:pPr indent="0" marL="0">
+              <a:lnSpc>
+                <a:spcPct val="115000"/>
+              </a:lnSpc>
+              <a:buNone/>
+            </a:pPr>
+            <a:r>
+              <a:rPr lang="en-US" sz="1245" b="1" dirty="0">
                 <a:solidFill>
                   <a:srgbClr val="93C5FD"/>
                 </a:solidFill>
@@ -8324,7 +8324,7 @@
               <a:buNone/>
             </a:pPr>
             <a:r>
-              <a:rPr lang="en-US" sz="1250" dirty="0">
+              <a:rPr lang="en-US" sz="1245" dirty="0">
                 <a:solidFill>
                   <a:srgbClr val="E5E7EB"/>
                 </a:solidFill>
@@ -8341,7 +8341,7 @@
               <a:buNone/>
             </a:pPr>
             <a:r>
-              <a:rPr lang="en-US" sz="1250" dirty="0">
+              <a:rPr lang="en-US" sz="1245" dirty="0">
                 <a:solidFill>
                   <a:srgbClr val="94A3B8"/>
                 </a:solidFill>
@@ -8357,17 +8357,17 @@
               </a:lnSpc>
               <a:buNone/>
             </a:pPr>
-            <a:endParaRPr lang="en-US" sz="1250" dirty="0"/>
-          </a:p>
-          <a:p>
-            <a:pPr indent="0" marL="0">
-              <a:lnSpc>
-                <a:spcPct val="115000"/>
-              </a:lnSpc>
-              <a:buNone/>
-            </a:pPr>
-            <a:r>
-              <a:rPr lang="en-US" sz="1250" b="1" dirty="0">
+            <a:endParaRPr lang="en-US" sz="1245" dirty="0"/>
+          </a:p>
+          <a:p>
+            <a:pPr indent="0" marL="0">
+              <a:lnSpc>
+                <a:spcPct val="115000"/>
+              </a:lnSpc>
+              <a:buNone/>
+            </a:pPr>
+            <a:r>
+              <a:rPr lang="en-US" sz="1245" b="1" dirty="0">
                 <a:solidFill>
                   <a:srgbClr val="93C5FD"/>
                 </a:solidFill>
@@ -8384,7 +8384,7 @@
               <a:buNone/>
             </a:pPr>
             <a:r>
-              <a:rPr lang="en-US" sz="1250" dirty="0">
+              <a:rPr lang="en-US" sz="1245" dirty="0">
                 <a:solidFill>
                   <a:srgbClr val="E5E7EB"/>
                 </a:solidFill>
@@ -8401,7 +8401,7 @@
               <a:buNone/>
             </a:pPr>
             <a:r>
-              <a:rPr lang="en-US" sz="1250" b="1" dirty="0">
+              <a:rPr lang="en-US" sz="1245" b="1" dirty="0">
                 <a:solidFill>
                   <a:srgbClr val="93C5FD"/>
                 </a:solidFill>
@@ -8418,7 +8418,7 @@
               <a:buNone/>
             </a:pPr>
             <a:r>
-              <a:rPr lang="en-US" sz="1250" dirty="0">
+              <a:rPr lang="en-US" sz="1245" dirty="0">
                 <a:solidFill>
                   <a:srgbClr val="E5E7EB"/>
                 </a:solidFill>
@@ -8435,7 +8435,7 @@
               <a:buNone/>
             </a:pPr>
             <a:r>
-              <a:rPr lang="en-US" sz="1250" dirty="0">
+              <a:rPr lang="en-US" sz="1245" dirty="0">
                 <a:solidFill>
                   <a:srgbClr val="94A3B8"/>
                 </a:solidFill>
@@ -8445,7 +8445,7 @@
               </a:rPr>
               <a:t># 3  ← 반올림이 아니라 버림</a:t>
             </a:r>
-            <a:endParaRPr lang="en-US" sz="1250" dirty="0"/>
+            <a:endParaRPr lang="en-US" sz="1245" dirty="0"/>
           </a:p>
         </p:txBody>
       </p:sp>
@@ -8949,7 +8949,7 @@
               <a:buNone/>
             </a:pPr>
             <a:r>
-              <a:rPr lang="en-US" sz="1250" dirty="0">
+              <a:rPr lang="en-US" sz="1199" dirty="0">
                 <a:solidFill>
                   <a:srgbClr val="E5E7EB"/>
                 </a:solidFill>
@@ -8966,7 +8966,7 @@
               <a:buNone/>
             </a:pPr>
             <a:r>
-              <a:rPr lang="en-US" sz="1250" dirty="0">
+              <a:rPr lang="en-US" sz="1199" dirty="0">
                 <a:solidFill>
                   <a:srgbClr val="FCD34D"/>
                 </a:solidFill>
@@ -8982,17 +8982,17 @@
               </a:lnSpc>
               <a:buNone/>
             </a:pPr>
-            <a:endParaRPr lang="en-US" sz="1250" dirty="0"/>
-          </a:p>
-          <a:p>
-            <a:pPr indent="0" marL="0">
-              <a:lnSpc>
-                <a:spcPct val="115000"/>
-              </a:lnSpc>
-              <a:buNone/>
-            </a:pPr>
-            <a:r>
-              <a:rPr lang="en-US" sz="1250" dirty="0">
+            <a:endParaRPr lang="en-US" sz="1199" dirty="0"/>
+          </a:p>
+          <a:p>
+            <a:pPr indent="0" marL="0">
+              <a:lnSpc>
+                <a:spcPct val="115000"/>
+              </a:lnSpc>
+              <a:buNone/>
+            </a:pPr>
+            <a:r>
+              <a:rPr lang="en-US" sz="1199" dirty="0">
                 <a:solidFill>
                   <a:srgbClr val="E5E7EB"/>
                 </a:solidFill>
@@ -9009,7 +9009,7 @@
               <a:buNone/>
             </a:pPr>
             <a:r>
-              <a:rPr lang="en-US" sz="1250" b="1" dirty="0">
+              <a:rPr lang="en-US" sz="1199" b="1" dirty="0">
                 <a:solidFill>
                   <a:srgbClr val="93C5FD"/>
                 </a:solidFill>
@@ -9026,7 +9026,7 @@
               <a:buNone/>
             </a:pPr>
             <a:r>
-              <a:rPr lang="en-US" sz="1250" dirty="0">
+              <a:rPr lang="en-US" sz="1199" dirty="0">
                 <a:solidFill>
                   <a:srgbClr val="E5E7EB"/>
                 </a:solidFill>
@@ -9042,17 +9042,17 @@
               </a:lnSpc>
               <a:buNone/>
             </a:pPr>
-            <a:endParaRPr lang="en-US" sz="1250" dirty="0"/>
-          </a:p>
-          <a:p>
-            <a:pPr indent="0" marL="0">
-              <a:lnSpc>
-                <a:spcPct val="115000"/>
-              </a:lnSpc>
-              <a:buNone/>
-            </a:pPr>
-            <a:r>
-              <a:rPr lang="en-US" sz="1250" b="1" dirty="0">
+            <a:endParaRPr lang="en-US" sz="1199" dirty="0"/>
+          </a:p>
+          <a:p>
+            <a:pPr indent="0" marL="0">
+              <a:lnSpc>
+                <a:spcPct val="115000"/>
+              </a:lnSpc>
+              <a:buNone/>
+            </a:pPr>
+            <a:r>
+              <a:rPr lang="en-US" sz="1199" b="1" dirty="0">
                 <a:solidFill>
                   <a:srgbClr val="93C5FD"/>
                 </a:solidFill>
@@ -9069,7 +9069,7 @@
               <a:buNone/>
             </a:pPr>
             <a:r>
-              <a:rPr lang="en-US" sz="1250" dirty="0">
+              <a:rPr lang="en-US" sz="1199" dirty="0">
                 <a:solidFill>
                   <a:srgbClr val="E5E7EB"/>
                 </a:solidFill>
@@ -9086,7 +9086,7 @@
               <a:buNone/>
             </a:pPr>
             <a:r>
-              <a:rPr lang="en-US" sz="1250" dirty="0">
+              <a:rPr lang="en-US" sz="1199" dirty="0">
                 <a:solidFill>
                   <a:srgbClr val="94A3B8"/>
                 </a:solidFill>
@@ -9102,17 +9102,17 @@
               </a:lnSpc>
               <a:buNone/>
             </a:pPr>
-            <a:endParaRPr lang="en-US" sz="1250" dirty="0"/>
-          </a:p>
-          <a:p>
-            <a:pPr indent="0" marL="0">
-              <a:lnSpc>
-                <a:spcPct val="115000"/>
-              </a:lnSpc>
-              <a:buNone/>
-            </a:pPr>
-            <a:r>
-              <a:rPr lang="en-US" sz="1250" b="1" dirty="0">
+            <a:endParaRPr lang="en-US" sz="1199" dirty="0"/>
+          </a:p>
+          <a:p>
+            <a:pPr indent="0" marL="0">
+              <a:lnSpc>
+                <a:spcPct val="115000"/>
+              </a:lnSpc>
+              <a:buNone/>
+            </a:pPr>
+            <a:r>
+              <a:rPr lang="en-US" sz="1199" b="1" dirty="0">
                 <a:solidFill>
                   <a:srgbClr val="93C5FD"/>
                 </a:solidFill>
@@ -9129,7 +9129,7 @@
               <a:buNone/>
             </a:pPr>
             <a:r>
-              <a:rPr lang="en-US" sz="1250" dirty="0">
+              <a:rPr lang="en-US" sz="1199" dirty="0">
                 <a:solidFill>
                   <a:srgbClr val="E5E7EB"/>
                 </a:solidFill>
@@ -9146,7 +9146,7 @@
               <a:buNone/>
             </a:pPr>
             <a:r>
-              <a:rPr lang="en-US" sz="1250" b="1" dirty="0">
+              <a:rPr lang="en-US" sz="1199" b="1" dirty="0">
                 <a:solidFill>
                   <a:srgbClr val="93C5FD"/>
                 </a:solidFill>
@@ -9163,7 +9163,7 @@
               <a:buNone/>
             </a:pPr>
             <a:r>
-              <a:rPr lang="en-US" sz="1250" dirty="0">
+              <a:rPr lang="en-US" sz="1199" dirty="0">
                 <a:solidFill>
                   <a:srgbClr val="E5E7EB"/>
                 </a:solidFill>
@@ -9180,7 +9180,7 @@
               <a:buNone/>
             </a:pPr>
             <a:r>
-              <a:rPr lang="en-US" sz="1250" dirty="0">
+              <a:rPr lang="en-US" sz="1199" dirty="0">
                 <a:solidFill>
                   <a:srgbClr val="FCD34D"/>
                 </a:solidFill>
@@ -9197,7 +9197,7 @@
               <a:buNone/>
             </a:pPr>
             <a:r>
-              <a:rPr lang="en-US" sz="1250" dirty="0">
+              <a:rPr lang="en-US" sz="1199" dirty="0">
                 <a:solidFill>
                   <a:srgbClr val="E5E7EB"/>
                 </a:solidFill>
@@ -9214,7 +9214,7 @@
               <a:buNone/>
             </a:pPr>
             <a:r>
-              <a:rPr lang="en-US" sz="1250" dirty="0">
+              <a:rPr lang="en-US" sz="1199" dirty="0">
                 <a:solidFill>
                   <a:srgbClr val="94A3B8"/>
                 </a:solidFill>
@@ -9230,17 +9230,17 @@
               </a:lnSpc>
               <a:buNone/>
             </a:pPr>
-            <a:endParaRPr lang="en-US" sz="1250" dirty="0"/>
-          </a:p>
-          <a:p>
-            <a:pPr indent="0" marL="0">
-              <a:lnSpc>
-                <a:spcPct val="115000"/>
-              </a:lnSpc>
-              <a:buNone/>
-            </a:pPr>
-            <a:r>
-              <a:rPr lang="en-US" sz="1250" b="1" dirty="0">
+            <a:endParaRPr lang="en-US" sz="1199" dirty="0"/>
+          </a:p>
+          <a:p>
+            <a:pPr indent="0" marL="0">
+              <a:lnSpc>
+                <a:spcPct val="115000"/>
+              </a:lnSpc>
+              <a:buNone/>
+            </a:pPr>
+            <a:r>
+              <a:rPr lang="en-US" sz="1199" b="1" dirty="0">
                 <a:solidFill>
                   <a:srgbClr val="93C5FD"/>
                 </a:solidFill>
@@ -9257,7 +9257,7 @@
               <a:buNone/>
             </a:pPr>
             <a:r>
-              <a:rPr lang="en-US" sz="1250" dirty="0">
+              <a:rPr lang="en-US" sz="1199" dirty="0">
                 <a:solidFill>
                   <a:srgbClr val="E5E7EB"/>
                 </a:solidFill>
@@ -9274,7 +9274,7 @@
               <a:buNone/>
             </a:pPr>
             <a:r>
-              <a:rPr lang="en-US" sz="1250" dirty="0">
+              <a:rPr lang="en-US" sz="1199" dirty="0">
                 <a:solidFill>
                   <a:srgbClr val="94A3B8"/>
                 </a:solidFill>
@@ -9284,7 +9284,7 @@
               </a:rPr>
               <a:t># 2.5  ← 나눗셈은 항상 float</a:t>
             </a:r>
-            <a:endParaRPr lang="en-US" sz="1250" dirty="0"/>
+            <a:endParaRPr lang="en-US" sz="1199" dirty="0"/>
           </a:p>
         </p:txBody>
       </p:sp>
@@ -9382,7 +9382,7 @@
               <a:buNone/>
             </a:pPr>
             <a:r>
-              <a:rPr lang="en-US" sz="1400" dirty="0">
+              <a:rPr lang="en-US" sz="1268" dirty="0">
                 <a:solidFill>
                   <a:srgbClr val="0F172A"/>
                 </a:solidFill>
@@ -9392,17 +9392,17 @@
               </a:rPr>
               <a:t>85.5</a:t>
             </a:r>
-            <a:endParaRPr lang="en-US" sz="1400" dirty="0"/>
-          </a:p>
-          <a:p>
-            <a:pPr indent="0" marL="0">
-              <a:lnSpc>
-                <a:spcPct val="115000"/>
-              </a:lnSpc>
-              <a:buNone/>
-            </a:pPr>
-            <a:r>
-              <a:rPr lang="en-US" sz="1400" dirty="0">
+            <a:endParaRPr lang="en-US" sz="1268" dirty="0"/>
+          </a:p>
+          <a:p>
+            <a:pPr indent="0" marL="0">
+              <a:lnSpc>
+                <a:spcPct val="115000"/>
+              </a:lnSpc>
+              <a:buNone/>
+            </a:pPr>
+            <a:r>
+              <a:rPr lang="en-US" sz="1268" dirty="0">
                 <a:solidFill>
                   <a:srgbClr val="0F172A"/>
                 </a:solidFill>
@@ -9412,17 +9412,17 @@
               </a:rPr>
               <a:t>3.5</a:t>
             </a:r>
-            <a:endParaRPr lang="en-US" sz="1400" dirty="0"/>
-          </a:p>
-          <a:p>
-            <a:pPr indent="0" marL="0">
-              <a:lnSpc>
-                <a:spcPct val="115000"/>
-              </a:lnSpc>
-              <a:buNone/>
-            </a:pPr>
-            <a:r>
-              <a:rPr lang="en-US" sz="1400" dirty="0">
+            <a:endParaRPr lang="en-US" sz="1268" dirty="0"/>
+          </a:p>
+          <a:p>
+            <a:pPr indent="0" marL="0">
+              <a:lnSpc>
+                <a:spcPct val="115000"/>
+              </a:lnSpc>
+              <a:buNone/>
+            </a:pPr>
+            <a:r>
+              <a:rPr lang="en-US" sz="1268" dirty="0">
                 <a:solidFill>
                   <a:srgbClr val="0F172A"/>
                 </a:solidFill>
@@ -9432,7 +9432,7 @@
               </a:rPr>
               <a:t>2.5</a:t>
             </a:r>
-            <a:endParaRPr lang="en-US" sz="1400" dirty="0"/>
+            <a:endParaRPr lang="en-US" sz="1268" dirty="0"/>
           </a:p>
         </p:txBody>
       </p:sp>
@@ -10309,7 +10309,7 @@
               <a:buNone/>
             </a:pPr>
             <a:r>
-              <a:rPr lang="en-US" sz="1100" dirty="0">
+              <a:rPr lang="en-US" sz="761" dirty="0">
                 <a:solidFill>
                   <a:srgbClr val="0F172A"/>
                 </a:solidFill>
@@ -10319,17 +10319,17 @@
               </a:rPr>
               <a:t>정수 변환: 85 소수 변환: 85.5</a:t>
             </a:r>
-            <a:endParaRPr lang="en-US" sz="1100" dirty="0"/>
-          </a:p>
-          <a:p>
-            <a:pPr indent="0" marL="0">
-              <a:lnSpc>
-                <a:spcPct val="115000"/>
-              </a:lnSpc>
-              <a:buNone/>
-            </a:pPr>
-            <a:r>
-              <a:rPr lang="en-US" sz="1100" dirty="0">
+            <a:endParaRPr lang="en-US" sz="761" dirty="0"/>
+          </a:p>
+          <a:p>
+            <a:pPr indent="0" marL="0">
+              <a:lnSpc>
+                <a:spcPct val="115000"/>
+              </a:lnSpc>
+              <a:buNone/>
+            </a:pPr>
+            <a:r>
+              <a:rPr lang="en-US" sz="761" dirty="0">
                 <a:solidFill>
                   <a:srgbClr val="0F172A"/>
                 </a:solidFill>
@@ -10339,7 +10339,7 @@
               </a:rPr>
               <a:t>&lt;class 'str'&gt; &lt;class 'int'&gt; &lt;class 'float'&gt;</a:t>
             </a:r>
-            <a:endParaRPr lang="en-US" sz="1100" dirty="0"/>
+            <a:endParaRPr lang="en-US" sz="761" dirty="0"/>
           </a:p>
         </p:txBody>
       </p:sp>
@@ -11435,7 +11435,7 @@
               <a:buNone/>
             </a:pPr>
             <a:r>
-              <a:rPr lang="en-US" sz="1200" dirty="0">
+              <a:rPr lang="en-US" sz="901" dirty="0">
                 <a:solidFill>
                   <a:srgbClr val="E5E7EB"/>
                 </a:solidFill>
@@ -11452,7 +11452,7 @@
               <a:buNone/>
             </a:pPr>
             <a:r>
-              <a:rPr lang="en-US" sz="1200" dirty="0">
+              <a:rPr lang="en-US" sz="901" dirty="0">
                 <a:solidFill>
                   <a:srgbClr val="FCD34D"/>
                 </a:solidFill>
@@ -11469,7 +11469,7 @@
               <a:buNone/>
             </a:pPr>
             <a:r>
-              <a:rPr lang="en-US" sz="1200" dirty="0">
+              <a:rPr lang="en-US" sz="901" dirty="0">
                 <a:solidFill>
                   <a:srgbClr val="E5E7EB"/>
                 </a:solidFill>
@@ -11486,7 +11486,7 @@
               <a:buNone/>
             </a:pPr>
             <a:r>
-              <a:rPr lang="en-US" sz="1200" dirty="0">
+              <a:rPr lang="en-US" sz="901" dirty="0">
                 <a:solidFill>
                   <a:srgbClr val="FCD34D"/>
                 </a:solidFill>
@@ -11503,7 +11503,7 @@
               <a:buNone/>
             </a:pPr>
             <a:r>
-              <a:rPr lang="en-US" sz="1200" dirty="0">
+              <a:rPr lang="en-US" sz="901" dirty="0">
                 <a:solidFill>
                   <a:srgbClr val="E5E7EB"/>
                 </a:solidFill>
@@ -11520,7 +11520,7 @@
               <a:buNone/>
             </a:pPr>
             <a:r>
-              <a:rPr lang="en-US" sz="1200" dirty="0">
+              <a:rPr lang="en-US" sz="901" dirty="0">
                 <a:solidFill>
                   <a:srgbClr val="FCD34D"/>
                 </a:solidFill>
@@ -11537,7 +11537,7 @@
               <a:buNone/>
             </a:pPr>
             <a:r>
-              <a:rPr lang="en-US" sz="1200" dirty="0">
+              <a:rPr lang="en-US" sz="901" dirty="0">
                 <a:solidFill>
                   <a:srgbClr val="E5E7EB"/>
                 </a:solidFill>
@@ -11554,7 +11554,7 @@
               <a:buNone/>
             </a:pPr>
             <a:r>
-              <a:rPr lang="en-US" sz="1200" dirty="0">
+              <a:rPr lang="en-US" sz="901" dirty="0">
                 <a:solidFill>
                   <a:srgbClr val="94A3B8"/>
                 </a:solidFill>
@@ -11570,17 +11570,17 @@
               </a:lnSpc>
               <a:buNone/>
             </a:pPr>
-            <a:endParaRPr lang="en-US" sz="1200" dirty="0"/>
-          </a:p>
-          <a:p>
-            <a:pPr indent="0" marL="0">
-              <a:lnSpc>
-                <a:spcPct val="115000"/>
-              </a:lnSpc>
-              <a:buNone/>
-            </a:pPr>
-            <a:r>
-              <a:rPr lang="en-US" sz="1200" dirty="0">
+            <a:endParaRPr lang="en-US" sz="901" dirty="0"/>
+          </a:p>
+          <a:p>
+            <a:pPr indent="0" marL="0">
+              <a:lnSpc>
+                <a:spcPct val="115000"/>
+              </a:lnSpc>
+              <a:buNone/>
+            </a:pPr>
+            <a:r>
+              <a:rPr lang="en-US" sz="901" dirty="0">
                 <a:solidFill>
                   <a:srgbClr val="E5E7EB"/>
                 </a:solidFill>
@@ -11596,17 +11596,17 @@
               </a:lnSpc>
               <a:buNone/>
             </a:pPr>
-            <a:endParaRPr lang="en-US" sz="1200" dirty="0"/>
-          </a:p>
-          <a:p>
-            <a:pPr indent="0" marL="0">
-              <a:lnSpc>
-                <a:spcPct val="115000"/>
-              </a:lnSpc>
-              <a:buNone/>
-            </a:pPr>
-            <a:r>
-              <a:rPr lang="en-US" sz="1200" b="1" dirty="0">
+            <a:endParaRPr lang="en-US" sz="901" dirty="0"/>
+          </a:p>
+          <a:p>
+            <a:pPr indent="0" marL="0">
+              <a:lnSpc>
+                <a:spcPct val="115000"/>
+              </a:lnSpc>
+              <a:buNone/>
+            </a:pPr>
+            <a:r>
+              <a:rPr lang="en-US" sz="901" b="1" dirty="0">
                 <a:solidFill>
                   <a:srgbClr val="93C5FD"/>
                 </a:solidFill>
@@ -11623,7 +11623,7 @@
               <a:buNone/>
             </a:pPr>
             <a:r>
-              <a:rPr lang="en-US" sz="1200" dirty="0">
+              <a:rPr lang="en-US" sz="901" dirty="0">
                 <a:solidFill>
                   <a:srgbClr val="E5E7EB"/>
                 </a:solidFill>
@@ -11640,7 +11640,7 @@
               <a:buNone/>
             </a:pPr>
             <a:r>
-              <a:rPr lang="en-US" sz="1200" b="1" dirty="0">
+              <a:rPr lang="en-US" sz="901" b="1" dirty="0">
                 <a:solidFill>
                   <a:srgbClr val="93C5FD"/>
                 </a:solidFill>
@@ -11657,7 +11657,7 @@
               <a:buNone/>
             </a:pPr>
             <a:r>
-              <a:rPr lang="en-US" sz="1200" dirty="0">
+              <a:rPr lang="en-US" sz="901" dirty="0">
                 <a:solidFill>
                   <a:srgbClr val="E5E7EB"/>
                 </a:solidFill>
@@ -11673,17 +11673,17 @@
               </a:lnSpc>
               <a:buNone/>
             </a:pPr>
-            <a:endParaRPr lang="en-US" sz="1200" dirty="0"/>
-          </a:p>
-          <a:p>
-            <a:pPr indent="0" marL="0">
-              <a:lnSpc>
-                <a:spcPct val="115000"/>
-              </a:lnSpc>
-              <a:buNone/>
-            </a:pPr>
-            <a:r>
-              <a:rPr lang="en-US" sz="1200" dirty="0">
+            <a:endParaRPr lang="en-US" sz="901" dirty="0"/>
+          </a:p>
+          <a:p>
+            <a:pPr indent="0" marL="0">
+              <a:lnSpc>
+                <a:spcPct val="115000"/>
+              </a:lnSpc>
+              <a:buNone/>
+            </a:pPr>
+            <a:r>
+              <a:rPr lang="en-US" sz="901" dirty="0">
                 <a:solidFill>
                   <a:srgbClr val="E5E7EB"/>
                 </a:solidFill>
@@ -11700,7 +11700,7 @@
               <a:buNone/>
             </a:pPr>
             <a:r>
-              <a:rPr lang="en-US" sz="1200" b="1" dirty="0">
+              <a:rPr lang="en-US" sz="901" b="1" dirty="0">
                 <a:solidFill>
                   <a:srgbClr val="93C5FD"/>
                 </a:solidFill>
@@ -11717,7 +11717,7 @@
               <a:buNone/>
             </a:pPr>
             <a:r>
-              <a:rPr lang="en-US" sz="1200" dirty="0">
+              <a:rPr lang="en-US" sz="901" dirty="0">
                 <a:solidFill>
                   <a:srgbClr val="E5E7EB"/>
                 </a:solidFill>
@@ -11733,17 +11733,17 @@
               </a:lnSpc>
               <a:buNone/>
             </a:pPr>
-            <a:endParaRPr lang="en-US" sz="1200" dirty="0"/>
-          </a:p>
-          <a:p>
-            <a:pPr indent="0" marL="0">
-              <a:lnSpc>
-                <a:spcPct val="115000"/>
-              </a:lnSpc>
-              <a:buNone/>
-            </a:pPr>
-            <a:r>
-              <a:rPr lang="en-US" sz="1200" b="1" dirty="0">
+            <a:endParaRPr lang="en-US" sz="901" dirty="0"/>
+          </a:p>
+          <a:p>
+            <a:pPr indent="0" marL="0">
+              <a:lnSpc>
+                <a:spcPct val="115000"/>
+              </a:lnSpc>
+              <a:buNone/>
+            </a:pPr>
+            <a:r>
+              <a:rPr lang="en-US" sz="901" b="1" dirty="0">
                 <a:solidFill>
                   <a:srgbClr val="93C5FD"/>
                 </a:solidFill>
@@ -11760,7 +11760,7 @@
               <a:buNone/>
             </a:pPr>
             <a:r>
-              <a:rPr lang="en-US" sz="1200" dirty="0">
+              <a:rPr lang="en-US" sz="901" dirty="0">
                 <a:solidFill>
                   <a:srgbClr val="E5E7EB"/>
                 </a:solidFill>
@@ -11777,7 +11777,7 @@
               <a:buNone/>
             </a:pPr>
             <a:r>
-              <a:rPr lang="en-US" sz="1200" b="1" dirty="0">
+              <a:rPr lang="en-US" sz="901" b="1" dirty="0">
                 <a:solidFill>
                   <a:srgbClr val="93C5FD"/>
                 </a:solidFill>
@@ -11794,7 +11794,7 @@
               <a:buNone/>
             </a:pPr>
             <a:r>
-              <a:rPr lang="en-US" sz="1200" dirty="0">
+              <a:rPr lang="en-US" sz="901" dirty="0">
                 <a:solidFill>
                   <a:srgbClr val="E5E7EB"/>
                 </a:solidFill>
@@ -11804,7 +11804,7 @@
               </a:rPr>
               <a:t>(nums))</a:t>
             </a:r>
-            <a:endParaRPr lang="en-US" sz="1200" dirty="0"/>
+            <a:endParaRPr lang="en-US" sz="901" dirty="0"/>
           </a:p>
         </p:txBody>
       </p:sp>
@@ -11902,7 +11902,7 @@
               <a:buNone/>
             </a:pPr>
             <a:r>
-              <a:rPr lang="en-US" sz="1200" dirty="0">
+              <a:rPr lang="en-US" sz="1014" dirty="0">
                 <a:solidFill>
                   <a:srgbClr val="0F172A"/>
                 </a:solidFill>
@@ -11912,7 +11912,7 @@
               </a:rPr>
               <a:t>[80, 90, 75] 245</a:t>
             </a:r>
-            <a:endParaRPr lang="en-US" sz="1200" dirty="0"/>
+            <a:endParaRPr lang="en-US" sz="1014" dirty="0"/>
           </a:p>
         </p:txBody>
       </p:sp>
@@ -13243,7 +13243,7 @@
               <a:buNone/>
             </a:pPr>
             <a:r>
-              <a:rPr lang="en-US" sz="1150" dirty="0">
+              <a:rPr lang="en-US" sz="1000" dirty="0">
                 <a:solidFill>
                   <a:srgbClr val="334155"/>
                 </a:solidFill>
@@ -13253,7 +13253,7 @@
               </a:rPr>
               <a:t>print()  ·  type()</a:t>
             </a:r>
-            <a:endParaRPr lang="en-US" sz="1150" dirty="0"/>
+            <a:endParaRPr lang="en-US" sz="1000" dirty="0"/>
           </a:p>
         </p:txBody>
       </p:sp>
@@ -13426,7 +13426,7 @@
               <a:buNone/>
             </a:pPr>
             <a:r>
-              <a:rPr lang="en-US" sz="1150" dirty="0">
+              <a:rPr lang="en-US" sz="1000" dirty="0">
                 <a:solidFill>
                   <a:srgbClr val="334155"/>
                 </a:solidFill>
@@ -13436,7 +13436,7 @@
               </a:rPr>
               <a:t>int()  ·  float()</a:t>
             </a:r>
-            <a:endParaRPr lang="en-US" sz="1150" dirty="0"/>
+            <a:endParaRPr lang="en-US" sz="1000" dirty="0"/>
           </a:p>
         </p:txBody>
       </p:sp>
@@ -13609,7 +13609,7 @@
               <a:buNone/>
             </a:pPr>
             <a:r>
-              <a:rPr lang="en-US" sz="1150" dirty="0">
+              <a:rPr lang="en-US" sz="1000" dirty="0">
                 <a:solidFill>
                   <a:srgbClr val="334155"/>
                 </a:solidFill>
@@ -13619,7 +13619,7 @@
               </a:rPr>
               <a:t>sum()  ·  len()</a:t>
             </a:r>
-            <a:endParaRPr lang="en-US" sz="1150" dirty="0"/>
+            <a:endParaRPr lang="en-US" sz="1000" dirty="0"/>
           </a:p>
         </p:txBody>
       </p:sp>
@@ -13792,7 +13792,7 @@
               <a:buNone/>
             </a:pPr>
             <a:r>
-              <a:rPr lang="en-US" sz="1150" dirty="0">
+              <a:rPr lang="en-US" sz="1000" dirty="0">
                 <a:solidFill>
                   <a:srgbClr val="334155"/>
                 </a:solidFill>
@@ -13802,7 +13802,7 @@
               </a:rPr>
               <a:t>range()  ·  enumerate()</a:t>
             </a:r>
-            <a:endParaRPr lang="en-US" sz="1150" dirty="0"/>
+            <a:endParaRPr lang="en-US" sz="1000" dirty="0"/>
           </a:p>
         </p:txBody>
       </p:sp>
@@ -13975,7 +13975,7 @@
               <a:buNone/>
             </a:pPr>
             <a:r>
-              <a:rPr lang="en-US" sz="1150" dirty="0">
+              <a:rPr lang="en-US" sz="1000" dirty="0">
                 <a:solidFill>
                   <a:srgbClr val="334155"/>
                 </a:solidFill>
@@ -13985,7 +13985,7 @@
               </a:rPr>
               <a:t>if-elif  ·  else</a:t>
             </a:r>
-            <a:endParaRPr lang="en-US" sz="1150" dirty="0"/>
+            <a:endParaRPr lang="en-US" sz="1000" dirty="0"/>
           </a:p>
         </p:txBody>
       </p:sp>
@@ -14163,7 +14163,7 @@
               <a:buNone/>
             </a:pPr>
             <a:r>
-              <a:rPr lang="en-US" sz="2600" b="1" dirty="0">
+              <a:rPr lang="en-US" sz="2100" b="1" dirty="0">
                 <a:solidFill>
                   <a:srgbClr val="FFFFFF"/>
                 </a:solidFill>
@@ -14173,7 +14173,7 @@
               </a:rPr>
               <a:t>계산하려면 숫자여야 한다 — int 와 float</a:t>
             </a:r>
-            <a:endParaRPr lang="en-US" sz="2600" dirty="0"/>
+            <a:endParaRPr lang="en-US" sz="2100" dirty="0"/>
           </a:p>
         </p:txBody>
       </p:sp>
@@ -15664,7 +15664,7 @@
               <a:buNone/>
             </a:pPr>
             <a:r>
-              <a:rPr lang="en-US" sz="1289" dirty="0">
+              <a:rPr lang="en-US" sz="1554" dirty="0">
                 <a:solidFill>
                   <a:srgbClr val="E5E7EB"/>
                 </a:solidFill>
@@ -15680,17 +15680,17 @@
               </a:lnSpc>
               <a:buNone/>
             </a:pPr>
-            <a:endParaRPr lang="en-US" sz="1289" dirty="0"/>
-          </a:p>
-          <a:p>
-            <a:pPr indent="0" marL="0">
-              <a:lnSpc>
-                <a:spcPct val="115000"/>
-              </a:lnSpc>
-              <a:buNone/>
-            </a:pPr>
-            <a:r>
-              <a:rPr lang="en-US" sz="1289" dirty="0">
+            <a:endParaRPr lang="en-US" sz="1554" dirty="0"/>
+          </a:p>
+          <a:p>
+            <a:pPr indent="0" marL="0">
+              <a:lnSpc>
+                <a:spcPct val="115000"/>
+              </a:lnSpc>
+              <a:buNone/>
+            </a:pPr>
+            <a:r>
+              <a:rPr lang="en-US" sz="1554" dirty="0">
                 <a:solidFill>
                   <a:srgbClr val="E5E7EB"/>
                 </a:solidFill>
@@ -15707,7 +15707,7 @@
               <a:buNone/>
             </a:pPr>
             <a:r>
-              <a:rPr lang="en-US" sz="1289" b="1" dirty="0">
+              <a:rPr lang="en-US" sz="1554" b="1" dirty="0">
                 <a:solidFill>
                   <a:srgbClr val="93C5FD"/>
                 </a:solidFill>
@@ -15724,7 +15724,7 @@
               <a:buNone/>
             </a:pPr>
             <a:r>
-              <a:rPr lang="en-US" sz="1289" dirty="0">
+              <a:rPr lang="en-US" sz="1554" dirty="0">
                 <a:solidFill>
                   <a:srgbClr val="E5E7EB"/>
                 </a:solidFill>
@@ -15740,17 +15740,17 @@
               </a:lnSpc>
               <a:buNone/>
             </a:pPr>
-            <a:endParaRPr lang="en-US" sz="1289" dirty="0"/>
-          </a:p>
-          <a:p>
-            <a:pPr indent="0" marL="0">
-              <a:lnSpc>
-                <a:spcPct val="115000"/>
-              </a:lnSpc>
-              <a:buNone/>
-            </a:pPr>
-            <a:r>
-              <a:rPr lang="en-US" sz="1289" b="1" dirty="0">
+            <a:endParaRPr lang="en-US" sz="1554" dirty="0"/>
+          </a:p>
+          <a:p>
+            <a:pPr indent="0" marL="0">
+              <a:lnSpc>
+                <a:spcPct val="115000"/>
+              </a:lnSpc>
+              <a:buNone/>
+            </a:pPr>
+            <a:r>
+              <a:rPr lang="en-US" sz="1554" b="1" dirty="0">
                 <a:solidFill>
                   <a:srgbClr val="93C5FD"/>
                 </a:solidFill>
@@ -15767,7 +15767,7 @@
               <a:buNone/>
             </a:pPr>
             <a:r>
-              <a:rPr lang="en-US" sz="1289" dirty="0">
+              <a:rPr lang="en-US" sz="1554" dirty="0">
                 <a:solidFill>
                   <a:srgbClr val="E5E7EB"/>
                 </a:solidFill>
@@ -15784,7 +15784,7 @@
               <a:buNone/>
             </a:pPr>
             <a:r>
-              <a:rPr lang="en-US" sz="1289" dirty="0">
+              <a:rPr lang="en-US" sz="1554" dirty="0">
                 <a:solidFill>
                   <a:srgbClr val="FCD34D"/>
                 </a:solidFill>
@@ -15801,7 +15801,7 @@
               <a:buNone/>
             </a:pPr>
             <a:r>
-              <a:rPr lang="en-US" sz="1289" dirty="0">
+              <a:rPr lang="en-US" sz="1554" dirty="0">
                 <a:solidFill>
                   <a:srgbClr val="E5E7EB"/>
                 </a:solidFill>
@@ -15817,17 +15817,17 @@
               </a:lnSpc>
               <a:buNone/>
             </a:pPr>
-            <a:endParaRPr lang="en-US" sz="1289" dirty="0"/>
-          </a:p>
-          <a:p>
-            <a:pPr indent="0" marL="0">
-              <a:lnSpc>
-                <a:spcPct val="115000"/>
-              </a:lnSpc>
-              <a:buNone/>
-            </a:pPr>
-            <a:r>
-              <a:rPr lang="en-US" sz="1289" b="1" dirty="0">
+            <a:endParaRPr lang="en-US" sz="1554" dirty="0"/>
+          </a:p>
+          <a:p>
+            <a:pPr indent="0" marL="0">
+              <a:lnSpc>
+                <a:spcPct val="115000"/>
+              </a:lnSpc>
+              <a:buNone/>
+            </a:pPr>
+            <a:r>
+              <a:rPr lang="en-US" sz="1554" b="1" dirty="0">
                 <a:solidFill>
                   <a:srgbClr val="93C5FD"/>
                 </a:solidFill>
@@ -15844,7 +15844,7 @@
               <a:buNone/>
             </a:pPr>
             <a:r>
-              <a:rPr lang="en-US" sz="1289" dirty="0">
+              <a:rPr lang="en-US" sz="1554" dirty="0">
                 <a:solidFill>
                   <a:srgbClr val="E5E7EB"/>
                 </a:solidFill>
@@ -15861,7 +15861,7 @@
               <a:buNone/>
             </a:pPr>
             <a:r>
-              <a:rPr lang="en-US" sz="1289" b="1" dirty="0">
+              <a:rPr lang="en-US" sz="1554" b="1" dirty="0">
                 <a:solidFill>
                   <a:srgbClr val="93C5FD"/>
                 </a:solidFill>
@@ -15878,7 +15878,7 @@
               <a:buNone/>
             </a:pPr>
             <a:r>
-              <a:rPr lang="en-US" sz="1289" dirty="0">
+              <a:rPr lang="en-US" sz="1554" dirty="0">
                 <a:solidFill>
                   <a:srgbClr val="E5E7EB"/>
                 </a:solidFill>
@@ -15895,7 +15895,7 @@
               <a:buNone/>
             </a:pPr>
             <a:r>
-              <a:rPr lang="en-US" sz="1289" dirty="0">
+              <a:rPr lang="en-US" sz="1554" dirty="0">
                 <a:solidFill>
                   <a:srgbClr val="94A3B8"/>
                 </a:solidFill>
@@ -15911,17 +15911,17 @@
               </a:lnSpc>
               <a:buNone/>
             </a:pPr>
-            <a:endParaRPr lang="en-US" sz="1289" dirty="0"/>
-          </a:p>
-          <a:p>
-            <a:pPr indent="0" marL="0">
-              <a:lnSpc>
-                <a:spcPct val="115000"/>
-              </a:lnSpc>
-              <a:buNone/>
-            </a:pPr>
-            <a:r>
-              <a:rPr lang="en-US" sz="1289" b="1" dirty="0">
+            <a:endParaRPr lang="en-US" sz="1554" dirty="0"/>
+          </a:p>
+          <a:p>
+            <a:pPr indent="0" marL="0">
+              <a:lnSpc>
+                <a:spcPct val="115000"/>
+              </a:lnSpc>
+              <a:buNone/>
+            </a:pPr>
+            <a:r>
+              <a:rPr lang="en-US" sz="1554" b="1" dirty="0">
                 <a:solidFill>
                   <a:srgbClr val="93C5FD"/>
                 </a:solidFill>
@@ -15938,7 +15938,7 @@
               <a:buNone/>
             </a:pPr>
             <a:r>
-              <a:rPr lang="en-US" sz="1289" dirty="0">
+              <a:rPr lang="en-US" sz="1554" dirty="0">
                 <a:solidFill>
                   <a:srgbClr val="E5E7EB"/>
                 </a:solidFill>
@@ -15955,7 +15955,7 @@
               <a:buNone/>
             </a:pPr>
             <a:r>
-              <a:rPr lang="en-US" sz="1289" b="1" dirty="0">
+              <a:rPr lang="en-US" sz="1554" b="1" dirty="0">
                 <a:solidFill>
                   <a:srgbClr val="93C5FD"/>
                 </a:solidFill>
@@ -15972,7 +15972,7 @@
               <a:buNone/>
             </a:pPr>
             <a:r>
-              <a:rPr lang="en-US" sz="1289" dirty="0">
+              <a:rPr lang="en-US" sz="1554" dirty="0">
                 <a:solidFill>
                   <a:srgbClr val="E5E7EB"/>
                 </a:solidFill>
@@ -15989,7 +15989,7 @@
               <a:buNone/>
             </a:pPr>
             <a:r>
-              <a:rPr lang="en-US" sz="1289" dirty="0">
+              <a:rPr lang="en-US" sz="1554" dirty="0">
                 <a:solidFill>
                   <a:srgbClr val="FCD34D"/>
                 </a:solidFill>
@@ -16006,7 +16006,7 @@
               <a:buNone/>
             </a:pPr>
             <a:r>
-              <a:rPr lang="en-US" sz="1289" dirty="0">
+              <a:rPr lang="en-US" sz="1554" dirty="0">
                 <a:solidFill>
                   <a:srgbClr val="E5E7EB"/>
                 </a:solidFill>
@@ -16023,7 +16023,7 @@
               <a:buNone/>
             </a:pPr>
             <a:r>
-              <a:rPr lang="en-US" sz="1289" dirty="0">
+              <a:rPr lang="en-US" sz="1554" dirty="0">
                 <a:solidFill>
                   <a:srgbClr val="FCD34D"/>
                 </a:solidFill>
@@ -16040,7 +16040,7 @@
               <a:buNone/>
             </a:pPr>
             <a:r>
-              <a:rPr lang="en-US" sz="1289" dirty="0">
+              <a:rPr lang="en-US" sz="1554" dirty="0">
                 <a:solidFill>
                   <a:srgbClr val="E5E7EB"/>
                 </a:solidFill>
@@ -16057,7 +16057,7 @@
               <a:buNone/>
             </a:pPr>
             <a:r>
-              <a:rPr lang="en-US" sz="1289" dirty="0">
+              <a:rPr lang="en-US" sz="1554" dirty="0">
                 <a:solidFill>
                   <a:srgbClr val="94A3B8"/>
                 </a:solidFill>
@@ -16067,7 +16067,7 @@
               </a:rPr>
               <a:t># 글자는 에러</a:t>
             </a:r>
-            <a:endParaRPr lang="en-US" sz="1289" dirty="0"/>
+            <a:endParaRPr lang="en-US" sz="1554" dirty="0"/>
           </a:p>
         </p:txBody>
       </p:sp>
@@ -16165,7 +16165,7 @@
               <a:buNone/>
             </a:pPr>
             <a:r>
-              <a:rPr lang="en-US" sz="1400" dirty="0">
+              <a:rPr lang="en-US" sz="1268" dirty="0">
                 <a:solidFill>
                   <a:srgbClr val="0F172A"/>
                 </a:solidFill>
@@ -16175,17 +16175,17 @@
               </a:rPr>
               <a:t>총점: 340</a:t>
             </a:r>
-            <a:endParaRPr lang="en-US" sz="1400" dirty="0"/>
-          </a:p>
-          <a:p>
-            <a:pPr indent="0" marL="0">
-              <a:lnSpc>
-                <a:spcPct val="115000"/>
-              </a:lnSpc>
-              <a:buNone/>
-            </a:pPr>
-            <a:r>
-              <a:rPr lang="en-US" sz="1400" dirty="0">
+            <a:endParaRPr lang="en-US" sz="1268" dirty="0"/>
+          </a:p>
+          <a:p>
+            <a:pPr indent="0" marL="0">
+              <a:lnSpc>
+                <a:spcPct val="115000"/>
+              </a:lnSpc>
+              <a:buNone/>
+            </a:pPr>
+            <a:r>
+              <a:rPr lang="en-US" sz="1268" dirty="0">
                 <a:solidFill>
                   <a:srgbClr val="0F172A"/>
                 </a:solidFill>
@@ -16195,17 +16195,17 @@
               </a:rPr>
               <a:t>4.0</a:t>
             </a:r>
-            <a:endParaRPr lang="en-US" sz="1400" dirty="0"/>
-          </a:p>
-          <a:p>
-            <a:pPr indent="0" marL="0">
-              <a:lnSpc>
-                <a:spcPct val="115000"/>
-              </a:lnSpc>
-              <a:buNone/>
-            </a:pPr>
-            <a:r>
-              <a:rPr lang="en-US" sz="1400" dirty="0">
+            <a:endParaRPr lang="en-US" sz="1268" dirty="0"/>
+          </a:p>
+          <a:p>
+            <a:pPr indent="0" marL="0">
+              <a:lnSpc>
+                <a:spcPct val="115000"/>
+              </a:lnSpc>
+              <a:buNone/>
+            </a:pPr>
+            <a:r>
+              <a:rPr lang="en-US" sz="1268" dirty="0">
                 <a:solidFill>
                   <a:srgbClr val="0F172A"/>
                 </a:solidFill>
@@ -16215,7 +16215,7 @@
               </a:rPr>
               <a:t>TypeError: unsupported operand …</a:t>
             </a:r>
-            <a:endParaRPr lang="en-US" sz="1400" dirty="0"/>
+            <a:endParaRPr lang="en-US" sz="1268" dirty="0"/>
           </a:p>
         </p:txBody>
       </p:sp>
@@ -16571,7 +16571,7 @@
               <a:buNone/>
             </a:pPr>
             <a:r>
-              <a:rPr lang="en-US" sz="1396" dirty="0">
+              <a:rPr lang="en-US" sz="1600" dirty="0">
                 <a:solidFill>
                   <a:srgbClr val="E5E7EB"/>
                 </a:solidFill>
@@ -16587,17 +16587,17 @@
               </a:lnSpc>
               <a:buNone/>
             </a:pPr>
-            <a:endParaRPr lang="en-US" sz="1396" dirty="0"/>
-          </a:p>
-          <a:p>
-            <a:pPr indent="0" marL="0">
-              <a:lnSpc>
-                <a:spcPct val="115000"/>
-              </a:lnSpc>
-              <a:buNone/>
-            </a:pPr>
-            <a:r>
-              <a:rPr lang="en-US" sz="1396" b="1" dirty="0">
+            <a:endParaRPr lang="en-US" sz="1600" dirty="0"/>
+          </a:p>
+          <a:p>
+            <a:pPr indent="0" marL="0">
+              <a:lnSpc>
+                <a:spcPct val="115000"/>
+              </a:lnSpc>
+              <a:buNone/>
+            </a:pPr>
+            <a:r>
+              <a:rPr lang="en-US" sz="1600" b="1" dirty="0">
                 <a:solidFill>
                   <a:srgbClr val="93C5FD"/>
                 </a:solidFill>
@@ -16614,7 +16614,7 @@
               <a:buNone/>
             </a:pPr>
             <a:r>
-              <a:rPr lang="en-US" sz="1396" dirty="0">
+              <a:rPr lang="en-US" sz="1600" dirty="0">
                 <a:solidFill>
                   <a:srgbClr val="E5E7EB"/>
                 </a:solidFill>
@@ -16631,7 +16631,7 @@
               <a:buNone/>
             </a:pPr>
             <a:r>
-              <a:rPr lang="en-US" sz="1396" b="1" dirty="0">
+              <a:rPr lang="en-US" sz="1600" b="1" dirty="0">
                 <a:solidFill>
                   <a:srgbClr val="93C5FD"/>
                 </a:solidFill>
@@ -16648,7 +16648,7 @@
               <a:buNone/>
             </a:pPr>
             <a:r>
-              <a:rPr lang="en-US" sz="1396" dirty="0">
+              <a:rPr lang="en-US" sz="1600" dirty="0">
                 <a:solidFill>
                   <a:srgbClr val="E5E7EB"/>
                 </a:solidFill>
@@ -16665,7 +16665,7 @@
               <a:buNone/>
             </a:pPr>
             <a:r>
-              <a:rPr lang="en-US" sz="1396" dirty="0">
+              <a:rPr lang="en-US" sz="1600" dirty="0">
                 <a:solidFill>
                   <a:srgbClr val="94A3B8"/>
                 </a:solidFill>
@@ -16681,17 +16681,17 @@
               </a:lnSpc>
               <a:buNone/>
             </a:pPr>
-            <a:endParaRPr lang="en-US" sz="1396" dirty="0"/>
-          </a:p>
-          <a:p>
-            <a:pPr indent="0" marL="0">
-              <a:lnSpc>
-                <a:spcPct val="115000"/>
-              </a:lnSpc>
-              <a:buNone/>
-            </a:pPr>
-            <a:r>
-              <a:rPr lang="en-US" sz="1396" b="1" dirty="0">
+            <a:endParaRPr lang="en-US" sz="1600" dirty="0"/>
+          </a:p>
+          <a:p>
+            <a:pPr indent="0" marL="0">
+              <a:lnSpc>
+                <a:spcPct val="115000"/>
+              </a:lnSpc>
+              <a:buNone/>
+            </a:pPr>
+            <a:r>
+              <a:rPr lang="en-US" sz="1600" b="1" dirty="0">
                 <a:solidFill>
                   <a:srgbClr val="93C5FD"/>
                 </a:solidFill>
@@ -16708,7 +16708,7 @@
               <a:buNone/>
             </a:pPr>
             <a:r>
-              <a:rPr lang="en-US" sz="1396" dirty="0">
+              <a:rPr lang="en-US" sz="1600" dirty="0">
                 <a:solidFill>
                   <a:srgbClr val="E5E7EB"/>
                 </a:solidFill>
@@ -16725,7 +16725,7 @@
               <a:buNone/>
             </a:pPr>
             <a:r>
-              <a:rPr lang="en-US" sz="1396" b="1" dirty="0">
+              <a:rPr lang="en-US" sz="1600" b="1" dirty="0">
                 <a:solidFill>
                   <a:srgbClr val="93C5FD"/>
                 </a:solidFill>
@@ -16742,7 +16742,7 @@
               <a:buNone/>
             </a:pPr>
             <a:r>
-              <a:rPr lang="en-US" sz="1396" dirty="0">
+              <a:rPr lang="en-US" sz="1600" dirty="0">
                 <a:solidFill>
                   <a:srgbClr val="E5E7EB"/>
                 </a:solidFill>
@@ -16759,7 +16759,7 @@
               <a:buNone/>
             </a:pPr>
             <a:r>
-              <a:rPr lang="en-US" sz="1396" dirty="0">
+              <a:rPr lang="en-US" sz="1600" dirty="0">
                 <a:solidFill>
                   <a:srgbClr val="FCD34D"/>
                 </a:solidFill>
@@ -16776,7 +16776,7 @@
               <a:buNone/>
             </a:pPr>
             <a:r>
-              <a:rPr lang="en-US" sz="1396" dirty="0">
+              <a:rPr lang="en-US" sz="1600" dirty="0">
                 <a:solidFill>
                   <a:srgbClr val="E5E7EB"/>
                 </a:solidFill>
@@ -16793,7 +16793,7 @@
               <a:buNone/>
             </a:pPr>
             <a:r>
-              <a:rPr lang="en-US" sz="1396" dirty="0">
+              <a:rPr lang="en-US" sz="1600" dirty="0">
                 <a:solidFill>
                   <a:srgbClr val="94A3B8"/>
                 </a:solidFill>
@@ -16809,17 +16809,17 @@
               </a:lnSpc>
               <a:buNone/>
             </a:pPr>
-            <a:endParaRPr lang="en-US" sz="1396" dirty="0"/>
-          </a:p>
-          <a:p>
-            <a:pPr indent="0" marL="0">
-              <a:lnSpc>
-                <a:spcPct val="115000"/>
-              </a:lnSpc>
-              <a:buNone/>
-            </a:pPr>
-            <a:r>
-              <a:rPr lang="en-US" sz="1396" b="1" dirty="0">
+            <a:endParaRPr lang="en-US" sz="1600" dirty="0"/>
+          </a:p>
+          <a:p>
+            <a:pPr indent="0" marL="0">
+              <a:lnSpc>
+                <a:spcPct val="115000"/>
+              </a:lnSpc>
+              <a:buNone/>
+            </a:pPr>
+            <a:r>
+              <a:rPr lang="en-US" sz="1600" b="1" dirty="0">
                 <a:solidFill>
                   <a:srgbClr val="93C5FD"/>
                 </a:solidFill>
@@ -16836,7 +16836,7 @@
               <a:buNone/>
             </a:pPr>
             <a:r>
-              <a:rPr lang="en-US" sz="1396" dirty="0">
+              <a:rPr lang="en-US" sz="1600" dirty="0">
                 <a:solidFill>
                   <a:srgbClr val="E5E7EB"/>
                 </a:solidFill>
@@ -16853,7 +16853,7 @@
               <a:buNone/>
             </a:pPr>
             <a:r>
-              <a:rPr lang="en-US" sz="1396" b="1" dirty="0">
+              <a:rPr lang="en-US" sz="1600" b="1" dirty="0">
                 <a:solidFill>
                   <a:srgbClr val="93C5FD"/>
                 </a:solidFill>
@@ -16870,7 +16870,7 @@
               <a:buNone/>
             </a:pPr>
             <a:r>
-              <a:rPr lang="en-US" sz="1396" dirty="0">
+              <a:rPr lang="en-US" sz="1600" dirty="0">
                 <a:solidFill>
                   <a:srgbClr val="E5E7EB"/>
                 </a:solidFill>
@@ -16887,7 +16887,7 @@
               <a:buNone/>
             </a:pPr>
             <a:r>
-              <a:rPr lang="en-US" sz="1396" dirty="0">
+              <a:rPr lang="en-US" sz="1600" dirty="0">
                 <a:solidFill>
                   <a:srgbClr val="94A3B8"/>
                 </a:solidFill>
@@ -16897,7 +16897,7 @@
               </a:rPr>
               <a:t># 0</a:t>
             </a:r>
-            <a:endParaRPr lang="en-US" sz="1396" dirty="0"/>
+            <a:endParaRPr lang="en-US" sz="1600" dirty="0"/>
           </a:p>
         </p:txBody>
       </p:sp>
@@ -16995,7 +16995,7 @@
               <a:buNone/>
             </a:pPr>
             <a:r>
-              <a:rPr lang="en-US" sz="1400" dirty="0">
+              <a:rPr lang="en-US" sz="1268" dirty="0">
                 <a:solidFill>
                   <a:srgbClr val="0F172A"/>
                 </a:solidFill>
@@ -17005,17 +17005,17 @@
               </a:rPr>
               <a:t>4</a:t>
             </a:r>
-            <a:endParaRPr lang="en-US" sz="1400" dirty="0"/>
-          </a:p>
-          <a:p>
-            <a:pPr indent="0" marL="0">
-              <a:lnSpc>
-                <a:spcPct val="115000"/>
-              </a:lnSpc>
-              <a:buNone/>
-            </a:pPr>
-            <a:r>
-              <a:rPr lang="en-US" sz="1400" dirty="0">
+            <a:endParaRPr lang="en-US" sz="1268" dirty="0"/>
+          </a:p>
+          <a:p>
+            <a:pPr indent="0" marL="0">
+              <a:lnSpc>
+                <a:spcPct val="115000"/>
+              </a:lnSpc>
+              <a:buNone/>
+            </a:pPr>
+            <a:r>
+              <a:rPr lang="en-US" sz="1268" dirty="0">
                 <a:solidFill>
                   <a:srgbClr val="0F172A"/>
                 </a:solidFill>
@@ -17025,17 +17025,17 @@
               </a:rPr>
               <a:t>5</a:t>
             </a:r>
-            <a:endParaRPr lang="en-US" sz="1400" dirty="0"/>
-          </a:p>
-          <a:p>
-            <a:pPr indent="0" marL="0">
-              <a:lnSpc>
-                <a:spcPct val="115000"/>
-              </a:lnSpc>
-              <a:buNone/>
-            </a:pPr>
-            <a:r>
-              <a:rPr lang="en-US" sz="1400" dirty="0">
+            <a:endParaRPr lang="en-US" sz="1268" dirty="0"/>
+          </a:p>
+          <a:p>
+            <a:pPr indent="0" marL="0">
+              <a:lnSpc>
+                <a:spcPct val="115000"/>
+              </a:lnSpc>
+              <a:buNone/>
+            </a:pPr>
+            <a:r>
+              <a:rPr lang="en-US" sz="1268" dirty="0">
                 <a:solidFill>
                   <a:srgbClr val="0F172A"/>
                 </a:solidFill>
@@ -17045,7 +17045,7 @@
               </a:rPr>
               <a:t>0</a:t>
             </a:r>
-            <a:endParaRPr lang="en-US" sz="1400" dirty="0"/>
+            <a:endParaRPr lang="en-US" sz="1268" dirty="0"/>
           </a:p>
         </p:txBody>
       </p:sp>
@@ -17401,7 +17401,7 @@
               <a:buNone/>
             </a:pPr>
             <a:r>
-              <a:rPr lang="en-US" sz="1250" dirty="0">
+              <a:rPr lang="en-US" sz="1073" dirty="0">
                 <a:solidFill>
                   <a:srgbClr val="E5E7EB"/>
                 </a:solidFill>
@@ -17417,17 +17417,17 @@
               </a:lnSpc>
               <a:buNone/>
             </a:pPr>
-            <a:endParaRPr lang="en-US" sz="1250" dirty="0"/>
-          </a:p>
-          <a:p>
-            <a:pPr indent="0" marL="0">
-              <a:lnSpc>
-                <a:spcPct val="115000"/>
-              </a:lnSpc>
-              <a:buNone/>
-            </a:pPr>
-            <a:r>
-              <a:rPr lang="en-US" sz="1250" dirty="0">
+            <a:endParaRPr lang="en-US" sz="1073" dirty="0"/>
+          </a:p>
+          <a:p>
+            <a:pPr indent="0" marL="0">
+              <a:lnSpc>
+                <a:spcPct val="115000"/>
+              </a:lnSpc>
+              <a:buNone/>
+            </a:pPr>
+            <a:r>
+              <a:rPr lang="en-US" sz="1073" dirty="0">
                 <a:solidFill>
                   <a:srgbClr val="E5E7EB"/>
                 </a:solidFill>
@@ -17444,7 +17444,7 @@
               <a:buNone/>
             </a:pPr>
             <a:r>
-              <a:rPr lang="en-US" sz="1250" b="1" dirty="0">
+              <a:rPr lang="en-US" sz="1073" b="1" dirty="0">
                 <a:solidFill>
                   <a:srgbClr val="93C5FD"/>
                 </a:solidFill>
@@ -17461,7 +17461,7 @@
               <a:buNone/>
             </a:pPr>
             <a:r>
-              <a:rPr lang="en-US" sz="1250" dirty="0">
+              <a:rPr lang="en-US" sz="1073" dirty="0">
                 <a:solidFill>
                   <a:srgbClr val="E5E7EB"/>
                 </a:solidFill>
@@ -17477,17 +17477,17 @@
               </a:lnSpc>
               <a:buNone/>
             </a:pPr>
-            <a:endParaRPr lang="en-US" sz="1250" dirty="0"/>
-          </a:p>
-          <a:p>
-            <a:pPr indent="0" marL="0">
-              <a:lnSpc>
-                <a:spcPct val="115000"/>
-              </a:lnSpc>
-              <a:buNone/>
-            </a:pPr>
-            <a:r>
-              <a:rPr lang="en-US" sz="1250" dirty="0">
+            <a:endParaRPr lang="en-US" sz="1073" dirty="0"/>
+          </a:p>
+          <a:p>
+            <a:pPr indent="0" marL="0">
+              <a:lnSpc>
+                <a:spcPct val="115000"/>
+              </a:lnSpc>
+              <a:buNone/>
+            </a:pPr>
+            <a:r>
+              <a:rPr lang="en-US" sz="1073" dirty="0">
                 <a:solidFill>
                   <a:srgbClr val="E5E7EB"/>
                 </a:solidFill>
@@ -17504,7 +17504,7 @@
               <a:buNone/>
             </a:pPr>
             <a:r>
-              <a:rPr lang="en-US" sz="1250" b="1" dirty="0">
+              <a:rPr lang="en-US" sz="1073" b="1" dirty="0">
                 <a:solidFill>
                   <a:srgbClr val="93C5FD"/>
                 </a:solidFill>
@@ -17521,7 +17521,7 @@
               <a:buNone/>
             </a:pPr>
             <a:r>
-              <a:rPr lang="en-US" sz="1250" dirty="0">
+              <a:rPr lang="en-US" sz="1073" dirty="0">
                 <a:solidFill>
                   <a:srgbClr val="E5E7EB"/>
                 </a:solidFill>
@@ -17537,17 +17537,17 @@
               </a:lnSpc>
               <a:buNone/>
             </a:pPr>
-            <a:endParaRPr lang="en-US" sz="1250" dirty="0"/>
-          </a:p>
-          <a:p>
-            <a:pPr indent="0" marL="0">
-              <a:lnSpc>
-                <a:spcPct val="115000"/>
-              </a:lnSpc>
-              <a:buNone/>
-            </a:pPr>
-            <a:r>
-              <a:rPr lang="en-US" sz="1250" dirty="0">
+            <a:endParaRPr lang="en-US" sz="1073" dirty="0"/>
+          </a:p>
+          <a:p>
+            <a:pPr indent="0" marL="0">
+              <a:lnSpc>
+                <a:spcPct val="115000"/>
+              </a:lnSpc>
+              <a:buNone/>
+            </a:pPr>
+            <a:r>
+              <a:rPr lang="en-US" sz="1073" dirty="0">
                 <a:solidFill>
                   <a:srgbClr val="E5E7EB"/>
                 </a:solidFill>
@@ -17563,17 +17563,17 @@
               </a:lnSpc>
               <a:buNone/>
             </a:pPr>
-            <a:endParaRPr lang="en-US" sz="1250" dirty="0"/>
-          </a:p>
-          <a:p>
-            <a:pPr indent="0" marL="0">
-              <a:lnSpc>
-                <a:spcPct val="115000"/>
-              </a:lnSpc>
-              <a:buNone/>
-            </a:pPr>
-            <a:r>
-              <a:rPr lang="en-US" sz="1250" b="1" dirty="0">
+            <a:endParaRPr lang="en-US" sz="1073" dirty="0"/>
+          </a:p>
+          <a:p>
+            <a:pPr indent="0" marL="0">
+              <a:lnSpc>
+                <a:spcPct val="115000"/>
+              </a:lnSpc>
+              <a:buNone/>
+            </a:pPr>
+            <a:r>
+              <a:rPr lang="en-US" sz="1073" b="1" dirty="0">
                 <a:solidFill>
                   <a:srgbClr val="93C5FD"/>
                 </a:solidFill>
@@ -17590,7 +17590,7 @@
               <a:buNone/>
             </a:pPr>
             <a:r>
-              <a:rPr lang="en-US" sz="1250" dirty="0">
+              <a:rPr lang="en-US" sz="1073" dirty="0">
                 <a:solidFill>
                   <a:srgbClr val="E5E7EB"/>
                 </a:solidFill>
@@ -17607,7 +17607,7 @@
               <a:buNone/>
             </a:pPr>
             <a:r>
-              <a:rPr lang="en-US" sz="1250" dirty="0">
+              <a:rPr lang="en-US" sz="1073" dirty="0">
                 <a:solidFill>
                   <a:srgbClr val="FCD34D"/>
                 </a:solidFill>
@@ -17624,7 +17624,7 @@
               <a:buNone/>
             </a:pPr>
             <a:r>
-              <a:rPr lang="en-US" sz="1250" dirty="0">
+              <a:rPr lang="en-US" sz="1073" dirty="0">
                 <a:solidFill>
                   <a:srgbClr val="E5E7EB"/>
                 </a:solidFill>
@@ -17634,7 +17634,7 @@
               </a:rPr>
               <a:t>)</a:t>
             </a:r>
-            <a:endParaRPr lang="en-US" sz="1250" dirty="0"/>
+            <a:endParaRPr lang="en-US" sz="1073" dirty="0"/>
           </a:p>
         </p:txBody>
       </p:sp>
@@ -17732,7 +17732,7 @@
               <a:buNone/>
             </a:pPr>
             <a:r>
-              <a:rPr lang="en-US" sz="1200" dirty="0">
+              <a:rPr lang="en-US" sz="1014" dirty="0">
                 <a:solidFill>
                   <a:srgbClr val="0F172A"/>
                 </a:solidFill>
@@ -17742,7 +17742,7 @@
               </a:rPr>
               <a:t>총점: 340, 개수: 4, 평균: 85.0</a:t>
             </a:r>
-            <a:endParaRPr lang="en-US" sz="1200" dirty="0"/>
+            <a:endParaRPr lang="en-US" sz="1014" dirty="0"/>
           </a:p>
         </p:txBody>
       </p:sp>
@@ -18513,7 +18513,7 @@
               <a:buNone/>
             </a:pPr>
             <a:r>
-              <a:rPr lang="en-US" sz="1549" dirty="0">
+              <a:rPr lang="en-US" sz="1420" dirty="0">
                 <a:solidFill>
                   <a:srgbClr val="E5E7EB"/>
                 </a:solidFill>
@@ -18529,17 +18529,17 @@
               </a:lnSpc>
               <a:buNone/>
             </a:pPr>
-            <a:endParaRPr lang="en-US" sz="1549" dirty="0"/>
-          </a:p>
-          <a:p>
-            <a:pPr indent="0" marL="0">
-              <a:lnSpc>
-                <a:spcPct val="115000"/>
-              </a:lnSpc>
-              <a:buNone/>
-            </a:pPr>
-            <a:r>
-              <a:rPr lang="en-US" sz="1549" b="1" dirty="0">
+            <a:endParaRPr lang="en-US" sz="1420" dirty="0"/>
+          </a:p>
+          <a:p>
+            <a:pPr indent="0" marL="0">
+              <a:lnSpc>
+                <a:spcPct val="115000"/>
+              </a:lnSpc>
+              <a:buNone/>
+            </a:pPr>
+            <a:r>
+              <a:rPr lang="en-US" sz="1420" b="1" dirty="0">
                 <a:solidFill>
                   <a:srgbClr val="93C5FD"/>
                 </a:solidFill>
@@ -18556,7 +18556,7 @@
               <a:buNone/>
             </a:pPr>
             <a:r>
-              <a:rPr lang="en-US" sz="1549" dirty="0">
+              <a:rPr lang="en-US" sz="1420" dirty="0">
                 <a:solidFill>
                   <a:srgbClr val="E5E7EB"/>
                 </a:solidFill>
@@ -18573,7 +18573,7 @@
               <a:buNone/>
             </a:pPr>
             <a:r>
-              <a:rPr lang="en-US" sz="1549" b="1" dirty="0">
+              <a:rPr lang="en-US" sz="1420" b="1" dirty="0">
                 <a:solidFill>
                   <a:srgbClr val="93C5FD"/>
                 </a:solidFill>
@@ -18590,7 +18590,7 @@
               <a:buNone/>
             </a:pPr>
             <a:r>
-              <a:rPr lang="en-US" sz="1549" dirty="0">
+              <a:rPr lang="en-US" sz="1420" dirty="0">
                 <a:solidFill>
                   <a:srgbClr val="E5E7EB"/>
                 </a:solidFill>
@@ -18606,17 +18606,17 @@
               </a:lnSpc>
               <a:buNone/>
             </a:pPr>
-            <a:endParaRPr lang="en-US" sz="1549" dirty="0"/>
-          </a:p>
-          <a:p>
-            <a:pPr indent="0" marL="0">
-              <a:lnSpc>
-                <a:spcPct val="115000"/>
-              </a:lnSpc>
-              <a:buNone/>
-            </a:pPr>
-            <a:r>
-              <a:rPr lang="en-US" sz="1549" dirty="0">
+            <a:endParaRPr lang="en-US" sz="1420" dirty="0"/>
+          </a:p>
+          <a:p>
+            <a:pPr indent="0" marL="0">
+              <a:lnSpc>
+                <a:spcPct val="115000"/>
+              </a:lnSpc>
+              <a:buNone/>
+            </a:pPr>
+            <a:r>
+              <a:rPr lang="en-US" sz="1420" dirty="0">
                 <a:solidFill>
                   <a:srgbClr val="E5E7EB"/>
                 </a:solidFill>
@@ -18633,7 +18633,7 @@
               <a:buNone/>
             </a:pPr>
             <a:r>
-              <a:rPr lang="en-US" sz="1549" b="1" dirty="0">
+              <a:rPr lang="en-US" sz="1420" b="1" dirty="0">
                 <a:solidFill>
                   <a:srgbClr val="93C5FD"/>
                 </a:solidFill>
@@ -18650,7 +18650,7 @@
               <a:buNone/>
             </a:pPr>
             <a:r>
-              <a:rPr lang="en-US" sz="1549" dirty="0">
+              <a:rPr lang="en-US" sz="1420" dirty="0">
                 <a:solidFill>
                   <a:srgbClr val="E5E7EB"/>
                 </a:solidFill>
@@ -18667,7 +18667,7 @@
               <a:buNone/>
             </a:pPr>
             <a:r>
-              <a:rPr lang="en-US" sz="1549" b="1" dirty="0">
+              <a:rPr lang="en-US" sz="1420" b="1" dirty="0">
                 <a:solidFill>
                   <a:srgbClr val="93C5FD"/>
                 </a:solidFill>
@@ -18684,7 +18684,7 @@
               <a:buNone/>
             </a:pPr>
             <a:r>
-              <a:rPr lang="en-US" sz="1549" dirty="0">
+              <a:rPr lang="en-US" sz="1420" dirty="0">
                 <a:solidFill>
                   <a:srgbClr val="E5E7EB"/>
                 </a:solidFill>
@@ -18701,7 +18701,7 @@
               <a:buNone/>
             </a:pPr>
             <a:r>
-              <a:rPr lang="en-US" sz="1549" b="1" dirty="0">
+              <a:rPr lang="en-US" sz="1420" b="1" dirty="0">
                 <a:solidFill>
                   <a:srgbClr val="93C5FD"/>
                 </a:solidFill>
@@ -18718,7 +18718,7 @@
               <a:buNone/>
             </a:pPr>
             <a:r>
-              <a:rPr lang="en-US" sz="1549" dirty="0">
+              <a:rPr lang="en-US" sz="1420" dirty="0">
                 <a:solidFill>
                   <a:srgbClr val="E5E7EB"/>
                 </a:solidFill>
@@ -18734,17 +18734,17 @@
               </a:lnSpc>
               <a:buNone/>
             </a:pPr>
-            <a:endParaRPr lang="en-US" sz="1549" dirty="0"/>
-          </a:p>
-          <a:p>
-            <a:pPr indent="0" marL="0">
-              <a:lnSpc>
-                <a:spcPct val="115000"/>
-              </a:lnSpc>
-              <a:buNone/>
-            </a:pPr>
-            <a:r>
-              <a:rPr lang="en-US" sz="1549" b="1" dirty="0">
+            <a:endParaRPr lang="en-US" sz="1420" dirty="0"/>
+          </a:p>
+          <a:p>
+            <a:pPr indent="0" marL="0">
+              <a:lnSpc>
+                <a:spcPct val="115000"/>
+              </a:lnSpc>
+              <a:buNone/>
+            </a:pPr>
+            <a:r>
+              <a:rPr lang="en-US" sz="1420" b="1" dirty="0">
                 <a:solidFill>
                   <a:srgbClr val="93C5FD"/>
                 </a:solidFill>
@@ -18761,7 +18761,7 @@
               <a:buNone/>
             </a:pPr>
             <a:r>
-              <a:rPr lang="en-US" sz="1549" dirty="0">
+              <a:rPr lang="en-US" sz="1420" dirty="0">
                 <a:solidFill>
                   <a:srgbClr val="E5E7EB"/>
                 </a:solidFill>
@@ -18777,17 +18777,17 @@
               </a:lnSpc>
               <a:buNone/>
             </a:pPr>
-            <a:endParaRPr lang="en-US" sz="1549" dirty="0"/>
-          </a:p>
-          <a:p>
-            <a:pPr indent="0" marL="0">
-              <a:lnSpc>
-                <a:spcPct val="115000"/>
-              </a:lnSpc>
-              <a:buNone/>
-            </a:pPr>
-            <a:r>
-              <a:rPr lang="en-US" sz="1549" dirty="0">
+            <a:endParaRPr lang="en-US" sz="1420" dirty="0"/>
+          </a:p>
+          <a:p>
+            <a:pPr indent="0" marL="0">
+              <a:lnSpc>
+                <a:spcPct val="115000"/>
+              </a:lnSpc>
+              <a:buNone/>
+            </a:pPr>
+            <a:r>
+              <a:rPr lang="en-US" sz="1420" dirty="0">
                 <a:solidFill>
                   <a:srgbClr val="E5E7EB"/>
                 </a:solidFill>
@@ -18804,7 +18804,7 @@
               <a:buNone/>
             </a:pPr>
             <a:r>
-              <a:rPr lang="en-US" sz="1549" b="1" dirty="0">
+              <a:rPr lang="en-US" sz="1420" b="1" dirty="0">
                 <a:solidFill>
                   <a:srgbClr val="93C5FD"/>
                 </a:solidFill>
@@ -18821,7 +18821,7 @@
               <a:buNone/>
             </a:pPr>
             <a:r>
-              <a:rPr lang="en-US" sz="1549" dirty="0">
+              <a:rPr lang="en-US" sz="1420" dirty="0">
                 <a:solidFill>
                   <a:srgbClr val="E5E7EB"/>
                 </a:solidFill>
@@ -18838,7 +18838,7 @@
               <a:buNone/>
             </a:pPr>
             <a:r>
-              <a:rPr lang="en-US" sz="1549" dirty="0">
+              <a:rPr lang="en-US" sz="1420" dirty="0">
                 <a:solidFill>
                   <a:srgbClr val="FCD34D"/>
                 </a:solidFill>
@@ -18855,7 +18855,7 @@
               <a:buNone/>
             </a:pPr>
             <a:r>
-              <a:rPr lang="en-US" sz="1549" dirty="0">
+              <a:rPr lang="en-US" sz="1420" dirty="0">
                 <a:solidFill>
                   <a:srgbClr val="E5E7EB"/>
                 </a:solidFill>
@@ -18865,7 +18865,7 @@
               </a:rPr>
               <a:t>)</a:t>
             </a:r>
-            <a:endParaRPr lang="en-US" sz="1549" dirty="0"/>
+            <a:endParaRPr lang="en-US" sz="1420" dirty="0"/>
           </a:p>
         </p:txBody>
       </p:sp>
@@ -19004,7 +19004,7 @@
               <a:buNone/>
             </a:pPr>
             <a:r>
-              <a:rPr lang="en-US" sz="2800" b="1" dirty="0">
+              <a:rPr lang="en-US" sz="2300" b="1" dirty="0">
                 <a:solidFill>
                   <a:srgbClr val="0F172A"/>
                 </a:solidFill>
@@ -19014,7 +19014,7 @@
               </a:rPr>
               <a:t>AICE 실기 패턴 — 판다스 mean() 과 같은 답</a:t>
             </a:r>
-            <a:endParaRPr lang="en-US" sz="2800" dirty="0"/>
+            <a:endParaRPr lang="en-US" sz="2300" dirty="0"/>
           </a:p>
         </p:txBody>
       </p:sp>
@@ -19073,7 +19073,7 @@
               <a:buNone/>
             </a:pPr>
             <a:r>
-              <a:rPr lang="en-US" sz="1200" b="1" dirty="0">
+              <a:rPr lang="en-US" sz="1056" b="1" dirty="0">
                 <a:solidFill>
                   <a:srgbClr val="93C5FD"/>
                 </a:solidFill>
@@ -19090,7 +19090,7 @@
               <a:buNone/>
             </a:pPr>
             <a:r>
-              <a:rPr lang="en-US" sz="1200" dirty="0">
+              <a:rPr lang="en-US" sz="1056" dirty="0">
                 <a:solidFill>
                   <a:srgbClr val="E5E7EB"/>
                 </a:solidFill>
@@ -19107,7 +19107,7 @@
               <a:buNone/>
             </a:pPr>
             <a:r>
-              <a:rPr lang="en-US" sz="1200" b="1" dirty="0">
+              <a:rPr lang="en-US" sz="1056" b="1" dirty="0">
                 <a:solidFill>
                   <a:srgbClr val="93C5FD"/>
                 </a:solidFill>
@@ -19124,7 +19124,7 @@
               <a:buNone/>
             </a:pPr>
             <a:r>
-              <a:rPr lang="en-US" sz="1200" dirty="0">
+              <a:rPr lang="en-US" sz="1056" dirty="0">
                 <a:solidFill>
                   <a:srgbClr val="E5E7EB"/>
                 </a:solidFill>
@@ -19140,17 +19140,17 @@
               </a:lnSpc>
               <a:buNone/>
             </a:pPr>
-            <a:endParaRPr lang="en-US" sz="1200" dirty="0"/>
-          </a:p>
-          <a:p>
-            <a:pPr indent="0" marL="0">
-              <a:lnSpc>
-                <a:spcPct val="115000"/>
-              </a:lnSpc>
-              <a:buNone/>
-            </a:pPr>
-            <a:r>
-              <a:rPr lang="en-US" sz="1200" dirty="0">
+            <a:endParaRPr lang="en-US" sz="1056" dirty="0"/>
+          </a:p>
+          <a:p>
+            <a:pPr indent="0" marL="0">
+              <a:lnSpc>
+                <a:spcPct val="115000"/>
+              </a:lnSpc>
+              <a:buNone/>
+            </a:pPr>
+            <a:r>
+              <a:rPr lang="en-US" sz="1056" dirty="0">
                 <a:solidFill>
                   <a:srgbClr val="E5E7EB"/>
                 </a:solidFill>
@@ -19167,7 +19167,7 @@
               <a:buNone/>
             </a:pPr>
             <a:r>
-              <a:rPr lang="en-US" sz="1200" dirty="0">
+              <a:rPr lang="en-US" sz="1056" dirty="0">
                 <a:solidFill>
                   <a:srgbClr val="FCD34D"/>
                 </a:solidFill>
@@ -19184,7 +19184,7 @@
               <a:buNone/>
             </a:pPr>
             <a:r>
-              <a:rPr lang="en-US" sz="1200" dirty="0">
+              <a:rPr lang="en-US" sz="1056" dirty="0">
                 <a:solidFill>
                   <a:srgbClr val="E5E7EB"/>
                 </a:solidFill>
@@ -19200,26 +19200,26 @@
               </a:lnSpc>
               <a:buNone/>
             </a:pPr>
-            <a:endParaRPr lang="en-US" sz="1200" dirty="0"/>
-          </a:p>
-          <a:p>
-            <a:pPr indent="0" marL="0">
-              <a:lnSpc>
-                <a:spcPct val="115000"/>
-              </a:lnSpc>
-              <a:buNone/>
-            </a:pPr>
-            <a:endParaRPr lang="en-US" sz="1200" dirty="0"/>
-          </a:p>
-          <a:p>
-            <a:pPr indent="0" marL="0">
-              <a:lnSpc>
-                <a:spcPct val="115000"/>
-              </a:lnSpc>
-              <a:buNone/>
-            </a:pPr>
-            <a:r>
-              <a:rPr lang="en-US" sz="1200" b="1" dirty="0">
+            <a:endParaRPr lang="en-US" sz="1056" dirty="0"/>
+          </a:p>
+          <a:p>
+            <a:pPr indent="0" marL="0">
+              <a:lnSpc>
+                <a:spcPct val="115000"/>
+              </a:lnSpc>
+              <a:buNone/>
+            </a:pPr>
+            <a:endParaRPr lang="en-US" sz="1056" dirty="0"/>
+          </a:p>
+          <a:p>
+            <a:pPr indent="0" marL="0">
+              <a:lnSpc>
+                <a:spcPct val="115000"/>
+              </a:lnSpc>
+              <a:buNone/>
+            </a:pPr>
+            <a:r>
+              <a:rPr lang="en-US" sz="1056" b="1" dirty="0">
                 <a:solidFill>
                   <a:srgbClr val="93C5FD"/>
                 </a:solidFill>
@@ -19236,7 +19236,7 @@
               <a:buNone/>
             </a:pPr>
             <a:r>
-              <a:rPr lang="en-US" sz="1200" dirty="0">
+              <a:rPr lang="en-US" sz="1056" dirty="0">
                 <a:solidFill>
                   <a:srgbClr val="E5E7EB"/>
                 </a:solidFill>
@@ -19253,7 +19253,7 @@
               <a:buNone/>
             </a:pPr>
             <a:r>
-              <a:rPr lang="en-US" sz="1200" b="1" dirty="0">
+              <a:rPr lang="en-US" sz="1056" b="1" dirty="0">
                 <a:solidFill>
                   <a:srgbClr val="93C5FD"/>
                 </a:solidFill>
@@ -19270,7 +19270,7 @@
               <a:buNone/>
             </a:pPr>
             <a:r>
-              <a:rPr lang="en-US" sz="1200" dirty="0">
+              <a:rPr lang="en-US" sz="1056" dirty="0">
                 <a:solidFill>
                   <a:srgbClr val="E5E7EB"/>
                 </a:solidFill>
@@ -19287,7 +19287,7 @@
               <a:buNone/>
             </a:pPr>
             <a:r>
-              <a:rPr lang="en-US" sz="1200" dirty="0">
+              <a:rPr lang="en-US" sz="1056" dirty="0">
                 <a:solidFill>
                   <a:srgbClr val="FCD34D"/>
                 </a:solidFill>
@@ -19304,7 +19304,7 @@
               <a:buNone/>
             </a:pPr>
             <a:r>
-              <a:rPr lang="en-US" sz="1200" dirty="0">
+              <a:rPr lang="en-US" sz="1056" dirty="0">
                 <a:solidFill>
                   <a:srgbClr val="E5E7EB"/>
                 </a:solidFill>
@@ -19321,7 +19321,7 @@
               <a:buNone/>
             </a:pPr>
             <a:r>
-              <a:rPr lang="en-US" sz="1200" b="1" dirty="0">
+              <a:rPr lang="en-US" sz="1056" b="1" dirty="0">
                 <a:solidFill>
                   <a:srgbClr val="93C5FD"/>
                 </a:solidFill>
@@ -19338,7 +19338,7 @@
               <a:buNone/>
             </a:pPr>
             <a:r>
-              <a:rPr lang="en-US" sz="1200" dirty="0">
+              <a:rPr lang="en-US" sz="1056" dirty="0">
                 <a:solidFill>
                   <a:srgbClr val="E5E7EB"/>
                 </a:solidFill>
@@ -19355,7 +19355,7 @@
               <a:buNone/>
             </a:pPr>
             <a:r>
-              <a:rPr lang="en-US" sz="1200" dirty="0">
+              <a:rPr lang="en-US" sz="1056" dirty="0">
                 <a:solidFill>
                   <a:srgbClr val="FCD34D"/>
                 </a:solidFill>
@@ -19372,7 +19372,7 @@
               <a:buNone/>
             </a:pPr>
             <a:r>
-              <a:rPr lang="en-US" sz="1200" dirty="0">
+              <a:rPr lang="en-US" sz="1056" dirty="0">
                 <a:solidFill>
                   <a:srgbClr val="E5E7EB"/>
                 </a:solidFill>
@@ -19389,7 +19389,7 @@
               <a:buNone/>
             </a:pPr>
             <a:r>
-              <a:rPr lang="en-US" sz="1200" dirty="0">
+              <a:rPr lang="en-US" sz="1056" dirty="0">
                 <a:solidFill>
                   <a:srgbClr val="94A3B8"/>
                 </a:solidFill>
@@ -19405,17 +19405,17 @@
               </a:lnSpc>
               <a:buNone/>
             </a:pPr>
-            <a:endParaRPr lang="en-US" sz="1200" dirty="0"/>
-          </a:p>
-          <a:p>
-            <a:pPr indent="0" marL="0">
-              <a:lnSpc>
-                <a:spcPct val="115000"/>
-              </a:lnSpc>
-              <a:buNone/>
-            </a:pPr>
-            <a:r>
-              <a:rPr lang="en-US" sz="1200" b="1" dirty="0">
+            <a:endParaRPr lang="en-US" sz="1056" dirty="0"/>
+          </a:p>
+          <a:p>
+            <a:pPr indent="0" marL="0">
+              <a:lnSpc>
+                <a:spcPct val="115000"/>
+              </a:lnSpc>
+              <a:buNone/>
+            </a:pPr>
+            <a:r>
+              <a:rPr lang="en-US" sz="1056" b="1" dirty="0">
                 <a:solidFill>
                   <a:srgbClr val="93C5FD"/>
                 </a:solidFill>
@@ -19432,7 +19432,7 @@
               <a:buNone/>
             </a:pPr>
             <a:r>
-              <a:rPr lang="en-US" sz="1200" dirty="0">
+              <a:rPr lang="en-US" sz="1056" dirty="0">
                 <a:solidFill>
                   <a:srgbClr val="E5E7EB"/>
                 </a:solidFill>
@@ -19449,7 +19449,7 @@
               <a:buNone/>
             </a:pPr>
             <a:r>
-              <a:rPr lang="en-US" sz="1200" dirty="0">
+              <a:rPr lang="en-US" sz="1056" dirty="0">
                 <a:solidFill>
                   <a:srgbClr val="FCD34D"/>
                 </a:solidFill>
@@ -19466,7 +19466,7 @@
               <a:buNone/>
             </a:pPr>
             <a:r>
-              <a:rPr lang="en-US" sz="1200" dirty="0">
+              <a:rPr lang="en-US" sz="1056" dirty="0">
                 <a:solidFill>
                   <a:srgbClr val="E5E7EB"/>
                 </a:solidFill>
@@ -19483,7 +19483,7 @@
               <a:buNone/>
             </a:pPr>
             <a:r>
-              <a:rPr lang="en-US" sz="1200" dirty="0">
+              <a:rPr lang="en-US" sz="1056" dirty="0">
                 <a:solidFill>
                   <a:srgbClr val="94A3B8"/>
                 </a:solidFill>
@@ -19493,7 +19493,7 @@
               </a:rPr>
               <a:t># 85.0  판다스</a:t>
             </a:r>
-            <a:endParaRPr lang="en-US" sz="1200" dirty="0"/>
+            <a:endParaRPr lang="en-US" sz="1056" dirty="0"/>
           </a:p>
         </p:txBody>
       </p:sp>
@@ -19591,7 +19591,7 @@
               <a:buNone/>
             </a:pPr>
             <a:r>
-              <a:rPr lang="en-US" sz="1100" dirty="0">
+              <a:rPr lang="en-US" sz="761" dirty="0">
                 <a:solidFill>
                   <a:srgbClr val="0F172A"/>
                 </a:solidFill>
@@ -19601,17 +19601,17 @@
               </a:rPr>
               <a:t>85.0</a:t>
             </a:r>
-            <a:endParaRPr lang="en-US" sz="1100" dirty="0"/>
-          </a:p>
-          <a:p>
-            <a:pPr indent="0" marL="0">
-              <a:lnSpc>
-                <a:spcPct val="115000"/>
-              </a:lnSpc>
-              <a:buNone/>
-            </a:pPr>
-            <a:r>
-              <a:rPr lang="en-US" sz="1100" dirty="0">
+            <a:endParaRPr lang="en-US" sz="761" dirty="0"/>
+          </a:p>
+          <a:p>
+            <a:pPr indent="0" marL="0">
+              <a:lnSpc>
+                <a:spcPct val="115000"/>
+              </a:lnSpc>
+              <a:buNone/>
+            </a:pPr>
+            <a:r>
+              <a:rPr lang="en-US" sz="761" dirty="0">
                 <a:solidFill>
                   <a:srgbClr val="0F172A"/>
                 </a:solidFill>
@@ -19621,7 +19621,7 @@
               </a:rPr>
               <a:t>85.0</a:t>
             </a:r>
-            <a:endParaRPr lang="en-US" sz="1100" dirty="0"/>
+            <a:endParaRPr lang="en-US" sz="761" dirty="0"/>
           </a:p>
         </p:txBody>
       </p:sp>
@@ -20311,7 +20311,7 @@
                 <a:ea typeface="Malgun Gothic" pitchFamily="34" charset="-122"/>
                 <a:cs typeface="Malgun Gothic" pitchFamily="34" charset="-120"/>
               </a:rPr>
-              <a:t>「파이프라인 실행」 → 과목별 점수 도넛과 평균. 보너스를 50 으로 내리면 평균이 얼마인지 확인.</a:t>
+              <a:t>「파이프라인 실행」 → 점수 막대 네 개와 빨간 평균선(sum ÷ len). 보너스를 50 으로 내리면 선이 얼마로 내려오는지 확인.</a:t>
             </a:r>
             <a:endParaRPr lang="en-US" sz="1200" dirty="0"/>
           </a:p>
@@ -21699,7 +21699,7 @@
               <a:buNone/>
             </a:pPr>
             <a:r>
-              <a:rPr lang="en-US" sz="4000" b="1" dirty="0">
+              <a:rPr lang="en-US" sz="3200" b="1" dirty="0">
                 <a:solidFill>
                   <a:srgbClr val="FFFFFF"/>
                 </a:solidFill>
@@ -21709,7 +21709,7 @@
               </a:rPr>
               <a:t>연속 범위 생성과 순번 매기기</a:t>
             </a:r>
-            <a:endParaRPr lang="en-US" sz="4000" dirty="0"/>
+            <a:endParaRPr lang="en-US" sz="3200" dirty="0"/>
           </a:p>
         </p:txBody>
       </p:sp>
@@ -22531,7 +22531,7 @@
               <a:buNone/>
             </a:pPr>
             <a:r>
-              <a:rPr lang="en-US" sz="2800" b="1" dirty="0">
+              <a:rPr lang="en-US" sz="2300" b="1" dirty="0">
                 <a:solidFill>
                   <a:srgbClr val="0F172A"/>
                 </a:solidFill>
@@ -22541,7 +22541,7 @@
               </a:rPr>
               <a:t>range(start, stop, step) — 숫자를 뽑는다</a:t>
             </a:r>
-            <a:endParaRPr lang="en-US" sz="2800" dirty="0"/>
+            <a:endParaRPr lang="en-US" sz="2300" dirty="0"/>
           </a:p>
         </p:txBody>
       </p:sp>
@@ -22600,7 +22600,7 @@
               <a:buNone/>
             </a:pPr>
             <a:r>
-              <a:rPr lang="en-US" sz="1250" b="1" dirty="0">
+              <a:rPr lang="en-US" sz="1253" b="1" dirty="0">
                 <a:solidFill>
                   <a:srgbClr val="93C5FD"/>
                 </a:solidFill>
@@ -22617,7 +22617,7 @@
               <a:buNone/>
             </a:pPr>
             <a:r>
-              <a:rPr lang="en-US" sz="1250" dirty="0">
+              <a:rPr lang="en-US" sz="1253" dirty="0">
                 <a:solidFill>
                   <a:srgbClr val="E5E7EB"/>
                 </a:solidFill>
@@ -22634,7 +22634,7 @@
               <a:buNone/>
             </a:pPr>
             <a:r>
-              <a:rPr lang="en-US" sz="1250" b="1" dirty="0">
+              <a:rPr lang="en-US" sz="1253" b="1" dirty="0">
                 <a:solidFill>
                   <a:srgbClr val="93C5FD"/>
                 </a:solidFill>
@@ -22651,7 +22651,7 @@
               <a:buNone/>
             </a:pPr>
             <a:r>
-              <a:rPr lang="en-US" sz="1250" dirty="0">
+              <a:rPr lang="en-US" sz="1253" dirty="0">
                 <a:solidFill>
                   <a:srgbClr val="E5E7EB"/>
                 </a:solidFill>
@@ -22668,7 +22668,7 @@
               <a:buNone/>
             </a:pPr>
             <a:r>
-              <a:rPr lang="en-US" sz="1250" dirty="0">
+              <a:rPr lang="en-US" sz="1253" dirty="0">
                 <a:solidFill>
                   <a:srgbClr val="94A3B8"/>
                 </a:solidFill>
@@ -22684,17 +22684,17 @@
               </a:lnSpc>
               <a:buNone/>
             </a:pPr>
-            <a:endParaRPr lang="en-US" sz="1250" dirty="0"/>
-          </a:p>
-          <a:p>
-            <a:pPr indent="0" marL="0">
-              <a:lnSpc>
-                <a:spcPct val="115000"/>
-              </a:lnSpc>
-              <a:buNone/>
-            </a:pPr>
-            <a:r>
-              <a:rPr lang="en-US" sz="1250" b="1" dirty="0">
+            <a:endParaRPr lang="en-US" sz="1253" dirty="0"/>
+          </a:p>
+          <a:p>
+            <a:pPr indent="0" marL="0">
+              <a:lnSpc>
+                <a:spcPct val="115000"/>
+              </a:lnSpc>
+              <a:buNone/>
+            </a:pPr>
+            <a:r>
+              <a:rPr lang="en-US" sz="1253" b="1" dirty="0">
                 <a:solidFill>
                   <a:srgbClr val="93C5FD"/>
                 </a:solidFill>
@@ -22711,7 +22711,7 @@
               <a:buNone/>
             </a:pPr>
             <a:r>
-              <a:rPr lang="en-US" sz="1250" dirty="0">
+              <a:rPr lang="en-US" sz="1253" dirty="0">
                 <a:solidFill>
                   <a:srgbClr val="E5E7EB"/>
                 </a:solidFill>
@@ -22728,7 +22728,7 @@
               <a:buNone/>
             </a:pPr>
             <a:r>
-              <a:rPr lang="en-US" sz="1250" b="1" dirty="0">
+              <a:rPr lang="en-US" sz="1253" b="1" dirty="0">
                 <a:solidFill>
                   <a:srgbClr val="93C5FD"/>
                 </a:solidFill>
@@ -22745,7 +22745,7 @@
               <a:buNone/>
             </a:pPr>
             <a:r>
-              <a:rPr lang="en-US" sz="1250" dirty="0">
+              <a:rPr lang="en-US" sz="1253" dirty="0">
                 <a:solidFill>
                   <a:srgbClr val="E5E7EB"/>
                 </a:solidFill>
@@ -22762,7 +22762,7 @@
               <a:buNone/>
             </a:pPr>
             <a:r>
-              <a:rPr lang="en-US" sz="1250" dirty="0">
+              <a:rPr lang="en-US" sz="1253" dirty="0">
                 <a:solidFill>
                   <a:srgbClr val="94A3B8"/>
                 </a:solidFill>
@@ -22778,17 +22778,17 @@
               </a:lnSpc>
               <a:buNone/>
             </a:pPr>
-            <a:endParaRPr lang="en-US" sz="1250" dirty="0"/>
-          </a:p>
-          <a:p>
-            <a:pPr indent="0" marL="0">
-              <a:lnSpc>
-                <a:spcPct val="115000"/>
-              </a:lnSpc>
-              <a:buNone/>
-            </a:pPr>
-            <a:r>
-              <a:rPr lang="en-US" sz="1250" b="1" dirty="0">
+            <a:endParaRPr lang="en-US" sz="1253" dirty="0"/>
+          </a:p>
+          <a:p>
+            <a:pPr indent="0" marL="0">
+              <a:lnSpc>
+                <a:spcPct val="115000"/>
+              </a:lnSpc>
+              <a:buNone/>
+            </a:pPr>
+            <a:r>
+              <a:rPr lang="en-US" sz="1253" b="1" dirty="0">
                 <a:solidFill>
                   <a:srgbClr val="93C5FD"/>
                 </a:solidFill>
@@ -22805,7 +22805,7 @@
               <a:buNone/>
             </a:pPr>
             <a:r>
-              <a:rPr lang="en-US" sz="1250" dirty="0">
+              <a:rPr lang="en-US" sz="1253" dirty="0">
                 <a:solidFill>
                   <a:srgbClr val="E5E7EB"/>
                 </a:solidFill>
@@ -22822,7 +22822,7 @@
               <a:buNone/>
             </a:pPr>
             <a:r>
-              <a:rPr lang="en-US" sz="1250" b="1" dirty="0">
+              <a:rPr lang="en-US" sz="1253" b="1" dirty="0">
                 <a:solidFill>
                   <a:srgbClr val="93C5FD"/>
                 </a:solidFill>
@@ -22839,7 +22839,7 @@
               <a:buNone/>
             </a:pPr>
             <a:r>
-              <a:rPr lang="en-US" sz="1250" dirty="0">
+              <a:rPr lang="en-US" sz="1253" dirty="0">
                 <a:solidFill>
                   <a:srgbClr val="E5E7EB"/>
                 </a:solidFill>
@@ -22856,7 +22856,7 @@
               <a:buNone/>
             </a:pPr>
             <a:r>
-              <a:rPr lang="en-US" sz="1250" dirty="0">
+              <a:rPr lang="en-US" sz="1253" dirty="0">
                 <a:solidFill>
                   <a:srgbClr val="94A3B8"/>
                 </a:solidFill>
@@ -22872,17 +22872,17 @@
               </a:lnSpc>
               <a:buNone/>
             </a:pPr>
-            <a:endParaRPr lang="en-US" sz="1250" dirty="0"/>
-          </a:p>
-          <a:p>
-            <a:pPr indent="0" marL="0">
-              <a:lnSpc>
-                <a:spcPct val="115000"/>
-              </a:lnSpc>
-              <a:buNone/>
-            </a:pPr>
-            <a:r>
-              <a:rPr lang="en-US" sz="1250" b="1" dirty="0">
+            <a:endParaRPr lang="en-US" sz="1253" dirty="0"/>
+          </a:p>
+          <a:p>
+            <a:pPr indent="0" marL="0">
+              <a:lnSpc>
+                <a:spcPct val="115000"/>
+              </a:lnSpc>
+              <a:buNone/>
+            </a:pPr>
+            <a:r>
+              <a:rPr lang="en-US" sz="1253" b="1" dirty="0">
                 <a:solidFill>
                   <a:srgbClr val="93C5FD"/>
                 </a:solidFill>
@@ -22899,7 +22899,7 @@
               <a:buNone/>
             </a:pPr>
             <a:r>
-              <a:rPr lang="en-US" sz="1250" dirty="0">
+              <a:rPr lang="en-US" sz="1253" dirty="0">
                 <a:solidFill>
                   <a:srgbClr val="E5E7EB"/>
                 </a:solidFill>
@@ -22916,7 +22916,7 @@
               <a:buNone/>
             </a:pPr>
             <a:r>
-              <a:rPr lang="en-US" sz="1250" b="1" dirty="0">
+              <a:rPr lang="en-US" sz="1253" b="1" dirty="0">
                 <a:solidFill>
                   <a:srgbClr val="93C5FD"/>
                 </a:solidFill>
@@ -22933,7 +22933,7 @@
               <a:buNone/>
             </a:pPr>
             <a:r>
-              <a:rPr lang="en-US" sz="1250" dirty="0">
+              <a:rPr lang="en-US" sz="1253" dirty="0">
                 <a:solidFill>
                   <a:srgbClr val="E5E7EB"/>
                 </a:solidFill>
@@ -22950,7 +22950,7 @@
               <a:buNone/>
             </a:pPr>
             <a:r>
-              <a:rPr lang="en-US" sz="1250" dirty="0">
+              <a:rPr lang="en-US" sz="1253" dirty="0">
                 <a:solidFill>
                   <a:srgbClr val="94A3B8"/>
                 </a:solidFill>
@@ -22960,7 +22960,7 @@
               </a:rPr>
               <a:t># [10, 8, 6, 4, 2]</a:t>
             </a:r>
-            <a:endParaRPr lang="en-US" sz="1250" dirty="0"/>
+            <a:endParaRPr lang="en-US" sz="1253" dirty="0"/>
           </a:p>
         </p:txBody>
       </p:sp>
@@ -23058,7 +23058,7 @@
               <a:buNone/>
             </a:pPr>
             <a:r>
-              <a:rPr lang="en-US" sz="1050" dirty="0">
+              <a:rPr lang="en-US" sz="951" dirty="0">
                 <a:solidFill>
                   <a:srgbClr val="0F172A"/>
                 </a:solidFill>
@@ -23068,17 +23068,17 @@
               </a:rPr>
               <a:t>[0, 1, 2, 3, 4]</a:t>
             </a:r>
-            <a:endParaRPr lang="en-US" sz="1050" dirty="0"/>
-          </a:p>
-          <a:p>
-            <a:pPr indent="0" marL="0">
-              <a:lnSpc>
-                <a:spcPct val="115000"/>
-              </a:lnSpc>
-              <a:buNone/>
-            </a:pPr>
-            <a:r>
-              <a:rPr lang="en-US" sz="1050" dirty="0">
+            <a:endParaRPr lang="en-US" sz="951" dirty="0"/>
+          </a:p>
+          <a:p>
+            <a:pPr indent="0" marL="0">
+              <a:lnSpc>
+                <a:spcPct val="115000"/>
+              </a:lnSpc>
+              <a:buNone/>
+            </a:pPr>
+            <a:r>
+              <a:rPr lang="en-US" sz="951" dirty="0">
                 <a:solidFill>
                   <a:srgbClr val="0F172A"/>
                 </a:solidFill>
@@ -23088,17 +23088,17 @@
               </a:rPr>
               <a:t>[1, 2, 3, 4, 5]</a:t>
             </a:r>
-            <a:endParaRPr lang="en-US" sz="1050" dirty="0"/>
-          </a:p>
-          <a:p>
-            <a:pPr indent="0" marL="0">
-              <a:lnSpc>
-                <a:spcPct val="115000"/>
-              </a:lnSpc>
-              <a:buNone/>
-            </a:pPr>
-            <a:r>
-              <a:rPr lang="en-US" sz="1050" dirty="0">
+            <a:endParaRPr lang="en-US" sz="951" dirty="0"/>
+          </a:p>
+          <a:p>
+            <a:pPr indent="0" marL="0">
+              <a:lnSpc>
+                <a:spcPct val="115000"/>
+              </a:lnSpc>
+              <a:buNone/>
+            </a:pPr>
+            <a:r>
+              <a:rPr lang="en-US" sz="951" dirty="0">
                 <a:solidFill>
                   <a:srgbClr val="0F172A"/>
                 </a:solidFill>
@@ -23108,17 +23108,17 @@
               </a:rPr>
               <a:t>[1, 4, 7]</a:t>
             </a:r>
-            <a:endParaRPr lang="en-US" sz="1050" dirty="0"/>
-          </a:p>
-          <a:p>
-            <a:pPr indent="0" marL="0">
-              <a:lnSpc>
-                <a:spcPct val="115000"/>
-              </a:lnSpc>
-              <a:buNone/>
-            </a:pPr>
-            <a:r>
-              <a:rPr lang="en-US" sz="1050" dirty="0">
+            <a:endParaRPr lang="en-US" sz="951" dirty="0"/>
+          </a:p>
+          <a:p>
+            <a:pPr indent="0" marL="0">
+              <a:lnSpc>
+                <a:spcPct val="115000"/>
+              </a:lnSpc>
+              <a:buNone/>
+            </a:pPr>
+            <a:r>
+              <a:rPr lang="en-US" sz="951" dirty="0">
                 <a:solidFill>
                   <a:srgbClr val="0F172A"/>
                 </a:solidFill>
@@ -23128,7 +23128,7 @@
               </a:rPr>
               <a:t>[10, 8, 6, 4, 2]</a:t>
             </a:r>
-            <a:endParaRPr lang="en-US" sz="1050" dirty="0"/>
+            <a:endParaRPr lang="en-US" sz="951" dirty="0"/>
           </a:p>
         </p:txBody>
       </p:sp>
@@ -23504,7 +23504,7 @@
               <a:buNone/>
             </a:pPr>
             <a:r>
-              <a:rPr lang="en-US" sz="1250" dirty="0">
+              <a:rPr lang="en-US" sz="1427" dirty="0">
                 <a:solidFill>
                   <a:srgbClr val="E5E7EB"/>
                 </a:solidFill>
@@ -23521,7 +23521,7 @@
               <a:buNone/>
             </a:pPr>
             <a:r>
-              <a:rPr lang="en-US" sz="1250" dirty="0">
+              <a:rPr lang="en-US" sz="1427" dirty="0">
                 <a:solidFill>
                   <a:srgbClr val="FCD34D"/>
                 </a:solidFill>
@@ -23538,7 +23538,7 @@
               <a:buNone/>
             </a:pPr>
             <a:r>
-              <a:rPr lang="en-US" sz="1250" dirty="0">
+              <a:rPr lang="en-US" sz="1427" dirty="0">
                 <a:solidFill>
                   <a:srgbClr val="E5E7EB"/>
                 </a:solidFill>
@@ -23555,7 +23555,7 @@
               <a:buNone/>
             </a:pPr>
             <a:r>
-              <a:rPr lang="en-US" sz="1250" dirty="0">
+              <a:rPr lang="en-US" sz="1427" dirty="0">
                 <a:solidFill>
                   <a:srgbClr val="FCD34D"/>
                 </a:solidFill>
@@ -23572,7 +23572,7 @@
               <a:buNone/>
             </a:pPr>
             <a:r>
-              <a:rPr lang="en-US" sz="1250" dirty="0">
+              <a:rPr lang="en-US" sz="1427" dirty="0">
                 <a:solidFill>
                   <a:srgbClr val="E5E7EB"/>
                 </a:solidFill>
@@ -23589,7 +23589,7 @@
               <a:buNone/>
             </a:pPr>
             <a:r>
-              <a:rPr lang="en-US" sz="1250" dirty="0">
+              <a:rPr lang="en-US" sz="1427" dirty="0">
                 <a:solidFill>
                   <a:srgbClr val="FCD34D"/>
                 </a:solidFill>
@@ -23606,7 +23606,7 @@
               <a:buNone/>
             </a:pPr>
             <a:r>
-              <a:rPr lang="en-US" sz="1250" dirty="0">
+              <a:rPr lang="en-US" sz="1427" dirty="0">
                 <a:solidFill>
                   <a:srgbClr val="E5E7EB"/>
                 </a:solidFill>
@@ -23623,7 +23623,7 @@
               <a:buNone/>
             </a:pPr>
             <a:r>
-              <a:rPr lang="en-US" sz="1250" dirty="0">
+              <a:rPr lang="en-US" sz="1427" dirty="0">
                 <a:solidFill>
                   <a:srgbClr val="FCD34D"/>
                 </a:solidFill>
@@ -23640,7 +23640,7 @@
               <a:buNone/>
             </a:pPr>
             <a:r>
-              <a:rPr lang="en-US" sz="1250" dirty="0">
+              <a:rPr lang="en-US" sz="1427" dirty="0">
                 <a:solidFill>
                   <a:srgbClr val="E5E7EB"/>
                 </a:solidFill>
@@ -23656,17 +23656,17 @@
               </a:lnSpc>
               <a:buNone/>
             </a:pPr>
-            <a:endParaRPr lang="en-US" sz="1250" dirty="0"/>
-          </a:p>
-          <a:p>
-            <a:pPr indent="0" marL="0">
-              <a:lnSpc>
-                <a:spcPct val="115000"/>
-              </a:lnSpc>
-              <a:buNone/>
-            </a:pPr>
-            <a:r>
-              <a:rPr lang="en-US" sz="1250" b="1" dirty="0">
+            <a:endParaRPr lang="en-US" sz="1427" dirty="0"/>
+          </a:p>
+          <a:p>
+            <a:pPr indent="0" marL="0">
+              <a:lnSpc>
+                <a:spcPct val="115000"/>
+              </a:lnSpc>
+              <a:buNone/>
+            </a:pPr>
+            <a:r>
+              <a:rPr lang="en-US" sz="1427" b="1" dirty="0">
                 <a:solidFill>
                   <a:srgbClr val="93C5FD"/>
                 </a:solidFill>
@@ -23683,7 +23683,7 @@
               <a:buNone/>
             </a:pPr>
             <a:r>
-              <a:rPr lang="en-US" sz="1250" dirty="0">
+              <a:rPr lang="en-US" sz="1427" dirty="0">
                 <a:solidFill>
                   <a:srgbClr val="E5E7EB"/>
                 </a:solidFill>
@@ -23700,7 +23700,7 @@
               <a:buNone/>
             </a:pPr>
             <a:r>
-              <a:rPr lang="en-US" sz="1250" b="1" dirty="0">
+              <a:rPr lang="en-US" sz="1427" b="1" dirty="0">
                 <a:solidFill>
                   <a:srgbClr val="93C5FD"/>
                 </a:solidFill>
@@ -23717,7 +23717,7 @@
               <a:buNone/>
             </a:pPr>
             <a:r>
-              <a:rPr lang="en-US" sz="1250" dirty="0">
+              <a:rPr lang="en-US" sz="1427" dirty="0">
                 <a:solidFill>
                   <a:srgbClr val="E5E7EB"/>
                 </a:solidFill>
@@ -23734,7 +23734,7 @@
               <a:buNone/>
             </a:pPr>
             <a:r>
-              <a:rPr lang="en-US" sz="1250" b="1" dirty="0">
+              <a:rPr lang="en-US" sz="1427" b="1" dirty="0">
                 <a:solidFill>
                   <a:srgbClr val="93C5FD"/>
                 </a:solidFill>
@@ -23751,7 +23751,7 @@
               <a:buNone/>
             </a:pPr>
             <a:r>
-              <a:rPr lang="en-US" sz="1250" dirty="0">
+              <a:rPr lang="en-US" sz="1427" dirty="0">
                 <a:solidFill>
                   <a:srgbClr val="E5E7EB"/>
                 </a:solidFill>
@@ -23767,17 +23767,17 @@
               </a:lnSpc>
               <a:buNone/>
             </a:pPr>
-            <a:endParaRPr lang="en-US" sz="1250" dirty="0"/>
-          </a:p>
-          <a:p>
-            <a:pPr indent="0" marL="0">
-              <a:lnSpc>
-                <a:spcPct val="115000"/>
-              </a:lnSpc>
-              <a:buNone/>
-            </a:pPr>
-            <a:r>
-              <a:rPr lang="en-US" sz="1250" dirty="0">
+            <a:endParaRPr lang="en-US" sz="1427" dirty="0"/>
+          </a:p>
+          <a:p>
+            <a:pPr indent="0" marL="0">
+              <a:lnSpc>
+                <a:spcPct val="115000"/>
+              </a:lnSpc>
+              <a:buNone/>
+            </a:pPr>
+            <a:r>
+              <a:rPr lang="en-US" sz="1427" dirty="0">
                 <a:solidFill>
                   <a:srgbClr val="E5E7EB"/>
                 </a:solidFill>
@@ -23794,7 +23794,7 @@
               <a:buNone/>
             </a:pPr>
             <a:r>
-              <a:rPr lang="en-US" sz="1250" b="1" dirty="0">
+              <a:rPr lang="en-US" sz="1427" b="1" dirty="0">
                 <a:solidFill>
                   <a:srgbClr val="93C5FD"/>
                 </a:solidFill>
@@ -23811,7 +23811,7 @@
               <a:buNone/>
             </a:pPr>
             <a:r>
-              <a:rPr lang="en-US" sz="1250" dirty="0">
+              <a:rPr lang="en-US" sz="1427" dirty="0">
                 <a:solidFill>
                   <a:srgbClr val="E5E7EB"/>
                 </a:solidFill>
@@ -23828,7 +23828,7 @@
               <a:buNone/>
             </a:pPr>
             <a:r>
-              <a:rPr lang="en-US" sz="1250" dirty="0">
+              <a:rPr lang="en-US" sz="1427" dirty="0">
                 <a:solidFill>
                   <a:srgbClr val="FCD34D"/>
                 </a:solidFill>
@@ -23845,7 +23845,7 @@
               <a:buNone/>
             </a:pPr>
             <a:r>
-              <a:rPr lang="en-US" sz="1250" dirty="0">
+              <a:rPr lang="en-US" sz="1427" dirty="0">
                 <a:solidFill>
                   <a:srgbClr val="E5E7EB"/>
                 </a:solidFill>
@@ -23855,7 +23855,7 @@
               </a:rPr>
               <a:t>)</a:t>
             </a:r>
-            <a:endParaRPr lang="en-US" sz="1250" dirty="0"/>
+            <a:endParaRPr lang="en-US" sz="1427" dirty="0"/>
           </a:p>
         </p:txBody>
       </p:sp>
@@ -24330,7 +24330,7 @@
               <a:buNone/>
             </a:pPr>
             <a:r>
-              <a:rPr lang="en-US" sz="2800" b="1" dirty="0">
+              <a:rPr lang="en-US" sz="2300" b="1" dirty="0">
                 <a:solidFill>
                   <a:srgbClr val="0F172A"/>
                 </a:solidFill>
@@ -24340,7 +24340,7 @@
               </a:rPr>
               <a:t>range 와 enumerate 는 하는 일이 다르다</a:t>
             </a:r>
-            <a:endParaRPr lang="en-US" sz="2800" dirty="0"/>
+            <a:endParaRPr lang="en-US" sz="2300" dirty="0"/>
           </a:p>
         </p:txBody>
       </p:sp>
@@ -24399,7 +24399,7 @@
               <a:buNone/>
             </a:pPr>
             <a:r>
-              <a:rPr lang="en-US" sz="1505" dirty="0">
+              <a:rPr lang="en-US" sz="1600" dirty="0">
                 <a:solidFill>
                   <a:srgbClr val="94A3B8"/>
                 </a:solidFill>
@@ -24415,17 +24415,17 @@
               </a:lnSpc>
               <a:buNone/>
             </a:pPr>
-            <a:endParaRPr lang="en-US" sz="1505" dirty="0"/>
-          </a:p>
-          <a:p>
-            <a:pPr indent="0" marL="0">
-              <a:lnSpc>
-                <a:spcPct val="115000"/>
-              </a:lnSpc>
-              <a:buNone/>
-            </a:pPr>
-            <a:r>
-              <a:rPr lang="en-US" sz="1505" b="1" dirty="0">
+            <a:endParaRPr lang="en-US" sz="1600" dirty="0"/>
+          </a:p>
+          <a:p>
+            <a:pPr indent="0" marL="0">
+              <a:lnSpc>
+                <a:spcPct val="115000"/>
+              </a:lnSpc>
+              <a:buNone/>
+            </a:pPr>
+            <a:r>
+              <a:rPr lang="en-US" sz="1600" b="1" dirty="0">
                 <a:solidFill>
                   <a:srgbClr val="93C5FD"/>
                 </a:solidFill>
@@ -24442,7 +24442,7 @@
               <a:buNone/>
             </a:pPr>
             <a:r>
-              <a:rPr lang="en-US" sz="1505" dirty="0">
+              <a:rPr lang="en-US" sz="1600" dirty="0">
                 <a:solidFill>
                   <a:srgbClr val="E5E7EB"/>
                 </a:solidFill>
@@ -24459,7 +24459,7 @@
               <a:buNone/>
             </a:pPr>
             <a:r>
-              <a:rPr lang="en-US" sz="1505" b="1" dirty="0">
+              <a:rPr lang="en-US" sz="1600" b="1" dirty="0">
                 <a:solidFill>
                   <a:srgbClr val="93C5FD"/>
                 </a:solidFill>
@@ -24476,7 +24476,7 @@
               <a:buNone/>
             </a:pPr>
             <a:r>
-              <a:rPr lang="en-US" sz="1505" dirty="0">
+              <a:rPr lang="en-US" sz="1600" dirty="0">
                 <a:solidFill>
                   <a:srgbClr val="E5E7EB"/>
                 </a:solidFill>
@@ -24493,7 +24493,7 @@
               <a:buNone/>
             </a:pPr>
             <a:r>
-              <a:rPr lang="en-US" sz="1505" b="1" dirty="0">
+              <a:rPr lang="en-US" sz="1600" b="1" dirty="0">
                 <a:solidFill>
                   <a:srgbClr val="93C5FD"/>
                 </a:solidFill>
@@ -24510,7 +24510,7 @@
               <a:buNone/>
             </a:pPr>
             <a:r>
-              <a:rPr lang="en-US" sz="1505" dirty="0">
+              <a:rPr lang="en-US" sz="1600" dirty="0">
                 <a:solidFill>
                   <a:srgbClr val="E5E7EB"/>
                 </a:solidFill>
@@ -24526,17 +24526,17 @@
               </a:lnSpc>
               <a:buNone/>
             </a:pPr>
-            <a:endParaRPr lang="en-US" sz="1505" dirty="0"/>
-          </a:p>
-          <a:p>
-            <a:pPr indent="0" marL="0">
-              <a:lnSpc>
-                <a:spcPct val="115000"/>
-              </a:lnSpc>
-              <a:buNone/>
-            </a:pPr>
-            <a:r>
-              <a:rPr lang="en-US" sz="1505" dirty="0">
+            <a:endParaRPr lang="en-US" sz="1600" dirty="0"/>
+          </a:p>
+          <a:p>
+            <a:pPr indent="0" marL="0">
+              <a:lnSpc>
+                <a:spcPct val="115000"/>
+              </a:lnSpc>
+              <a:buNone/>
+            </a:pPr>
+            <a:r>
+              <a:rPr lang="en-US" sz="1600" dirty="0">
                 <a:solidFill>
                   <a:srgbClr val="E5E7EB"/>
                 </a:solidFill>
@@ -24553,7 +24553,7 @@
               <a:buNone/>
             </a:pPr>
             <a:r>
-              <a:rPr lang="en-US" sz="1505" b="1" dirty="0">
+              <a:rPr lang="en-US" sz="1600" b="1" dirty="0">
                 <a:solidFill>
                   <a:srgbClr val="93C5FD"/>
                 </a:solidFill>
@@ -24570,7 +24570,7 @@
               <a:buNone/>
             </a:pPr>
             <a:r>
-              <a:rPr lang="en-US" sz="1505" dirty="0">
+              <a:rPr lang="en-US" sz="1600" dirty="0">
                 <a:solidFill>
                   <a:srgbClr val="E5E7EB"/>
                 </a:solidFill>
@@ -24587,7 +24587,7 @@
               <a:buNone/>
             </a:pPr>
             <a:r>
-              <a:rPr lang="en-US" sz="1505" dirty="0">
+              <a:rPr lang="en-US" sz="1600" dirty="0">
                 <a:solidFill>
                   <a:srgbClr val="94A3B8"/>
                 </a:solidFill>
@@ -24597,7 +24597,7 @@
               </a:rPr>
               <a:t># 1 2 3</a:t>
             </a:r>
-            <a:endParaRPr lang="en-US" sz="1505" dirty="0"/>
+            <a:endParaRPr lang="en-US" sz="1600" dirty="0"/>
           </a:p>
         </p:txBody>
       </p:sp>
@@ -24656,7 +24656,7 @@
               <a:buNone/>
             </a:pPr>
             <a:r>
-              <a:rPr lang="en-US" sz="1250" dirty="0">
+              <a:rPr lang="en-US" sz="1371" dirty="0">
                 <a:solidFill>
                   <a:srgbClr val="94A3B8"/>
                 </a:solidFill>
@@ -24672,17 +24672,17 @@
               </a:lnSpc>
               <a:buNone/>
             </a:pPr>
-            <a:endParaRPr lang="en-US" sz="1250" dirty="0"/>
-          </a:p>
-          <a:p>
-            <a:pPr indent="0" marL="0">
-              <a:lnSpc>
-                <a:spcPct val="115000"/>
-              </a:lnSpc>
-              <a:buNone/>
-            </a:pPr>
-            <a:r>
-              <a:rPr lang="en-US" sz="1250" b="1" dirty="0">
+            <a:endParaRPr lang="en-US" sz="1371" dirty="0"/>
+          </a:p>
+          <a:p>
+            <a:pPr indent="0" marL="0">
+              <a:lnSpc>
+                <a:spcPct val="115000"/>
+              </a:lnSpc>
+              <a:buNone/>
+            </a:pPr>
+            <a:r>
+              <a:rPr lang="en-US" sz="1371" b="1" dirty="0">
                 <a:solidFill>
                   <a:srgbClr val="93C5FD"/>
                 </a:solidFill>
@@ -24699,7 +24699,7 @@
               <a:buNone/>
             </a:pPr>
             <a:r>
-              <a:rPr lang="en-US" sz="1250" dirty="0">
+              <a:rPr lang="en-US" sz="1371" dirty="0">
                 <a:solidFill>
                   <a:srgbClr val="E5E7EB"/>
                 </a:solidFill>
@@ -24716,7 +24716,7 @@
               <a:buNone/>
             </a:pPr>
             <a:r>
-              <a:rPr lang="en-US" sz="1250" b="1" dirty="0">
+              <a:rPr lang="en-US" sz="1371" b="1" dirty="0">
                 <a:solidFill>
                   <a:srgbClr val="93C5FD"/>
                 </a:solidFill>
@@ -24733,7 +24733,7 @@
               <a:buNone/>
             </a:pPr>
             <a:r>
-              <a:rPr lang="en-US" sz="1250" dirty="0">
+              <a:rPr lang="en-US" sz="1371" dirty="0">
                 <a:solidFill>
                   <a:srgbClr val="E5E7EB"/>
                 </a:solidFill>
@@ -24750,7 +24750,7 @@
               <a:buNone/>
             </a:pPr>
             <a:r>
-              <a:rPr lang="en-US" sz="1250" b="1" dirty="0">
+              <a:rPr lang="en-US" sz="1371" b="1" dirty="0">
                 <a:solidFill>
                   <a:srgbClr val="93C5FD"/>
                 </a:solidFill>
@@ -24767,7 +24767,7 @@
               <a:buNone/>
             </a:pPr>
             <a:r>
-              <a:rPr lang="en-US" sz="1250" dirty="0">
+              <a:rPr lang="en-US" sz="1371" dirty="0">
                 <a:solidFill>
                   <a:srgbClr val="E5E7EB"/>
                 </a:solidFill>
@@ -24784,7 +24784,7 @@
               <a:buNone/>
             </a:pPr>
             <a:r>
-              <a:rPr lang="en-US" sz="1250" dirty="0">
+              <a:rPr lang="en-US" sz="1371" dirty="0">
                 <a:solidFill>
                   <a:srgbClr val="FCD34D"/>
                 </a:solidFill>
@@ -24801,7 +24801,7 @@
               <a:buNone/>
             </a:pPr>
             <a:r>
-              <a:rPr lang="en-US" sz="1250" dirty="0">
+              <a:rPr lang="en-US" sz="1371" dirty="0">
                 <a:solidFill>
                   <a:srgbClr val="E5E7EB"/>
                 </a:solidFill>
@@ -24818,7 +24818,7 @@
               <a:buNone/>
             </a:pPr>
             <a:r>
-              <a:rPr lang="en-US" sz="1250" dirty="0">
+              <a:rPr lang="en-US" sz="1371" dirty="0">
                 <a:solidFill>
                   <a:srgbClr val="FCD34D"/>
                 </a:solidFill>
@@ -24835,7 +24835,7 @@
               <a:buNone/>
             </a:pPr>
             <a:r>
-              <a:rPr lang="en-US" sz="1250" dirty="0">
+              <a:rPr lang="en-US" sz="1371" dirty="0">
                 <a:solidFill>
                   <a:srgbClr val="E5E7EB"/>
                 </a:solidFill>
@@ -24851,17 +24851,17 @@
               </a:lnSpc>
               <a:buNone/>
             </a:pPr>
-            <a:endParaRPr lang="en-US" sz="1250" dirty="0"/>
-          </a:p>
-          <a:p>
-            <a:pPr indent="0" marL="0">
-              <a:lnSpc>
-                <a:spcPct val="115000"/>
-              </a:lnSpc>
-              <a:buNone/>
-            </a:pPr>
-            <a:r>
-              <a:rPr lang="en-US" sz="1250" dirty="0">
+            <a:endParaRPr lang="en-US" sz="1371" dirty="0"/>
+          </a:p>
+          <a:p>
+            <a:pPr indent="0" marL="0">
+              <a:lnSpc>
+                <a:spcPct val="115000"/>
+              </a:lnSpc>
+              <a:buNone/>
+            </a:pPr>
+            <a:r>
+              <a:rPr lang="en-US" sz="1371" dirty="0">
                 <a:solidFill>
                   <a:srgbClr val="E5E7EB"/>
                 </a:solidFill>
@@ -24878,7 +24878,7 @@
               <a:buNone/>
             </a:pPr>
             <a:r>
-              <a:rPr lang="en-US" sz="1250" b="1" dirty="0">
+              <a:rPr lang="en-US" sz="1371" b="1" dirty="0">
                 <a:solidFill>
                   <a:srgbClr val="93C5FD"/>
                 </a:solidFill>
@@ -24895,7 +24895,7 @@
               <a:buNone/>
             </a:pPr>
             <a:r>
-              <a:rPr lang="en-US" sz="1250" dirty="0">
+              <a:rPr lang="en-US" sz="1371" dirty="0">
                 <a:solidFill>
                   <a:srgbClr val="E5E7EB"/>
                 </a:solidFill>
@@ -24912,7 +24912,7 @@
               <a:buNone/>
             </a:pPr>
             <a:r>
-              <a:rPr lang="en-US" sz="1250" dirty="0">
+              <a:rPr lang="en-US" sz="1371" dirty="0">
                 <a:solidFill>
                   <a:srgbClr val="94A3B8"/>
                 </a:solidFill>
@@ -24922,7 +24922,7 @@
               </a:rPr>
               <a:t># 0 a / 1 b</a:t>
             </a:r>
-            <a:endParaRPr lang="en-US" sz="1250" dirty="0"/>
+            <a:endParaRPr lang="en-US" sz="1371" dirty="0"/>
           </a:p>
         </p:txBody>
       </p:sp>
@@ -26220,7 +26220,7 @@
               <a:buNone/>
             </a:pPr>
             <a:r>
-              <a:rPr lang="en-US" sz="2800" b="1" dirty="0">
+              <a:rPr lang="en-US" sz="2300" b="1" dirty="0">
                 <a:solidFill>
                   <a:srgbClr val="0F172A"/>
                 </a:solidFill>
@@ -26230,7 +26230,7 @@
               </a:rPr>
               <a:t>AICE 실기 패턴 — 열 번호와 이름을 같이</a:t>
             </a:r>
-            <a:endParaRPr lang="en-US" sz="2800" dirty="0"/>
+            <a:endParaRPr lang="en-US" sz="2300" dirty="0"/>
           </a:p>
         </p:txBody>
       </p:sp>
@@ -26243,11 +26243,11 @@
         <p:spPr>
           <a:xfrm>
             <a:off x="457200" y="1371600"/>
-            <a:ext cx="5120640" cy="2194560"/>
+            <a:ext cx="5120640" cy="1874520"/>
           </a:xfrm>
           <a:prstGeom prst="roundRect">
             <a:avLst>
-              <a:gd name="adj" fmla="val 3333"/>
+              <a:gd name="adj" fmla="val 3902"/>
             </a:avLst>
           </a:prstGeom>
           <a:solidFill>
@@ -26270,7 +26270,7 @@
         <p:spPr>
           <a:xfrm>
             <a:off x="621792" y="1481328"/>
-            <a:ext cx="4791456" cy="1975104"/>
+            <a:ext cx="4791456" cy="1655064"/>
           </a:xfrm>
           <a:prstGeom prst="rect">
             <a:avLst/>
@@ -26289,7 +26289,7 @@
               <a:buNone/>
             </a:pPr>
             <a:r>
-              <a:rPr lang="en-US" sz="1273" dirty="0">
+              <a:rPr lang="en-US" sz="1461" dirty="0">
                 <a:solidFill>
                   <a:srgbClr val="E5E7EB"/>
                 </a:solidFill>
@@ -26306,7 +26306,7 @@
               <a:buNone/>
             </a:pPr>
             <a:r>
-              <a:rPr lang="en-US" sz="1273" dirty="0">
+              <a:rPr lang="en-US" sz="1461" dirty="0">
                 <a:solidFill>
                   <a:srgbClr val="FCD34D"/>
                 </a:solidFill>
@@ -26323,7 +26323,7 @@
               <a:buNone/>
             </a:pPr>
             <a:r>
-              <a:rPr lang="en-US" sz="1273" dirty="0">
+              <a:rPr lang="en-US" sz="1461" dirty="0">
                 <a:solidFill>
                   <a:srgbClr val="E5E7EB"/>
                 </a:solidFill>
@@ -26340,7 +26340,7 @@
               <a:buNone/>
             </a:pPr>
             <a:r>
-              <a:rPr lang="en-US" sz="1273" dirty="0">
+              <a:rPr lang="en-US" sz="1461" dirty="0">
                 <a:solidFill>
                   <a:srgbClr val="FCD34D"/>
                 </a:solidFill>
@@ -26357,7 +26357,7 @@
               <a:buNone/>
             </a:pPr>
             <a:r>
-              <a:rPr lang="en-US" sz="1273" dirty="0">
+              <a:rPr lang="en-US" sz="1461" dirty="0">
                 <a:solidFill>
                   <a:srgbClr val="E5E7EB"/>
                 </a:solidFill>
@@ -26374,7 +26374,7 @@
               <a:buNone/>
             </a:pPr>
             <a:r>
-              <a:rPr lang="en-US" sz="1273" dirty="0">
+              <a:rPr lang="en-US" sz="1461" dirty="0">
                 <a:solidFill>
                   <a:srgbClr val="FCD34D"/>
                 </a:solidFill>
@@ -26391,7 +26391,7 @@
               <a:buNone/>
             </a:pPr>
             <a:r>
-              <a:rPr lang="en-US" sz="1273" dirty="0">
+              <a:rPr lang="en-US" sz="1461" dirty="0">
                 <a:solidFill>
                   <a:srgbClr val="E5E7EB"/>
                 </a:solidFill>
@@ -26408,7 +26408,7 @@
               <a:buNone/>
             </a:pPr>
             <a:r>
-              <a:rPr lang="en-US" sz="1273" dirty="0">
+              <a:rPr lang="en-US" sz="1461" dirty="0">
                 <a:solidFill>
                   <a:srgbClr val="FCD34D"/>
                 </a:solidFill>
@@ -26425,7 +26425,7 @@
               <a:buNone/>
             </a:pPr>
             <a:r>
-              <a:rPr lang="en-US" sz="1273" dirty="0">
+              <a:rPr lang="en-US" sz="1461" dirty="0">
                 <a:solidFill>
                   <a:srgbClr val="E5E7EB"/>
                 </a:solidFill>
@@ -26441,17 +26441,17 @@
               </a:lnSpc>
               <a:buNone/>
             </a:pPr>
-            <a:endParaRPr lang="en-US" sz="1273" dirty="0"/>
-          </a:p>
-          <a:p>
-            <a:pPr indent="0" marL="0">
-              <a:lnSpc>
-                <a:spcPct val="115000"/>
-              </a:lnSpc>
-              <a:buNone/>
-            </a:pPr>
-            <a:r>
-              <a:rPr lang="en-US" sz="1273" b="1" dirty="0">
+            <a:endParaRPr lang="en-US" sz="1461" dirty="0"/>
+          </a:p>
+          <a:p>
+            <a:pPr indent="0" marL="0">
+              <a:lnSpc>
+                <a:spcPct val="115000"/>
+              </a:lnSpc>
+              <a:buNone/>
+            </a:pPr>
+            <a:r>
+              <a:rPr lang="en-US" sz="1461" b="1" dirty="0">
                 <a:solidFill>
                   <a:srgbClr val="93C5FD"/>
                 </a:solidFill>
@@ -26468,7 +26468,7 @@
               <a:buNone/>
             </a:pPr>
             <a:r>
-              <a:rPr lang="en-US" sz="1273" dirty="0">
+              <a:rPr lang="en-US" sz="1461" dirty="0">
                 <a:solidFill>
                   <a:srgbClr val="E5E7EB"/>
                 </a:solidFill>
@@ -26485,7 +26485,7 @@
               <a:buNone/>
             </a:pPr>
             <a:r>
-              <a:rPr lang="en-US" sz="1273" b="1" dirty="0">
+              <a:rPr lang="en-US" sz="1461" b="1" dirty="0">
                 <a:solidFill>
                   <a:srgbClr val="93C5FD"/>
                 </a:solidFill>
@@ -26502,7 +26502,7 @@
               <a:buNone/>
             </a:pPr>
             <a:r>
-              <a:rPr lang="en-US" sz="1273" dirty="0">
+              <a:rPr lang="en-US" sz="1461" dirty="0">
                 <a:solidFill>
                   <a:srgbClr val="E5E7EB"/>
                 </a:solidFill>
@@ -26519,7 +26519,7 @@
               <a:buNone/>
             </a:pPr>
             <a:r>
-              <a:rPr lang="en-US" sz="1273" b="1" dirty="0">
+              <a:rPr lang="en-US" sz="1461" b="1" dirty="0">
                 <a:solidFill>
                   <a:srgbClr val="93C5FD"/>
                 </a:solidFill>
@@ -26536,7 +26536,7 @@
               <a:buNone/>
             </a:pPr>
             <a:r>
-              <a:rPr lang="en-US" sz="1273" dirty="0">
+              <a:rPr lang="en-US" sz="1461" dirty="0">
                 <a:solidFill>
                   <a:srgbClr val="E5E7EB"/>
                 </a:solidFill>
@@ -26552,17 +26552,17 @@
               </a:lnSpc>
               <a:buNone/>
             </a:pPr>
-            <a:endParaRPr lang="en-US" sz="1273" dirty="0"/>
-          </a:p>
-          <a:p>
-            <a:pPr indent="0" marL="0">
-              <a:lnSpc>
-                <a:spcPct val="115000"/>
-              </a:lnSpc>
-              <a:buNone/>
-            </a:pPr>
-            <a:r>
-              <a:rPr lang="en-US" sz="1273" dirty="0">
+            <a:endParaRPr lang="en-US" sz="1461" dirty="0"/>
+          </a:p>
+          <a:p>
+            <a:pPr indent="0" marL="0">
+              <a:lnSpc>
+                <a:spcPct val="115000"/>
+              </a:lnSpc>
+              <a:buNone/>
+            </a:pPr>
+            <a:r>
+              <a:rPr lang="en-US" sz="1461" dirty="0">
                 <a:solidFill>
                   <a:srgbClr val="E5E7EB"/>
                 </a:solidFill>
@@ -26579,7 +26579,7 @@
               <a:buNone/>
             </a:pPr>
             <a:r>
-              <a:rPr lang="en-US" sz="1273" b="1" dirty="0">
+              <a:rPr lang="en-US" sz="1461" b="1" dirty="0">
                 <a:solidFill>
                   <a:srgbClr val="93C5FD"/>
                 </a:solidFill>
@@ -26596,7 +26596,7 @@
               <a:buNone/>
             </a:pPr>
             <a:r>
-              <a:rPr lang="en-US" sz="1273" dirty="0">
+              <a:rPr lang="en-US" sz="1461" dirty="0">
                 <a:solidFill>
                   <a:srgbClr val="E5E7EB"/>
                 </a:solidFill>
@@ -26612,26 +26612,26 @@
               </a:lnSpc>
               <a:buNone/>
             </a:pPr>
-            <a:endParaRPr lang="en-US" sz="1273" dirty="0"/>
-          </a:p>
-          <a:p>
-            <a:pPr indent="0" marL="0">
-              <a:lnSpc>
-                <a:spcPct val="115000"/>
-              </a:lnSpc>
-              <a:buNone/>
-            </a:pPr>
-            <a:endParaRPr lang="en-US" sz="1273" dirty="0"/>
-          </a:p>
-          <a:p>
-            <a:pPr indent="0" marL="0">
-              <a:lnSpc>
-                <a:spcPct val="115000"/>
-              </a:lnSpc>
-              <a:buNone/>
-            </a:pPr>
-            <a:r>
-              <a:rPr lang="en-US" sz="1273" b="1" dirty="0">
+            <a:endParaRPr lang="en-US" sz="1461" dirty="0"/>
+          </a:p>
+          <a:p>
+            <a:pPr indent="0" marL="0">
+              <a:lnSpc>
+                <a:spcPct val="115000"/>
+              </a:lnSpc>
+              <a:buNone/>
+            </a:pPr>
+            <a:endParaRPr lang="en-US" sz="1461" dirty="0"/>
+          </a:p>
+          <a:p>
+            <a:pPr indent="0" marL="0">
+              <a:lnSpc>
+                <a:spcPct val="115000"/>
+              </a:lnSpc>
+              <a:buNone/>
+            </a:pPr>
+            <a:r>
+              <a:rPr lang="en-US" sz="1461" b="1" dirty="0">
                 <a:solidFill>
                   <a:srgbClr val="93C5FD"/>
                 </a:solidFill>
@@ -26648,7 +26648,7 @@
               <a:buNone/>
             </a:pPr>
             <a:r>
-              <a:rPr lang="en-US" sz="1273" dirty="0">
+              <a:rPr lang="en-US" sz="1461" dirty="0">
                 <a:solidFill>
                   <a:srgbClr val="E5E7EB"/>
                 </a:solidFill>
@@ -26665,7 +26665,7 @@
               <a:buNone/>
             </a:pPr>
             <a:r>
-              <a:rPr lang="en-US" sz="1273" b="1" dirty="0">
+              <a:rPr lang="en-US" sz="1461" b="1" dirty="0">
                 <a:solidFill>
                   <a:srgbClr val="93C5FD"/>
                 </a:solidFill>
@@ -26682,7 +26682,7 @@
               <a:buNone/>
             </a:pPr>
             <a:r>
-              <a:rPr lang="en-US" sz="1273" dirty="0">
+              <a:rPr lang="en-US" sz="1461" dirty="0">
                 <a:solidFill>
                   <a:srgbClr val="E5E7EB"/>
                 </a:solidFill>
@@ -26699,7 +26699,7 @@
               <a:buNone/>
             </a:pPr>
             <a:r>
-              <a:rPr lang="en-US" sz="1273" b="1" dirty="0">
+              <a:rPr lang="en-US" sz="1461" b="1" dirty="0">
                 <a:solidFill>
                   <a:srgbClr val="93C5FD"/>
                 </a:solidFill>
@@ -26716,7 +26716,7 @@
               <a:buNone/>
             </a:pPr>
             <a:r>
-              <a:rPr lang="en-US" sz="1273" dirty="0">
+              <a:rPr lang="en-US" sz="1461" dirty="0">
                 <a:solidFill>
                   <a:srgbClr val="E5E7EB"/>
                 </a:solidFill>
@@ -26732,17 +26732,17 @@
               </a:lnSpc>
               <a:buNone/>
             </a:pPr>
-            <a:endParaRPr lang="en-US" sz="1273" dirty="0"/>
-          </a:p>
-          <a:p>
-            <a:pPr indent="0" marL="0">
-              <a:lnSpc>
-                <a:spcPct val="115000"/>
-              </a:lnSpc>
-              <a:buNone/>
-            </a:pPr>
-            <a:r>
-              <a:rPr lang="en-US" sz="1273" dirty="0">
+            <a:endParaRPr lang="en-US" sz="1461" dirty="0"/>
+          </a:p>
+          <a:p>
+            <a:pPr indent="0" marL="0">
+              <a:lnSpc>
+                <a:spcPct val="115000"/>
+              </a:lnSpc>
+              <a:buNone/>
+            </a:pPr>
+            <a:r>
+              <a:rPr lang="en-US" sz="1461" dirty="0">
                 <a:solidFill>
                   <a:srgbClr val="E5E7EB"/>
                 </a:solidFill>
@@ -26759,7 +26759,7 @@
               <a:buNone/>
             </a:pPr>
             <a:r>
-              <a:rPr lang="en-US" sz="1273" b="1" dirty="0">
+              <a:rPr lang="en-US" sz="1461" b="1" dirty="0">
                 <a:solidFill>
                   <a:srgbClr val="93C5FD"/>
                 </a:solidFill>
@@ -26776,7 +26776,7 @@
               <a:buNone/>
             </a:pPr>
             <a:r>
-              <a:rPr lang="en-US" sz="1273" dirty="0">
+              <a:rPr lang="en-US" sz="1461" dirty="0">
                 <a:solidFill>
                   <a:srgbClr val="E5E7EB"/>
                 </a:solidFill>
@@ -26793,7 +26793,7 @@
               <a:buNone/>
             </a:pPr>
             <a:r>
-              <a:rPr lang="en-US" sz="1273" dirty="0">
+              <a:rPr lang="en-US" sz="1461" dirty="0">
                 <a:solidFill>
                   <a:srgbClr val="FCD34D"/>
                 </a:solidFill>
@@ -26810,7 +26810,7 @@
               <a:buNone/>
             </a:pPr>
             <a:r>
-              <a:rPr lang="en-US" sz="1273" dirty="0">
+              <a:rPr lang="en-US" sz="1461" dirty="0">
                 <a:solidFill>
                   <a:srgbClr val="E5E7EB"/>
                 </a:solidFill>
@@ -26820,7 +26820,7 @@
               </a:rPr>
               <a:t>)</a:t>
             </a:r>
-            <a:endParaRPr lang="en-US" sz="1273" dirty="0"/>
+            <a:endParaRPr lang="en-US" sz="1461" dirty="0"/>
           </a:p>
         </p:txBody>
       </p:sp>
@@ -26832,12 +26832,12 @@
         </p:nvSpPr>
         <p:spPr>
           <a:xfrm>
-            <a:off x="457200" y="3703320"/>
-            <a:ext cx="5120640" cy="1005840"/>
+            <a:off x="457200" y="3337560"/>
+            <a:ext cx="5120640" cy="1371600"/>
           </a:xfrm>
           <a:prstGeom prst="roundRect">
             <a:avLst>
-              <a:gd name="adj" fmla="val 7273"/>
+              <a:gd name="adj" fmla="val 5333"/>
             </a:avLst>
           </a:prstGeom>
           <a:solidFill>
@@ -26859,7 +26859,7 @@
         </p:nvSpPr>
         <p:spPr>
           <a:xfrm>
-            <a:off x="621792" y="3776472"/>
+            <a:off x="621792" y="3410712"/>
             <a:ext cx="1828800" cy="228600"/>
           </a:xfrm>
           <a:prstGeom prst="rect">
@@ -26898,8 +26898,8 @@
         </p:nvSpPr>
         <p:spPr>
           <a:xfrm>
-            <a:off x="621792" y="4032504"/>
-            <a:ext cx="4791456" cy="603504"/>
+            <a:off x="621792" y="3666744"/>
+            <a:ext cx="4791456" cy="969264"/>
           </a:xfrm>
           <a:prstGeom prst="rect">
             <a:avLst/>
@@ -26918,7 +26918,7 @@
               <a:buNone/>
             </a:pPr>
             <a:r>
-              <a:rPr lang="en-US" sz="900" dirty="0">
+              <a:rPr lang="en-US" sz="700" dirty="0">
                 <a:solidFill>
                   <a:srgbClr val="0F172A"/>
                 </a:solidFill>
@@ -26928,17 +26928,17 @@
               </a:rPr>
               <a:t>0 age</a:t>
             </a:r>
-            <a:endParaRPr lang="en-US" sz="900" dirty="0"/>
-          </a:p>
-          <a:p>
-            <a:pPr indent="0" marL="0">
-              <a:lnSpc>
-                <a:spcPct val="115000"/>
-              </a:lnSpc>
-              <a:buNone/>
-            </a:pPr>
-            <a:r>
-              <a:rPr lang="en-US" sz="900" dirty="0">
+            <a:endParaRPr lang="en-US" sz="700" dirty="0"/>
+          </a:p>
+          <a:p>
+            <a:pPr indent="0" marL="0">
+              <a:lnSpc>
+                <a:spcPct val="115000"/>
+              </a:lnSpc>
+              <a:buNone/>
+            </a:pPr>
+            <a:r>
+              <a:rPr lang="en-US" sz="700" dirty="0">
                 <a:solidFill>
                   <a:srgbClr val="0F172A"/>
                 </a:solidFill>
@@ -26948,17 +26948,17 @@
               </a:rPr>
               <a:t>1 income</a:t>
             </a:r>
-            <a:endParaRPr lang="en-US" sz="900" dirty="0"/>
-          </a:p>
-          <a:p>
-            <a:pPr indent="0" marL="0">
-              <a:lnSpc>
-                <a:spcPct val="115000"/>
-              </a:lnSpc>
-              <a:buNone/>
-            </a:pPr>
-            <a:r>
-              <a:rPr lang="en-US" sz="900" dirty="0">
+            <a:endParaRPr lang="en-US" sz="700" dirty="0"/>
+          </a:p>
+          <a:p>
+            <a:pPr indent="0" marL="0">
+              <a:lnSpc>
+                <a:spcPct val="115000"/>
+              </a:lnSpc>
+              <a:buNone/>
+            </a:pPr>
+            <a:r>
+              <a:rPr lang="en-US" sz="700" dirty="0">
                 <a:solidFill>
                   <a:srgbClr val="0F172A"/>
                 </a:solidFill>
@@ -26968,17 +26968,17 @@
               </a:rPr>
               <a:t>2 score</a:t>
             </a:r>
-            <a:endParaRPr lang="en-US" sz="900" dirty="0"/>
-          </a:p>
-          <a:p>
-            <a:pPr indent="0" marL="0">
-              <a:lnSpc>
-                <a:spcPct val="115000"/>
-              </a:lnSpc>
-              <a:buNone/>
-            </a:pPr>
-            <a:r>
-              <a:rPr lang="en-US" sz="900" dirty="0">
+            <a:endParaRPr lang="en-US" sz="700" dirty="0"/>
+          </a:p>
+          <a:p>
+            <a:pPr indent="0" marL="0">
+              <a:lnSpc>
+                <a:spcPct val="115000"/>
+              </a:lnSpc>
+              <a:buNone/>
+            </a:pPr>
+            <a:r>
+              <a:rPr lang="en-US" sz="700" dirty="0">
                 <a:solidFill>
                   <a:srgbClr val="0F172A"/>
                 </a:solidFill>
@@ -26988,17 +26988,17 @@
               </a:rPr>
               <a:t>3 churn</a:t>
             </a:r>
-            <a:endParaRPr lang="en-US" sz="900" dirty="0"/>
-          </a:p>
-          <a:p>
-            <a:pPr indent="0" marL="0">
-              <a:lnSpc>
-                <a:spcPct val="115000"/>
-              </a:lnSpc>
-              <a:buNone/>
-            </a:pPr>
-            <a:r>
-              <a:rPr lang="en-US" sz="900" dirty="0">
+            <a:endParaRPr lang="en-US" sz="700" dirty="0"/>
+          </a:p>
+          <a:p>
+            <a:pPr indent="0" marL="0">
+              <a:lnSpc>
+                <a:spcPct val="115000"/>
+              </a:lnSpc>
+              <a:buNone/>
+            </a:pPr>
+            <a:r>
+              <a:rPr lang="en-US" sz="700" dirty="0">
                 <a:solidFill>
                   <a:srgbClr val="0F172A"/>
                 </a:solidFill>
@@ -27008,17 +27008,17 @@
               </a:rPr>
               <a:t>epoch 1/3 학습 중</a:t>
             </a:r>
-            <a:endParaRPr lang="en-US" sz="900" dirty="0"/>
-          </a:p>
-          <a:p>
-            <a:pPr indent="0" marL="0">
-              <a:lnSpc>
-                <a:spcPct val="115000"/>
-              </a:lnSpc>
-              <a:buNone/>
-            </a:pPr>
-            <a:r>
-              <a:rPr lang="en-US" sz="900" dirty="0">
+            <a:endParaRPr lang="en-US" sz="700" dirty="0"/>
+          </a:p>
+          <a:p>
+            <a:pPr indent="0" marL="0">
+              <a:lnSpc>
+                <a:spcPct val="115000"/>
+              </a:lnSpc>
+              <a:buNone/>
+            </a:pPr>
+            <a:r>
+              <a:rPr lang="en-US" sz="700" dirty="0">
                 <a:solidFill>
                   <a:srgbClr val="0F172A"/>
                 </a:solidFill>
@@ -27028,17 +27028,17 @@
               </a:rPr>
               <a:t>epoch 2/3 학습 중</a:t>
             </a:r>
-            <a:endParaRPr lang="en-US" sz="900" dirty="0"/>
-          </a:p>
-          <a:p>
-            <a:pPr indent="0" marL="0">
-              <a:lnSpc>
-                <a:spcPct val="115000"/>
-              </a:lnSpc>
-              <a:buNone/>
-            </a:pPr>
-            <a:r>
-              <a:rPr lang="en-US" sz="900" dirty="0">
+            <a:endParaRPr lang="en-US" sz="700" dirty="0"/>
+          </a:p>
+          <a:p>
+            <a:pPr indent="0" marL="0">
+              <a:lnSpc>
+                <a:spcPct val="115000"/>
+              </a:lnSpc>
+              <a:buNone/>
+            </a:pPr>
+            <a:r>
+              <a:rPr lang="en-US" sz="700" dirty="0">
                 <a:solidFill>
                   <a:srgbClr val="0F172A"/>
                 </a:solidFill>
@@ -27048,7 +27048,7 @@
               </a:rPr>
               <a:t>epoch 3/3 학습 중</a:t>
             </a:r>
-            <a:endParaRPr lang="en-US" sz="900" dirty="0"/>
+            <a:endParaRPr lang="en-US" sz="700" dirty="0"/>
           </a:p>
         </p:txBody>
       </p:sp>
@@ -28187,7 +28187,7 @@
               <a:buNone/>
             </a:pPr>
             <a:r>
-              <a:rPr lang="en-US" sz="2600" b="1" dirty="0">
+              <a:rPr lang="en-US" sz="2100" b="1" dirty="0">
                 <a:solidFill>
                   <a:srgbClr val="FFFFFF"/>
                 </a:solidFill>
@@ -28197,7 +28197,7 @@
               </a:rPr>
               <a:t>range 는 숫자를 만들고, enumerate 는 번호표를 붙인다</a:t>
             </a:r>
-            <a:endParaRPr lang="en-US" sz="2600" dirty="0"/>
+            <a:endParaRPr lang="en-US" sz="2100" dirty="0"/>
           </a:p>
         </p:txBody>
       </p:sp>
@@ -30161,7 +30161,7 @@
               <a:buNone/>
             </a:pPr>
             <a:r>
-              <a:rPr lang="en-US" sz="1250" dirty="0">
+              <a:rPr lang="en-US" sz="1497" dirty="0">
                 <a:solidFill>
                   <a:srgbClr val="E5E7EB"/>
                 </a:solidFill>
@@ -30177,17 +30177,17 @@
               </a:lnSpc>
               <a:buNone/>
             </a:pPr>
-            <a:endParaRPr lang="en-US" sz="1250" dirty="0"/>
-          </a:p>
-          <a:p>
-            <a:pPr indent="0" marL="0">
-              <a:lnSpc>
-                <a:spcPct val="115000"/>
-              </a:lnSpc>
-              <a:buNone/>
-            </a:pPr>
-            <a:r>
-              <a:rPr lang="en-US" sz="1250" b="1" dirty="0">
+            <a:endParaRPr lang="en-US" sz="1497" dirty="0"/>
+          </a:p>
+          <a:p>
+            <a:pPr indent="0" marL="0">
+              <a:lnSpc>
+                <a:spcPct val="115000"/>
+              </a:lnSpc>
+              <a:buNone/>
+            </a:pPr>
+            <a:r>
+              <a:rPr lang="en-US" sz="1497" b="1" dirty="0">
                 <a:solidFill>
                   <a:srgbClr val="93C5FD"/>
                 </a:solidFill>
@@ -30204,7 +30204,7 @@
               <a:buNone/>
             </a:pPr>
             <a:r>
-              <a:rPr lang="en-US" sz="1250" dirty="0">
+              <a:rPr lang="en-US" sz="1497" dirty="0">
                 <a:solidFill>
                   <a:srgbClr val="E5E7EB"/>
                 </a:solidFill>
@@ -30220,17 +30220,17 @@
               </a:lnSpc>
               <a:buNone/>
             </a:pPr>
-            <a:endParaRPr lang="en-US" sz="1250" dirty="0"/>
-          </a:p>
-          <a:p>
-            <a:pPr indent="0" marL="0">
-              <a:lnSpc>
-                <a:spcPct val="115000"/>
-              </a:lnSpc>
-              <a:buNone/>
-            </a:pPr>
-            <a:r>
-              <a:rPr lang="en-US" sz="1250" dirty="0">
+            <a:endParaRPr lang="en-US" sz="1497" dirty="0"/>
+          </a:p>
+          <a:p>
+            <a:pPr indent="0" marL="0">
+              <a:lnSpc>
+                <a:spcPct val="115000"/>
+              </a:lnSpc>
+              <a:buNone/>
+            </a:pPr>
+            <a:r>
+              <a:rPr lang="en-US" sz="1497" dirty="0">
                 <a:solidFill>
                   <a:srgbClr val="E5E7EB"/>
                 </a:solidFill>
@@ -30247,7 +30247,7 @@
               <a:buNone/>
             </a:pPr>
             <a:r>
-              <a:rPr lang="en-US" sz="1250" b="1" dirty="0">
+              <a:rPr lang="en-US" sz="1497" b="1" dirty="0">
                 <a:solidFill>
                   <a:srgbClr val="93C5FD"/>
                 </a:solidFill>
@@ -30264,7 +30264,7 @@
               <a:buNone/>
             </a:pPr>
             <a:r>
-              <a:rPr lang="en-US" sz="1250" dirty="0">
+              <a:rPr lang="en-US" sz="1497" dirty="0">
                 <a:solidFill>
                   <a:srgbClr val="E5E7EB"/>
                 </a:solidFill>
@@ -30281,7 +30281,7 @@
               <a:buNone/>
             </a:pPr>
             <a:r>
-              <a:rPr lang="en-US" sz="1250" dirty="0">
+              <a:rPr lang="en-US" sz="1497" dirty="0">
                 <a:solidFill>
                   <a:srgbClr val="FCD34D"/>
                 </a:solidFill>
@@ -30298,7 +30298,7 @@
               <a:buNone/>
             </a:pPr>
             <a:r>
-              <a:rPr lang="en-US" sz="1250" dirty="0">
+              <a:rPr lang="en-US" sz="1497" dirty="0">
                 <a:solidFill>
                   <a:srgbClr val="E5E7EB"/>
                 </a:solidFill>
@@ -30314,17 +30314,17 @@
               </a:lnSpc>
               <a:buNone/>
             </a:pPr>
-            <a:endParaRPr lang="en-US" sz="1250" dirty="0"/>
-          </a:p>
-          <a:p>
-            <a:pPr indent="0" marL="0">
-              <a:lnSpc>
-                <a:spcPct val="115000"/>
-              </a:lnSpc>
-              <a:buNone/>
-            </a:pPr>
-            <a:r>
-              <a:rPr lang="en-US" sz="1250" b="1" dirty="0">
+            <a:endParaRPr lang="en-US" sz="1497" dirty="0"/>
+          </a:p>
+          <a:p>
+            <a:pPr indent="0" marL="0">
+              <a:lnSpc>
+                <a:spcPct val="115000"/>
+              </a:lnSpc>
+              <a:buNone/>
+            </a:pPr>
+            <a:r>
+              <a:rPr lang="en-US" sz="1497" b="1" dirty="0">
                 <a:solidFill>
                   <a:srgbClr val="93C5FD"/>
                 </a:solidFill>
@@ -30341,7 +30341,7 @@
               <a:buNone/>
             </a:pPr>
             <a:r>
-              <a:rPr lang="en-US" sz="1250" dirty="0">
+              <a:rPr lang="en-US" sz="1497" dirty="0">
                 <a:solidFill>
                   <a:srgbClr val="E5E7EB"/>
                 </a:solidFill>
@@ -30358,7 +30358,7 @@
               <a:buNone/>
             </a:pPr>
             <a:r>
-              <a:rPr lang="en-US" sz="1250" dirty="0">
+              <a:rPr lang="en-US" sz="1497" dirty="0">
                 <a:solidFill>
                   <a:srgbClr val="FCD34D"/>
                 </a:solidFill>
@@ -30375,7 +30375,7 @@
               <a:buNone/>
             </a:pPr>
             <a:r>
-              <a:rPr lang="en-US" sz="1250" dirty="0">
+              <a:rPr lang="en-US" sz="1497" dirty="0">
                 <a:solidFill>
                   <a:srgbClr val="E5E7EB"/>
                 </a:solidFill>
@@ -30392,7 +30392,7 @@
               <a:buNone/>
             </a:pPr>
             <a:r>
-              <a:rPr lang="en-US" sz="1250" dirty="0">
+              <a:rPr lang="en-US" sz="1497" dirty="0">
                 <a:solidFill>
                   <a:srgbClr val="94A3B8"/>
                 </a:solidFill>
@@ -30402,7 +30402,7 @@
               </a:rPr>
               <a:t># 들여쓰기 밖 → 항상 실행</a:t>
             </a:r>
-            <a:endParaRPr lang="en-US" sz="1250" dirty="0"/>
+            <a:endParaRPr lang="en-US" sz="1497" dirty="0"/>
           </a:p>
         </p:txBody>
       </p:sp>
@@ -30500,7 +30500,7 @@
               <a:buNone/>
             </a:pPr>
             <a:r>
-              <a:rPr lang="en-US" sz="1145" dirty="0">
+              <a:rPr lang="en-US" sz="1014" dirty="0">
                 <a:solidFill>
                   <a:srgbClr val="0F172A"/>
                 </a:solidFill>
@@ -30510,17 +30510,17 @@
               </a:rPr>
               <a:t>합격</a:t>
             </a:r>
-            <a:endParaRPr lang="en-US" sz="1145" dirty="0"/>
-          </a:p>
-          <a:p>
-            <a:pPr indent="0" marL="0">
-              <a:lnSpc>
-                <a:spcPct val="115000"/>
-              </a:lnSpc>
-              <a:buNone/>
-            </a:pPr>
-            <a:r>
-              <a:rPr lang="en-US" sz="1145" dirty="0">
+            <a:endParaRPr lang="en-US" sz="1014" dirty="0"/>
+          </a:p>
+          <a:p>
+            <a:pPr indent="0" marL="0">
+              <a:lnSpc>
+                <a:spcPct val="115000"/>
+              </a:lnSpc>
+              <a:buNone/>
+            </a:pPr>
+            <a:r>
+              <a:rPr lang="en-US" sz="1014" dirty="0">
                 <a:solidFill>
                   <a:srgbClr val="0F172A"/>
                 </a:solidFill>
@@ -30530,7 +30530,7 @@
               </a:rPr>
               <a:t>끝</a:t>
             </a:r>
-            <a:endParaRPr lang="en-US" sz="1145" dirty="0"/>
+            <a:endParaRPr lang="en-US" sz="1014" dirty="0"/>
           </a:p>
         </p:txBody>
       </p:sp>
@@ -30906,7 +30906,7 @@
               <a:buNone/>
             </a:pPr>
             <a:r>
-              <a:rPr lang="en-US" sz="1582" dirty="0">
+              <a:rPr lang="en-US" sz="1458" dirty="0">
                 <a:solidFill>
                   <a:srgbClr val="E5E7EB"/>
                 </a:solidFill>
@@ -30922,17 +30922,17 @@
               </a:lnSpc>
               <a:buNone/>
             </a:pPr>
-            <a:endParaRPr lang="en-US" sz="1582" dirty="0"/>
-          </a:p>
-          <a:p>
-            <a:pPr indent="0" marL="0">
-              <a:lnSpc>
-                <a:spcPct val="115000"/>
-              </a:lnSpc>
-              <a:buNone/>
-            </a:pPr>
-            <a:r>
-              <a:rPr lang="en-US" sz="1582" b="1" dirty="0">
+            <a:endParaRPr lang="en-US" sz="1458" dirty="0"/>
+          </a:p>
+          <a:p>
+            <a:pPr indent="0" marL="0">
+              <a:lnSpc>
+                <a:spcPct val="115000"/>
+              </a:lnSpc>
+              <a:buNone/>
+            </a:pPr>
+            <a:r>
+              <a:rPr lang="en-US" sz="1458" b="1" dirty="0">
                 <a:solidFill>
                   <a:srgbClr val="93C5FD"/>
                 </a:solidFill>
@@ -30949,7 +30949,7 @@
               <a:buNone/>
             </a:pPr>
             <a:r>
-              <a:rPr lang="en-US" sz="1582" dirty="0">
+              <a:rPr lang="en-US" sz="1458" dirty="0">
                 <a:solidFill>
                   <a:srgbClr val="E5E7EB"/>
                 </a:solidFill>
@@ -30965,17 +30965,17 @@
               </a:lnSpc>
               <a:buNone/>
             </a:pPr>
-            <a:endParaRPr lang="en-US" sz="1582" dirty="0"/>
-          </a:p>
-          <a:p>
-            <a:pPr indent="0" marL="0">
-              <a:lnSpc>
-                <a:spcPct val="115000"/>
-              </a:lnSpc>
-              <a:buNone/>
-            </a:pPr>
-            <a:r>
-              <a:rPr lang="en-US" sz="1582" dirty="0">
+            <a:endParaRPr lang="en-US" sz="1458" dirty="0"/>
+          </a:p>
+          <a:p>
+            <a:pPr indent="0" marL="0">
+              <a:lnSpc>
+                <a:spcPct val="115000"/>
+              </a:lnSpc>
+              <a:buNone/>
+            </a:pPr>
+            <a:r>
+              <a:rPr lang="en-US" sz="1458" dirty="0">
                 <a:solidFill>
                   <a:srgbClr val="E5E7EB"/>
                 </a:solidFill>
@@ -30992,7 +30992,7 @@
               <a:buNone/>
             </a:pPr>
             <a:r>
-              <a:rPr lang="en-US" sz="1582" dirty="0">
+              <a:rPr lang="en-US" sz="1458" dirty="0">
                 <a:solidFill>
                   <a:srgbClr val="FCD34D"/>
                 </a:solidFill>
@@ -31008,17 +31008,17 @@
               </a:lnSpc>
               <a:buNone/>
             </a:pPr>
-            <a:endParaRPr lang="en-US" sz="1582" dirty="0"/>
-          </a:p>
-          <a:p>
-            <a:pPr indent="0" marL="0">
-              <a:lnSpc>
-                <a:spcPct val="115000"/>
-              </a:lnSpc>
-              <a:buNone/>
-            </a:pPr>
-            <a:r>
-              <a:rPr lang="en-US" sz="1582" b="1" dirty="0">
+            <a:endParaRPr lang="en-US" sz="1458" dirty="0"/>
+          </a:p>
+          <a:p>
+            <a:pPr indent="0" marL="0">
+              <a:lnSpc>
+                <a:spcPct val="115000"/>
+              </a:lnSpc>
+              <a:buNone/>
+            </a:pPr>
+            <a:r>
+              <a:rPr lang="en-US" sz="1458" b="1" dirty="0">
                 <a:solidFill>
                   <a:srgbClr val="93C5FD"/>
                 </a:solidFill>
@@ -31035,7 +31035,7 @@
               <a:buNone/>
             </a:pPr>
             <a:r>
-              <a:rPr lang="en-US" sz="1582" dirty="0">
+              <a:rPr lang="en-US" sz="1458" dirty="0">
                 <a:solidFill>
                   <a:srgbClr val="E5E7EB"/>
                 </a:solidFill>
@@ -31051,17 +31051,17 @@
               </a:lnSpc>
               <a:buNone/>
             </a:pPr>
-            <a:endParaRPr lang="en-US" sz="1582" dirty="0"/>
-          </a:p>
-          <a:p>
-            <a:pPr indent="0" marL="0">
-              <a:lnSpc>
-                <a:spcPct val="115000"/>
-              </a:lnSpc>
-              <a:buNone/>
-            </a:pPr>
-            <a:r>
-              <a:rPr lang="en-US" sz="1582" dirty="0">
+            <a:endParaRPr lang="en-US" sz="1458" dirty="0"/>
+          </a:p>
+          <a:p>
+            <a:pPr indent="0" marL="0">
+              <a:lnSpc>
+                <a:spcPct val="115000"/>
+              </a:lnSpc>
+              <a:buNone/>
+            </a:pPr>
+            <a:r>
+              <a:rPr lang="en-US" sz="1458" dirty="0">
                 <a:solidFill>
                   <a:srgbClr val="E5E7EB"/>
                 </a:solidFill>
@@ -31078,7 +31078,7 @@
               <a:buNone/>
             </a:pPr>
             <a:r>
-              <a:rPr lang="en-US" sz="1582" dirty="0">
+              <a:rPr lang="en-US" sz="1458" dirty="0">
                 <a:solidFill>
                   <a:srgbClr val="FCD34D"/>
                 </a:solidFill>
@@ -31094,17 +31094,17 @@
               </a:lnSpc>
               <a:buNone/>
             </a:pPr>
-            <a:endParaRPr lang="en-US" sz="1582" dirty="0"/>
-          </a:p>
-          <a:p>
-            <a:pPr indent="0" marL="0">
-              <a:lnSpc>
-                <a:spcPct val="115000"/>
-              </a:lnSpc>
-              <a:buNone/>
-            </a:pPr>
-            <a:r>
-              <a:rPr lang="en-US" sz="1582" b="1" dirty="0">
+            <a:endParaRPr lang="en-US" sz="1458" dirty="0"/>
+          </a:p>
+          <a:p>
+            <a:pPr indent="0" marL="0">
+              <a:lnSpc>
+                <a:spcPct val="115000"/>
+              </a:lnSpc>
+              <a:buNone/>
+            </a:pPr>
+            <a:r>
+              <a:rPr lang="en-US" sz="1458" b="1" dirty="0">
                 <a:solidFill>
                   <a:srgbClr val="93C5FD"/>
                 </a:solidFill>
@@ -31121,7 +31121,7 @@
               <a:buNone/>
             </a:pPr>
             <a:r>
-              <a:rPr lang="en-US" sz="1582" dirty="0">
+              <a:rPr lang="en-US" sz="1458" dirty="0">
                 <a:solidFill>
                   <a:srgbClr val="E5E7EB"/>
                 </a:solidFill>
@@ -31137,17 +31137,17 @@
               </a:lnSpc>
               <a:buNone/>
             </a:pPr>
-            <a:endParaRPr lang="en-US" sz="1582" dirty="0"/>
-          </a:p>
-          <a:p>
-            <a:pPr indent="0" marL="0">
-              <a:lnSpc>
-                <a:spcPct val="115000"/>
-              </a:lnSpc>
-              <a:buNone/>
-            </a:pPr>
-            <a:r>
-              <a:rPr lang="en-US" sz="1582" dirty="0">
+            <a:endParaRPr lang="en-US" sz="1458" dirty="0"/>
+          </a:p>
+          <a:p>
+            <a:pPr indent="0" marL="0">
+              <a:lnSpc>
+                <a:spcPct val="115000"/>
+              </a:lnSpc>
+              <a:buNone/>
+            </a:pPr>
+            <a:r>
+              <a:rPr lang="en-US" sz="1458" dirty="0">
                 <a:solidFill>
                   <a:srgbClr val="E5E7EB"/>
                 </a:solidFill>
@@ -31164,7 +31164,7 @@
               <a:buNone/>
             </a:pPr>
             <a:r>
-              <a:rPr lang="en-US" sz="1582" dirty="0">
+              <a:rPr lang="en-US" sz="1458" dirty="0">
                 <a:solidFill>
                   <a:srgbClr val="FCD34D"/>
                 </a:solidFill>
@@ -31180,17 +31180,17 @@
               </a:lnSpc>
               <a:buNone/>
             </a:pPr>
-            <a:endParaRPr lang="en-US" sz="1582" dirty="0"/>
-          </a:p>
-          <a:p>
-            <a:pPr indent="0" marL="0">
-              <a:lnSpc>
-                <a:spcPct val="115000"/>
-              </a:lnSpc>
-              <a:buNone/>
-            </a:pPr>
-            <a:r>
-              <a:rPr lang="en-US" sz="1582" b="1" dirty="0">
+            <a:endParaRPr lang="en-US" sz="1458" dirty="0"/>
+          </a:p>
+          <a:p>
+            <a:pPr indent="0" marL="0">
+              <a:lnSpc>
+                <a:spcPct val="115000"/>
+              </a:lnSpc>
+              <a:buNone/>
+            </a:pPr>
+            <a:r>
+              <a:rPr lang="en-US" sz="1458" b="1" dirty="0">
                 <a:solidFill>
                   <a:srgbClr val="93C5FD"/>
                 </a:solidFill>
@@ -31207,7 +31207,7 @@
               <a:buNone/>
             </a:pPr>
             <a:r>
-              <a:rPr lang="en-US" sz="1582" dirty="0">
+              <a:rPr lang="en-US" sz="1458" dirty="0">
                 <a:solidFill>
                   <a:srgbClr val="E5E7EB"/>
                 </a:solidFill>
@@ -31224,7 +31224,7 @@
               <a:buNone/>
             </a:pPr>
             <a:r>
-              <a:rPr lang="en-US" sz="1582" dirty="0">
+              <a:rPr lang="en-US" sz="1458" dirty="0">
                 <a:solidFill>
                   <a:srgbClr val="FCD34D"/>
                 </a:solidFill>
@@ -31241,7 +31241,7 @@
               <a:buNone/>
             </a:pPr>
             <a:r>
-              <a:rPr lang="en-US" sz="1582" dirty="0">
+              <a:rPr lang="en-US" sz="1458" dirty="0">
                 <a:solidFill>
                   <a:srgbClr val="E5E7EB"/>
                 </a:solidFill>
@@ -31251,7 +31251,7 @@
               </a:rPr>
               <a:t>, tier)</a:t>
             </a:r>
-            <a:endParaRPr lang="en-US" sz="1582" dirty="0"/>
+            <a:endParaRPr lang="en-US" sz="1458" dirty="0"/>
           </a:p>
         </p:txBody>
       </p:sp>
@@ -31349,7 +31349,7 @@
               <a:buNone/>
             </a:pPr>
             <a:r>
-              <a:rPr lang="en-US" sz="1200" dirty="0">
+              <a:rPr lang="en-US" sz="1014" dirty="0">
                 <a:solidFill>
                   <a:srgbClr val="0F172A"/>
                 </a:solidFill>
@@ -31359,7 +31359,7 @@
               </a:rPr>
               <a:t>최종 판정 티어: GOLD (우수)</a:t>
             </a:r>
-            <a:endParaRPr lang="en-US" sz="1200" dirty="0"/>
+            <a:endParaRPr lang="en-US" sz="1014" dirty="0"/>
           </a:p>
         </p:txBody>
       </p:sp>
@@ -31735,7 +31735,7 @@
               <a:buNone/>
             </a:pPr>
             <a:r>
-              <a:rPr lang="en-US" sz="1250" dirty="0">
+              <a:rPr lang="en-US" sz="1317" dirty="0">
                 <a:solidFill>
                   <a:srgbClr val="E5E7EB"/>
                 </a:solidFill>
@@ -31751,17 +31751,17 @@
               </a:lnSpc>
               <a:buNone/>
             </a:pPr>
-            <a:endParaRPr lang="en-US" sz="1250" dirty="0"/>
-          </a:p>
-          <a:p>
-            <a:pPr indent="0" marL="0">
-              <a:lnSpc>
-                <a:spcPct val="115000"/>
-              </a:lnSpc>
-              <a:buNone/>
-            </a:pPr>
-            <a:r>
-              <a:rPr lang="en-US" sz="1250" b="1" dirty="0">
+            <a:endParaRPr lang="en-US" sz="1317" dirty="0"/>
+          </a:p>
+          <a:p>
+            <a:pPr indent="0" marL="0">
+              <a:lnSpc>
+                <a:spcPct val="115000"/>
+              </a:lnSpc>
+              <a:buNone/>
+            </a:pPr>
+            <a:r>
+              <a:rPr lang="en-US" sz="1317" b="1" dirty="0">
                 <a:solidFill>
                   <a:srgbClr val="93C5FD"/>
                 </a:solidFill>
@@ -31778,7 +31778,7 @@
               <a:buNone/>
             </a:pPr>
             <a:r>
-              <a:rPr lang="en-US" sz="1250" dirty="0">
+              <a:rPr lang="en-US" sz="1317" dirty="0">
                 <a:solidFill>
                   <a:srgbClr val="E5E7EB"/>
                 </a:solidFill>
@@ -31795,7 +31795,7 @@
               <a:buNone/>
             </a:pPr>
             <a:r>
-              <a:rPr lang="en-US" sz="1250" dirty="0">
+              <a:rPr lang="en-US" sz="1317" dirty="0">
                 <a:solidFill>
                   <a:srgbClr val="94A3B8"/>
                 </a:solidFill>
@@ -31811,17 +31811,17 @@
               </a:lnSpc>
               <a:buNone/>
             </a:pPr>
-            <a:endParaRPr lang="en-US" sz="1250" dirty="0"/>
-          </a:p>
-          <a:p>
-            <a:pPr indent="0" marL="0">
-              <a:lnSpc>
-                <a:spcPct val="115000"/>
-              </a:lnSpc>
-              <a:buNone/>
-            </a:pPr>
-            <a:r>
-              <a:rPr lang="en-US" sz="1250" dirty="0">
+            <a:endParaRPr lang="en-US" sz="1317" dirty="0"/>
+          </a:p>
+          <a:p>
+            <a:pPr indent="0" marL="0">
+              <a:lnSpc>
+                <a:spcPct val="115000"/>
+              </a:lnSpc>
+              <a:buNone/>
+            </a:pPr>
+            <a:r>
+              <a:rPr lang="en-US" sz="1317" dirty="0">
                 <a:solidFill>
                   <a:srgbClr val="E5E7EB"/>
                 </a:solidFill>
@@ -31838,7 +31838,7 @@
               <a:buNone/>
             </a:pPr>
             <a:r>
-              <a:rPr lang="en-US" sz="1250" dirty="0">
+              <a:rPr lang="en-US" sz="1317" dirty="0">
                 <a:solidFill>
                   <a:srgbClr val="FCD34D"/>
                 </a:solidFill>
@@ -31854,17 +31854,17 @@
               </a:lnSpc>
               <a:buNone/>
             </a:pPr>
-            <a:endParaRPr lang="en-US" sz="1250" dirty="0"/>
-          </a:p>
-          <a:p>
-            <a:pPr indent="0" marL="0">
-              <a:lnSpc>
-                <a:spcPct val="115000"/>
-              </a:lnSpc>
-              <a:buNone/>
-            </a:pPr>
-            <a:r>
-              <a:rPr lang="en-US" sz="1250" b="1" dirty="0">
+            <a:endParaRPr lang="en-US" sz="1317" dirty="0"/>
+          </a:p>
+          <a:p>
+            <a:pPr indent="0" marL="0">
+              <a:lnSpc>
+                <a:spcPct val="115000"/>
+              </a:lnSpc>
+              <a:buNone/>
+            </a:pPr>
+            <a:r>
+              <a:rPr lang="en-US" sz="1317" b="1" dirty="0">
                 <a:solidFill>
                   <a:srgbClr val="93C5FD"/>
                 </a:solidFill>
@@ -31881,7 +31881,7 @@
               <a:buNone/>
             </a:pPr>
             <a:r>
-              <a:rPr lang="en-US" sz="1250" dirty="0">
+              <a:rPr lang="en-US" sz="1317" dirty="0">
                 <a:solidFill>
                   <a:srgbClr val="E5E7EB"/>
                 </a:solidFill>
@@ -31898,7 +31898,7 @@
               <a:buNone/>
             </a:pPr>
             <a:r>
-              <a:rPr lang="en-US" sz="1250" dirty="0">
+              <a:rPr lang="en-US" sz="1317" dirty="0">
                 <a:solidFill>
                   <a:srgbClr val="94A3B8"/>
                 </a:solidFill>
@@ -31914,17 +31914,17 @@
               </a:lnSpc>
               <a:buNone/>
             </a:pPr>
-            <a:endParaRPr lang="en-US" sz="1250" dirty="0"/>
-          </a:p>
-          <a:p>
-            <a:pPr indent="0" marL="0">
-              <a:lnSpc>
-                <a:spcPct val="115000"/>
-              </a:lnSpc>
-              <a:buNone/>
-            </a:pPr>
-            <a:r>
-              <a:rPr lang="en-US" sz="1250" dirty="0">
+            <a:endParaRPr lang="en-US" sz="1317" dirty="0"/>
+          </a:p>
+          <a:p>
+            <a:pPr indent="0" marL="0">
+              <a:lnSpc>
+                <a:spcPct val="115000"/>
+              </a:lnSpc>
+              <a:buNone/>
+            </a:pPr>
+            <a:r>
+              <a:rPr lang="en-US" sz="1317" dirty="0">
                 <a:solidFill>
                   <a:srgbClr val="E5E7EB"/>
                 </a:solidFill>
@@ -31941,7 +31941,7 @@
               <a:buNone/>
             </a:pPr>
             <a:r>
-              <a:rPr lang="en-US" sz="1250" dirty="0">
+              <a:rPr lang="en-US" sz="1317" dirty="0">
                 <a:solidFill>
                   <a:srgbClr val="FCD34D"/>
                 </a:solidFill>
@@ -31957,17 +31957,17 @@
               </a:lnSpc>
               <a:buNone/>
             </a:pPr>
-            <a:endParaRPr lang="en-US" sz="1250" dirty="0"/>
-          </a:p>
-          <a:p>
-            <a:pPr indent="0" marL="0">
-              <a:lnSpc>
-                <a:spcPct val="115000"/>
-              </a:lnSpc>
-              <a:buNone/>
-            </a:pPr>
-            <a:r>
-              <a:rPr lang="en-US" sz="1250" b="1" dirty="0">
+            <a:endParaRPr lang="en-US" sz="1317" dirty="0"/>
+          </a:p>
+          <a:p>
+            <a:pPr indent="0" marL="0">
+              <a:lnSpc>
+                <a:spcPct val="115000"/>
+              </a:lnSpc>
+              <a:buNone/>
+            </a:pPr>
+            <a:r>
+              <a:rPr lang="en-US" sz="1317" b="1" dirty="0">
                 <a:solidFill>
                   <a:srgbClr val="93C5FD"/>
                 </a:solidFill>
@@ -31984,7 +31984,7 @@
               <a:buNone/>
             </a:pPr>
             <a:r>
-              <a:rPr lang="en-US" sz="1250" dirty="0">
+              <a:rPr lang="en-US" sz="1317" dirty="0">
                 <a:solidFill>
                   <a:srgbClr val="E5E7EB"/>
                 </a:solidFill>
@@ -32001,7 +32001,7 @@
               <a:buNone/>
             </a:pPr>
             <a:r>
-              <a:rPr lang="en-US" sz="1250" dirty="0">
+              <a:rPr lang="en-US" sz="1317" dirty="0">
                 <a:solidFill>
                   <a:srgbClr val="94A3B8"/>
                 </a:solidFill>
@@ -32011,7 +32011,7 @@
               </a:rPr>
               <a:t># GOLD  ← 틀림</a:t>
             </a:r>
-            <a:endParaRPr lang="en-US" sz="1250" dirty="0"/>
+            <a:endParaRPr lang="en-US" sz="1317" dirty="0"/>
           </a:p>
         </p:txBody>
       </p:sp>
@@ -32070,7 +32070,7 @@
               <a:buNone/>
             </a:pPr>
             <a:r>
-              <a:rPr lang="en-US" sz="1250" dirty="0">
+              <a:rPr lang="en-US" sz="1288" dirty="0">
                 <a:solidFill>
                   <a:srgbClr val="E5E7EB"/>
                 </a:solidFill>
@@ -32086,17 +32086,17 @@
               </a:lnSpc>
               <a:buNone/>
             </a:pPr>
-            <a:endParaRPr lang="en-US" sz="1250" dirty="0"/>
-          </a:p>
-          <a:p>
-            <a:pPr indent="0" marL="0">
-              <a:lnSpc>
-                <a:spcPct val="115000"/>
-              </a:lnSpc>
-              <a:buNone/>
-            </a:pPr>
-            <a:r>
-              <a:rPr lang="en-US" sz="1250" b="1" dirty="0">
+            <a:endParaRPr lang="en-US" sz="1288" dirty="0"/>
+          </a:p>
+          <a:p>
+            <a:pPr indent="0" marL="0">
+              <a:lnSpc>
+                <a:spcPct val="115000"/>
+              </a:lnSpc>
+              <a:buNone/>
+            </a:pPr>
+            <a:r>
+              <a:rPr lang="en-US" sz="1288" b="1" dirty="0">
                 <a:solidFill>
                   <a:srgbClr val="93C5FD"/>
                 </a:solidFill>
@@ -32113,7 +32113,7 @@
               <a:buNone/>
             </a:pPr>
             <a:r>
-              <a:rPr lang="en-US" sz="1250" dirty="0">
+              <a:rPr lang="en-US" sz="1288" dirty="0">
                 <a:solidFill>
                   <a:srgbClr val="E5E7EB"/>
                 </a:solidFill>
@@ -32130,7 +32130,7 @@
               <a:buNone/>
             </a:pPr>
             <a:r>
-              <a:rPr lang="en-US" sz="1250" dirty="0">
+              <a:rPr lang="en-US" sz="1288" dirty="0">
                 <a:solidFill>
                   <a:srgbClr val="94A3B8"/>
                 </a:solidFill>
@@ -32146,17 +32146,17 @@
               </a:lnSpc>
               <a:buNone/>
             </a:pPr>
-            <a:endParaRPr lang="en-US" sz="1250" dirty="0"/>
-          </a:p>
-          <a:p>
-            <a:pPr indent="0" marL="0">
-              <a:lnSpc>
-                <a:spcPct val="115000"/>
-              </a:lnSpc>
-              <a:buNone/>
-            </a:pPr>
-            <a:r>
-              <a:rPr lang="en-US" sz="1250" dirty="0">
+            <a:endParaRPr lang="en-US" sz="1288" dirty="0"/>
+          </a:p>
+          <a:p>
+            <a:pPr indent="0" marL="0">
+              <a:lnSpc>
+                <a:spcPct val="115000"/>
+              </a:lnSpc>
+              <a:buNone/>
+            </a:pPr>
+            <a:r>
+              <a:rPr lang="en-US" sz="1288" dirty="0">
                 <a:solidFill>
                   <a:srgbClr val="E5E7EB"/>
                 </a:solidFill>
@@ -32173,7 +32173,7 @@
               <a:buNone/>
             </a:pPr>
             <a:r>
-              <a:rPr lang="en-US" sz="1250" dirty="0">
+              <a:rPr lang="en-US" sz="1288" dirty="0">
                 <a:solidFill>
                   <a:srgbClr val="FCD34D"/>
                 </a:solidFill>
@@ -32189,17 +32189,17 @@
               </a:lnSpc>
               <a:buNone/>
             </a:pPr>
-            <a:endParaRPr lang="en-US" sz="1250" dirty="0"/>
-          </a:p>
-          <a:p>
-            <a:pPr indent="0" marL="0">
-              <a:lnSpc>
-                <a:spcPct val="115000"/>
-              </a:lnSpc>
-              <a:buNone/>
-            </a:pPr>
-            <a:r>
-              <a:rPr lang="en-US" sz="1250" b="1" dirty="0">
+            <a:endParaRPr lang="en-US" sz="1288" dirty="0"/>
+          </a:p>
+          <a:p>
+            <a:pPr indent="0" marL="0">
+              <a:lnSpc>
+                <a:spcPct val="115000"/>
+              </a:lnSpc>
+              <a:buNone/>
+            </a:pPr>
+            <a:r>
+              <a:rPr lang="en-US" sz="1288" b="1" dirty="0">
                 <a:solidFill>
                   <a:srgbClr val="93C5FD"/>
                 </a:solidFill>
@@ -32216,7 +32216,7 @@
               <a:buNone/>
             </a:pPr>
             <a:r>
-              <a:rPr lang="en-US" sz="1250" dirty="0">
+              <a:rPr lang="en-US" sz="1288" dirty="0">
                 <a:solidFill>
                   <a:srgbClr val="E5E7EB"/>
                 </a:solidFill>
@@ -32232,17 +32232,17 @@
               </a:lnSpc>
               <a:buNone/>
             </a:pPr>
-            <a:endParaRPr lang="en-US" sz="1250" dirty="0"/>
-          </a:p>
-          <a:p>
-            <a:pPr indent="0" marL="0">
-              <a:lnSpc>
-                <a:spcPct val="115000"/>
-              </a:lnSpc>
-              <a:buNone/>
-            </a:pPr>
-            <a:r>
-              <a:rPr lang="en-US" sz="1250" dirty="0">
+            <a:endParaRPr lang="en-US" sz="1288" dirty="0"/>
+          </a:p>
+          <a:p>
+            <a:pPr indent="0" marL="0">
+              <a:lnSpc>
+                <a:spcPct val="115000"/>
+              </a:lnSpc>
+              <a:buNone/>
+            </a:pPr>
+            <a:r>
+              <a:rPr lang="en-US" sz="1288" dirty="0">
                 <a:solidFill>
                   <a:srgbClr val="E5E7EB"/>
                 </a:solidFill>
@@ -32259,7 +32259,7 @@
               <a:buNone/>
             </a:pPr>
             <a:r>
-              <a:rPr lang="en-US" sz="1250" dirty="0">
+              <a:rPr lang="en-US" sz="1288" dirty="0">
                 <a:solidFill>
                   <a:srgbClr val="FCD34D"/>
                 </a:solidFill>
@@ -32275,17 +32275,17 @@
               </a:lnSpc>
               <a:buNone/>
             </a:pPr>
-            <a:endParaRPr lang="en-US" sz="1250" dirty="0"/>
-          </a:p>
-          <a:p>
-            <a:pPr indent="0" marL="0">
-              <a:lnSpc>
-                <a:spcPct val="115000"/>
-              </a:lnSpc>
-              <a:buNone/>
-            </a:pPr>
-            <a:r>
-              <a:rPr lang="en-US" sz="1250" b="1" dirty="0">
+            <a:endParaRPr lang="en-US" sz="1288" dirty="0"/>
+          </a:p>
+          <a:p>
+            <a:pPr indent="0" marL="0">
+              <a:lnSpc>
+                <a:spcPct val="115000"/>
+              </a:lnSpc>
+              <a:buNone/>
+            </a:pPr>
+            <a:r>
+              <a:rPr lang="en-US" sz="1288" b="1" dirty="0">
                 <a:solidFill>
                   <a:srgbClr val="93C5FD"/>
                 </a:solidFill>
@@ -32302,7 +32302,7 @@
               <a:buNone/>
             </a:pPr>
             <a:r>
-              <a:rPr lang="en-US" sz="1250" dirty="0">
+              <a:rPr lang="en-US" sz="1288" dirty="0">
                 <a:solidFill>
                   <a:srgbClr val="E5E7EB"/>
                 </a:solidFill>
@@ -32319,7 +32319,7 @@
               <a:buNone/>
             </a:pPr>
             <a:r>
-              <a:rPr lang="en-US" sz="1250" dirty="0">
+              <a:rPr lang="en-US" sz="1288" dirty="0">
                 <a:solidFill>
                   <a:srgbClr val="94A3B8"/>
                 </a:solidFill>
@@ -32329,7 +32329,7 @@
               </a:rPr>
               <a:t># CHALLENGER</a:t>
             </a:r>
-            <a:endParaRPr lang="en-US" sz="1250" dirty="0"/>
+            <a:endParaRPr lang="en-US" sz="1288" dirty="0"/>
           </a:p>
         </p:txBody>
       </p:sp>
@@ -33493,7 +33493,7 @@
               <a:buNone/>
             </a:pPr>
             <a:r>
-              <a:rPr lang="en-US" sz="1371" b="1" dirty="0">
+              <a:rPr lang="en-US" sz="1465" b="1" dirty="0">
                 <a:solidFill>
                   <a:srgbClr val="93C5FD"/>
                 </a:solidFill>
@@ -33510,7 +33510,7 @@
               <a:buNone/>
             </a:pPr>
             <a:r>
-              <a:rPr lang="en-US" sz="1371" dirty="0">
+              <a:rPr lang="en-US" sz="1465" dirty="0">
                 <a:solidFill>
                   <a:srgbClr val="E5E7EB"/>
                 </a:solidFill>
@@ -33526,17 +33526,17 @@
               </a:lnSpc>
               <a:buNone/>
             </a:pPr>
-            <a:endParaRPr lang="en-US" sz="1371" dirty="0"/>
-          </a:p>
-          <a:p>
-            <a:pPr indent="0" marL="0">
-              <a:lnSpc>
-                <a:spcPct val="115000"/>
-              </a:lnSpc>
-              <a:buNone/>
-            </a:pPr>
-            <a:r>
-              <a:rPr lang="en-US" sz="1371" dirty="0">
+            <a:endParaRPr lang="en-US" sz="1465" dirty="0"/>
+          </a:p>
+          <a:p>
+            <a:pPr indent="0" marL="0">
+              <a:lnSpc>
+                <a:spcPct val="115000"/>
+              </a:lnSpc>
+              <a:buNone/>
+            </a:pPr>
+            <a:r>
+              <a:rPr lang="en-US" sz="1465" dirty="0">
                 <a:solidFill>
                   <a:srgbClr val="E5E7EB"/>
                 </a:solidFill>
@@ -33553,7 +33553,7 @@
               <a:buNone/>
             </a:pPr>
             <a:r>
-              <a:rPr lang="en-US" sz="1371" b="1" dirty="0">
+              <a:rPr lang="en-US" sz="1465" b="1" dirty="0">
                 <a:solidFill>
                   <a:srgbClr val="93C5FD"/>
                 </a:solidFill>
@@ -33570,7 +33570,7 @@
               <a:buNone/>
             </a:pPr>
             <a:r>
-              <a:rPr lang="en-US" sz="1371" dirty="0">
+              <a:rPr lang="en-US" sz="1465" dirty="0">
                 <a:solidFill>
                   <a:srgbClr val="E5E7EB"/>
                 </a:solidFill>
@@ -33586,17 +33586,17 @@
               </a:lnSpc>
               <a:buNone/>
             </a:pPr>
-            <a:endParaRPr lang="en-US" sz="1371" dirty="0"/>
-          </a:p>
-          <a:p>
-            <a:pPr indent="0" marL="0">
-              <a:lnSpc>
-                <a:spcPct val="115000"/>
-              </a:lnSpc>
-              <a:buNone/>
-            </a:pPr>
-            <a:r>
-              <a:rPr lang="en-US" sz="1371" dirty="0">
+            <a:endParaRPr lang="en-US" sz="1465" dirty="0"/>
+          </a:p>
+          <a:p>
+            <a:pPr indent="0" marL="0">
+              <a:lnSpc>
+                <a:spcPct val="115000"/>
+              </a:lnSpc>
+              <a:buNone/>
+            </a:pPr>
+            <a:r>
+              <a:rPr lang="en-US" sz="1465" dirty="0">
                 <a:solidFill>
                   <a:srgbClr val="E5E7EB"/>
                 </a:solidFill>
@@ -33613,7 +33613,7 @@
               <a:buNone/>
             </a:pPr>
             <a:r>
-              <a:rPr lang="en-US" sz="1371" b="1" dirty="0">
+              <a:rPr lang="en-US" sz="1465" b="1" dirty="0">
                 <a:solidFill>
                   <a:srgbClr val="93C5FD"/>
                 </a:solidFill>
@@ -33630,7 +33630,7 @@
               <a:buNone/>
             </a:pPr>
             <a:r>
-              <a:rPr lang="en-US" sz="1371" dirty="0">
+              <a:rPr lang="en-US" sz="1465" dirty="0">
                 <a:solidFill>
                   <a:srgbClr val="E5E7EB"/>
                 </a:solidFill>
@@ -33647,7 +33647,7 @@
               <a:buNone/>
             </a:pPr>
             <a:r>
-              <a:rPr lang="en-US" sz="1371" dirty="0">
+              <a:rPr lang="en-US" sz="1465" dirty="0">
                 <a:solidFill>
                   <a:srgbClr val="FCD34D"/>
                 </a:solidFill>
@@ -33663,17 +33663,17 @@
               </a:lnSpc>
               <a:buNone/>
             </a:pPr>
-            <a:endParaRPr lang="en-US" sz="1371" dirty="0"/>
-          </a:p>
-          <a:p>
-            <a:pPr indent="0" marL="0">
-              <a:lnSpc>
-                <a:spcPct val="115000"/>
-              </a:lnSpc>
-              <a:buNone/>
-            </a:pPr>
-            <a:r>
-              <a:rPr lang="en-US" sz="1371" dirty="0">
+            <a:endParaRPr lang="en-US" sz="1465" dirty="0"/>
+          </a:p>
+          <a:p>
+            <a:pPr indent="0" marL="0">
+              <a:lnSpc>
+                <a:spcPct val="115000"/>
+              </a:lnSpc>
+              <a:buNone/>
+            </a:pPr>
+            <a:r>
+              <a:rPr lang="en-US" sz="1465" dirty="0">
                 <a:solidFill>
                   <a:srgbClr val="E5E7EB"/>
                 </a:solidFill>
@@ -33690,7 +33690,7 @@
               <a:buNone/>
             </a:pPr>
             <a:r>
-              <a:rPr lang="en-US" sz="1371" b="1" dirty="0">
+              <a:rPr lang="en-US" sz="1465" b="1" dirty="0">
                 <a:solidFill>
                   <a:srgbClr val="93C5FD"/>
                 </a:solidFill>
@@ -33707,7 +33707,7 @@
               <a:buNone/>
             </a:pPr>
             <a:r>
-              <a:rPr lang="en-US" sz="1371" dirty="0">
+              <a:rPr lang="en-US" sz="1465" dirty="0">
                 <a:solidFill>
                   <a:srgbClr val="E5E7EB"/>
                 </a:solidFill>
@@ -33723,17 +33723,17 @@
               </a:lnSpc>
               <a:buNone/>
             </a:pPr>
-            <a:endParaRPr lang="en-US" sz="1371" dirty="0"/>
-          </a:p>
-          <a:p>
-            <a:pPr indent="0" marL="0">
-              <a:lnSpc>
-                <a:spcPct val="115000"/>
-              </a:lnSpc>
-              <a:buNone/>
-            </a:pPr>
-            <a:r>
-              <a:rPr lang="en-US" sz="1371" dirty="0">
+            <a:endParaRPr lang="en-US" sz="1465" dirty="0"/>
+          </a:p>
+          <a:p>
+            <a:pPr indent="0" marL="0">
+              <a:lnSpc>
+                <a:spcPct val="115000"/>
+              </a:lnSpc>
+              <a:buNone/>
+            </a:pPr>
+            <a:r>
+              <a:rPr lang="en-US" sz="1465" dirty="0">
                 <a:solidFill>
                   <a:srgbClr val="E5E7EB"/>
                 </a:solidFill>
@@ -33750,7 +33750,7 @@
               <a:buNone/>
             </a:pPr>
             <a:r>
-              <a:rPr lang="en-US" sz="1371" b="1" dirty="0">
+              <a:rPr lang="en-US" sz="1465" b="1" dirty="0">
                 <a:solidFill>
                   <a:srgbClr val="93C5FD"/>
                 </a:solidFill>
@@ -33767,7 +33767,7 @@
               <a:buNone/>
             </a:pPr>
             <a:r>
-              <a:rPr lang="en-US" sz="1371" dirty="0">
+              <a:rPr lang="en-US" sz="1465" dirty="0">
                 <a:solidFill>
                   <a:srgbClr val="E5E7EB"/>
                 </a:solidFill>
@@ -33784,7 +33784,7 @@
               <a:buNone/>
             </a:pPr>
             <a:r>
-              <a:rPr lang="en-US" sz="1371" dirty="0">
+              <a:rPr lang="en-US" sz="1465" dirty="0">
                 <a:solidFill>
                   <a:srgbClr val="FCD34D"/>
                 </a:solidFill>
@@ -33800,17 +33800,17 @@
               </a:lnSpc>
               <a:buNone/>
             </a:pPr>
-            <a:endParaRPr lang="en-US" sz="1371" dirty="0"/>
-          </a:p>
-          <a:p>
-            <a:pPr indent="0" marL="0">
-              <a:lnSpc>
-                <a:spcPct val="115000"/>
-              </a:lnSpc>
-              <a:buNone/>
-            </a:pPr>
-            <a:r>
-              <a:rPr lang="en-US" sz="1371" dirty="0">
+            <a:endParaRPr lang="en-US" sz="1465" dirty="0"/>
+          </a:p>
+          <a:p>
+            <a:pPr indent="0" marL="0">
+              <a:lnSpc>
+                <a:spcPct val="115000"/>
+              </a:lnSpc>
+              <a:buNone/>
+            </a:pPr>
+            <a:r>
+              <a:rPr lang="en-US" sz="1465" dirty="0">
                 <a:solidFill>
                   <a:srgbClr val="E5E7EB"/>
                 </a:solidFill>
@@ -33827,7 +33827,7 @@
               <a:buNone/>
             </a:pPr>
             <a:r>
-              <a:rPr lang="en-US" sz="1371" b="1" dirty="0">
+              <a:rPr lang="en-US" sz="1465" b="1" dirty="0">
                 <a:solidFill>
                   <a:srgbClr val="93C5FD"/>
                 </a:solidFill>
@@ -33844,7 +33844,7 @@
               <a:buNone/>
             </a:pPr>
             <a:r>
-              <a:rPr lang="en-US" sz="1371" dirty="0">
+              <a:rPr lang="en-US" sz="1465" dirty="0">
                 <a:solidFill>
                   <a:srgbClr val="E5E7EB"/>
                 </a:solidFill>
@@ -33860,17 +33860,17 @@
               </a:lnSpc>
               <a:buNone/>
             </a:pPr>
-            <a:endParaRPr lang="en-US" sz="1371" dirty="0"/>
-          </a:p>
-          <a:p>
-            <a:pPr indent="0" marL="0">
-              <a:lnSpc>
-                <a:spcPct val="115000"/>
-              </a:lnSpc>
-              <a:buNone/>
-            </a:pPr>
-            <a:r>
-              <a:rPr lang="en-US" sz="1371" dirty="0">
+            <a:endParaRPr lang="en-US" sz="1465" dirty="0"/>
+          </a:p>
+          <a:p>
+            <a:pPr indent="0" marL="0">
+              <a:lnSpc>
+                <a:spcPct val="115000"/>
+              </a:lnSpc>
+              <a:buNone/>
+            </a:pPr>
+            <a:r>
+              <a:rPr lang="en-US" sz="1465" dirty="0">
                 <a:solidFill>
                   <a:srgbClr val="E5E7EB"/>
                 </a:solidFill>
@@ -33887,7 +33887,7 @@
               <a:buNone/>
             </a:pPr>
             <a:r>
-              <a:rPr lang="en-US" sz="1371" b="1" dirty="0">
+              <a:rPr lang="en-US" sz="1465" b="1" dirty="0">
                 <a:solidFill>
                   <a:srgbClr val="93C5FD"/>
                 </a:solidFill>
@@ -33904,7 +33904,7 @@
               <a:buNone/>
             </a:pPr>
             <a:r>
-              <a:rPr lang="en-US" sz="1371" dirty="0">
+              <a:rPr lang="en-US" sz="1465" dirty="0">
                 <a:solidFill>
                   <a:srgbClr val="E5E7EB"/>
                 </a:solidFill>
@@ -33921,7 +33921,7 @@
               <a:buNone/>
             </a:pPr>
             <a:r>
-              <a:rPr lang="en-US" sz="1371" dirty="0">
+              <a:rPr lang="en-US" sz="1465" dirty="0">
                 <a:solidFill>
                   <a:srgbClr val="FCD34D"/>
                 </a:solidFill>
@@ -33937,26 +33937,26 @@
               </a:lnSpc>
               <a:buNone/>
             </a:pPr>
-            <a:endParaRPr lang="en-US" sz="1371" dirty="0"/>
-          </a:p>
-          <a:p>
-            <a:pPr indent="0" marL="0">
-              <a:lnSpc>
-                <a:spcPct val="115000"/>
-              </a:lnSpc>
-              <a:buNone/>
-            </a:pPr>
-            <a:endParaRPr lang="en-US" sz="1371" dirty="0"/>
-          </a:p>
-          <a:p>
-            <a:pPr indent="0" marL="0">
-              <a:lnSpc>
-                <a:spcPct val="115000"/>
-              </a:lnSpc>
-              <a:buNone/>
-            </a:pPr>
-            <a:r>
-              <a:rPr lang="en-US" sz="1371" dirty="0">
+            <a:endParaRPr lang="en-US" sz="1465" dirty="0"/>
+          </a:p>
+          <a:p>
+            <a:pPr indent="0" marL="0">
+              <a:lnSpc>
+                <a:spcPct val="115000"/>
+              </a:lnSpc>
+              <a:buNone/>
+            </a:pPr>
+            <a:endParaRPr lang="en-US" sz="1465" dirty="0"/>
+          </a:p>
+          <a:p>
+            <a:pPr indent="0" marL="0">
+              <a:lnSpc>
+                <a:spcPct val="115000"/>
+              </a:lnSpc>
+              <a:buNone/>
+            </a:pPr>
+            <a:r>
+              <a:rPr lang="en-US" sz="1465" dirty="0">
                 <a:solidFill>
                   <a:srgbClr val="E5E7EB"/>
                 </a:solidFill>
@@ -33973,7 +33973,7 @@
               <a:buNone/>
             </a:pPr>
             <a:r>
-              <a:rPr lang="en-US" sz="1371" dirty="0">
+              <a:rPr lang="en-US" sz="1465" dirty="0">
                 <a:solidFill>
                   <a:srgbClr val="FCD34D"/>
                 </a:solidFill>
@@ -33990,7 +33990,7 @@
               <a:buNone/>
             </a:pPr>
             <a:r>
-              <a:rPr lang="en-US" sz="1371" dirty="0">
+              <a:rPr lang="en-US" sz="1465" dirty="0">
                 <a:solidFill>
                   <a:srgbClr val="E5E7EB"/>
                 </a:solidFill>
@@ -34007,7 +34007,7 @@
               <a:buNone/>
             </a:pPr>
             <a:r>
-              <a:rPr lang="en-US" sz="1371" dirty="0">
+              <a:rPr lang="en-US" sz="1465" dirty="0">
                 <a:solidFill>
                   <a:srgbClr val="FCD34D"/>
                 </a:solidFill>
@@ -34024,7 +34024,7 @@
               <a:buNone/>
             </a:pPr>
             <a:r>
-              <a:rPr lang="en-US" sz="1371" dirty="0">
+              <a:rPr lang="en-US" sz="1465" dirty="0">
                 <a:solidFill>
                   <a:srgbClr val="E5E7EB"/>
                 </a:solidFill>
@@ -34034,7 +34034,7 @@
               </a:rPr>
               <a:t>].apply(to_tier)</a:t>
             </a:r>
-            <a:endParaRPr lang="en-US" sz="1371" dirty="0"/>
+            <a:endParaRPr lang="en-US" sz="1465" dirty="0"/>
           </a:p>
         </p:txBody>
       </p:sp>
@@ -34763,7 +34763,7 @@
                 <a:ea typeface="Malgun Gothic" pitchFamily="34" charset="-122"/>
                 <a:cs typeface="Malgun Gothic" pitchFamily="34" charset="-120"/>
               </a:rPr>
-              <a:t>「파이프라인 실행」 → 도넛 색이 등급(초록 CHALLENGER · 파랑 GOLD · 빨강 BRONZE). 커트라인을 낮추면 같은 점수가 등급이 오른다.</a:t>
+              <a:t>「파이프라인 실행」 → 내 점수 막대와 커트라인 두 줄. 초록 줄(if) 위면 CHALLENGER, 파란 줄(elif) 위면 GOLD. 커트라인을 낮추면 같은 점수가 등급이 오른다.</a:t>
             </a:r>
             <a:endParaRPr lang="en-US" sz="1200" dirty="0"/>
           </a:p>
@@ -36285,7 +36285,7 @@
               <a:buNone/>
             </a:pPr>
             <a:r>
-              <a:rPr lang="en-US" sz="1400" dirty="0">
+              <a:rPr lang="en-US" sz="1268" dirty="0">
                 <a:solidFill>
                   <a:srgbClr val="0F172A"/>
                 </a:solidFill>
@@ -36295,17 +36295,17 @@
               </a:rPr>
               <a:t>도전자: AI 도전자 홍길동</a:t>
             </a:r>
-            <a:endParaRPr lang="en-US" sz="1400" dirty="0"/>
-          </a:p>
-          <a:p>
-            <a:pPr indent="0" marL="0">
-              <a:lnSpc>
-                <a:spcPct val="115000"/>
-              </a:lnSpc>
-              <a:buNone/>
-            </a:pPr>
-            <a:r>
-              <a:rPr lang="en-US" sz="1400" dirty="0">
+            <a:endParaRPr lang="en-US" sz="1268" dirty="0"/>
+          </a:p>
+          <a:p>
+            <a:pPr indent="0" marL="0">
+              <a:lnSpc>
+                <a:spcPct val="115000"/>
+              </a:lnSpc>
+              <a:buNone/>
+            </a:pPr>
+            <a:r>
+              <a:rPr lang="en-US" sz="1268" dirty="0">
                 <a:solidFill>
                   <a:srgbClr val="0F172A"/>
                 </a:solidFill>
@@ -36315,17 +36315,17 @@
               </a:rPr>
               <a:t>도전자:-AI 도전자 홍길동</a:t>
             </a:r>
-            <a:endParaRPr lang="en-US" sz="1400" dirty="0"/>
-          </a:p>
-          <a:p>
-            <a:pPr indent="0" marL="0">
-              <a:lnSpc>
-                <a:spcPct val="115000"/>
-              </a:lnSpc>
-              <a:buNone/>
-            </a:pPr>
-            <a:r>
-              <a:rPr lang="en-US" sz="1400" dirty="0">
+            <a:endParaRPr lang="en-US" sz="1268" dirty="0"/>
+          </a:p>
+          <a:p>
+            <a:pPr indent="0" marL="0">
+              <a:lnSpc>
+                <a:spcPct val="115000"/>
+              </a:lnSpc>
+              <a:buNone/>
+            </a:pPr>
+            <a:r>
+              <a:rPr lang="en-US" sz="1268" dirty="0">
                 <a:solidFill>
                   <a:srgbClr val="0F172A"/>
                 </a:solidFill>
@@ -36335,7 +36335,7 @@
               </a:rPr>
               <a:t>도전자: AI 도전자 홍길동!</a:t>
             </a:r>
-            <a:endParaRPr lang="en-US" sz="1400" dirty="0"/>
+            <a:endParaRPr lang="en-US" sz="1268" dirty="0"/>
           </a:p>
         </p:txBody>
       </p:sp>
@@ -37246,7 +37246,7 @@
               <a:buNone/>
             </a:pPr>
             <a:r>
-              <a:rPr lang="en-US" sz="1050" dirty="0">
+              <a:rPr lang="en-US" sz="761" dirty="0">
                 <a:solidFill>
                   <a:srgbClr val="0F172A"/>
                 </a:solidFill>
@@ -37256,17 +37256,17 @@
               </a:rPr>
               <a:t>&lt;class 'str'&gt;</a:t>
             </a:r>
-            <a:endParaRPr lang="en-US" sz="1050" dirty="0"/>
-          </a:p>
-          <a:p>
-            <a:pPr indent="0" marL="0">
-              <a:lnSpc>
-                <a:spcPct val="115000"/>
-              </a:lnSpc>
-              <a:buNone/>
-            </a:pPr>
-            <a:r>
-              <a:rPr lang="en-US" sz="1050" dirty="0">
+            <a:endParaRPr lang="en-US" sz="761" dirty="0"/>
+          </a:p>
+          <a:p>
+            <a:pPr indent="0" marL="0">
+              <a:lnSpc>
+                <a:spcPct val="115000"/>
+              </a:lnSpc>
+              <a:buNone/>
+            </a:pPr>
+            <a:r>
+              <a:rPr lang="en-US" sz="761" dirty="0">
                 <a:solidFill>
                   <a:srgbClr val="0F172A"/>
                 </a:solidFill>
@@ -37276,17 +37276,17 @@
               </a:rPr>
               <a:t>&lt;class 'int'&gt;</a:t>
             </a:r>
-            <a:endParaRPr lang="en-US" sz="1050" dirty="0"/>
-          </a:p>
-          <a:p>
-            <a:pPr indent="0" marL="0">
-              <a:lnSpc>
-                <a:spcPct val="115000"/>
-              </a:lnSpc>
-              <a:buNone/>
-            </a:pPr>
-            <a:r>
-              <a:rPr lang="en-US" sz="1050" dirty="0">
+            <a:endParaRPr lang="en-US" sz="761" dirty="0"/>
+          </a:p>
+          <a:p>
+            <a:pPr indent="0" marL="0">
+              <a:lnSpc>
+                <a:spcPct val="115000"/>
+              </a:lnSpc>
+              <a:buNone/>
+            </a:pPr>
+            <a:r>
+              <a:rPr lang="en-US" sz="761" dirty="0">
                 <a:solidFill>
                   <a:srgbClr val="0F172A"/>
                 </a:solidFill>
@@ -37296,17 +37296,17 @@
               </a:rPr>
               <a:t>&lt;class 'float'&gt;</a:t>
             </a:r>
-            <a:endParaRPr lang="en-US" sz="1050" dirty="0"/>
-          </a:p>
-          <a:p>
-            <a:pPr indent="0" marL="0">
-              <a:lnSpc>
-                <a:spcPct val="115000"/>
-              </a:lnSpc>
-              <a:buNone/>
-            </a:pPr>
-            <a:r>
-              <a:rPr lang="en-US" sz="1050" dirty="0">
+            <a:endParaRPr lang="en-US" sz="761" dirty="0"/>
+          </a:p>
+          <a:p>
+            <a:pPr indent="0" marL="0">
+              <a:lnSpc>
+                <a:spcPct val="115000"/>
+              </a:lnSpc>
+              <a:buNone/>
+            </a:pPr>
+            <a:r>
+              <a:rPr lang="en-US" sz="761" dirty="0">
                 <a:solidFill>
                   <a:srgbClr val="0F172A"/>
                 </a:solidFill>
@@ -37316,17 +37316,17 @@
               </a:rPr>
               <a:t>&lt;class 'list'&gt;</a:t>
             </a:r>
-            <a:endParaRPr lang="en-US" sz="1050" dirty="0"/>
-          </a:p>
-          <a:p>
-            <a:pPr indent="0" marL="0">
-              <a:lnSpc>
-                <a:spcPct val="115000"/>
-              </a:lnSpc>
-              <a:buNone/>
-            </a:pPr>
-            <a:r>
-              <a:rPr lang="en-US" sz="1050" dirty="0">
+            <a:endParaRPr lang="en-US" sz="761" dirty="0"/>
+          </a:p>
+          <a:p>
+            <a:pPr indent="0" marL="0">
+              <a:lnSpc>
+                <a:spcPct val="115000"/>
+              </a:lnSpc>
+              <a:buNone/>
+            </a:pPr>
+            <a:r>
+              <a:rPr lang="en-US" sz="761" dirty="0">
                 <a:solidFill>
                   <a:srgbClr val="0F172A"/>
                 </a:solidFill>
@@ -37336,7 +37336,7 @@
               </a:rPr>
               <a:t>&lt;class 'bool'&gt;</a:t>
             </a:r>
-            <a:endParaRPr lang="en-US" sz="1050" dirty="0"/>
+            <a:endParaRPr lang="en-US" sz="761" dirty="0"/>
           </a:p>
         </p:txBody>
       </p:sp>
@@ -37993,7 +37993,7 @@
               <a:buNone/>
             </a:pPr>
             <a:r>
-              <a:rPr lang="en-US" sz="1311" b="1" dirty="0">
+              <a:rPr lang="en-US" sz="1504" b="1" dirty="0">
                 <a:solidFill>
                   <a:srgbClr val="93C5FD"/>
                 </a:solidFill>
@@ -38010,7 +38010,7 @@
               <a:buNone/>
             </a:pPr>
             <a:r>
-              <a:rPr lang="en-US" sz="1311" dirty="0">
+              <a:rPr lang="en-US" sz="1504" dirty="0">
                 <a:solidFill>
                   <a:srgbClr val="E5E7EB"/>
                 </a:solidFill>
@@ -38027,7 +38027,7 @@
               <a:buNone/>
             </a:pPr>
             <a:r>
-              <a:rPr lang="en-US" sz="1311" b="1" dirty="0">
+              <a:rPr lang="en-US" sz="1504" b="1" dirty="0">
                 <a:solidFill>
                   <a:srgbClr val="93C5FD"/>
                 </a:solidFill>
@@ -38044,7 +38044,7 @@
               <a:buNone/>
             </a:pPr>
             <a:r>
-              <a:rPr lang="en-US" sz="1311" dirty="0">
+              <a:rPr lang="en-US" sz="1504" dirty="0">
                 <a:solidFill>
                   <a:srgbClr val="E5E7EB"/>
                 </a:solidFill>
@@ -38061,7 +38061,7 @@
               <a:buNone/>
             </a:pPr>
             <a:r>
-              <a:rPr lang="en-US" sz="1311" dirty="0">
+              <a:rPr lang="en-US" sz="1504" dirty="0">
                 <a:solidFill>
                   <a:srgbClr val="94A3B8"/>
                 </a:solidFill>
@@ -38077,17 +38077,17 @@
               </a:lnSpc>
               <a:buNone/>
             </a:pPr>
-            <a:endParaRPr lang="en-US" sz="1311" dirty="0"/>
-          </a:p>
-          <a:p>
-            <a:pPr indent="0" marL="0">
-              <a:lnSpc>
-                <a:spcPct val="115000"/>
-              </a:lnSpc>
-              <a:buNone/>
-            </a:pPr>
-            <a:r>
-              <a:rPr lang="en-US" sz="1311" b="1" dirty="0">
+            <a:endParaRPr lang="en-US" sz="1504" dirty="0"/>
+          </a:p>
+          <a:p>
+            <a:pPr indent="0" marL="0">
+              <a:lnSpc>
+                <a:spcPct val="115000"/>
+              </a:lnSpc>
+              <a:buNone/>
+            </a:pPr>
+            <a:r>
+              <a:rPr lang="en-US" sz="1504" b="1" dirty="0">
                 <a:solidFill>
                   <a:srgbClr val="93C5FD"/>
                 </a:solidFill>
@@ -38104,7 +38104,7 @@
               <a:buNone/>
             </a:pPr>
             <a:r>
-              <a:rPr lang="en-US" sz="1311" dirty="0">
+              <a:rPr lang="en-US" sz="1504" dirty="0">
                 <a:solidFill>
                   <a:srgbClr val="E5E7EB"/>
                 </a:solidFill>
@@ -38121,7 +38121,7 @@
               <a:buNone/>
             </a:pPr>
             <a:r>
-              <a:rPr lang="en-US" sz="1311" b="1" dirty="0">
+              <a:rPr lang="en-US" sz="1504" b="1" dirty="0">
                 <a:solidFill>
                   <a:srgbClr val="93C5FD"/>
                 </a:solidFill>
@@ -38138,7 +38138,7 @@
               <a:buNone/>
             </a:pPr>
             <a:r>
-              <a:rPr lang="en-US" sz="1311" dirty="0">
+              <a:rPr lang="en-US" sz="1504" dirty="0">
                 <a:solidFill>
                   <a:srgbClr val="E5E7EB"/>
                 </a:solidFill>
@@ -38155,7 +38155,7 @@
               <a:buNone/>
             </a:pPr>
             <a:r>
-              <a:rPr lang="en-US" sz="1311" dirty="0">
+              <a:rPr lang="en-US" sz="1504" dirty="0">
                 <a:solidFill>
                   <a:srgbClr val="94A3B8"/>
                 </a:solidFill>
@@ -38171,17 +38171,17 @@
               </a:lnSpc>
               <a:buNone/>
             </a:pPr>
-            <a:endParaRPr lang="en-US" sz="1311" dirty="0"/>
-          </a:p>
-          <a:p>
-            <a:pPr indent="0" marL="0">
-              <a:lnSpc>
-                <a:spcPct val="115000"/>
-              </a:lnSpc>
-              <a:buNone/>
-            </a:pPr>
-            <a:r>
-              <a:rPr lang="en-US" sz="1311" b="1" dirty="0">
+            <a:endParaRPr lang="en-US" sz="1504" dirty="0"/>
+          </a:p>
+          <a:p>
+            <a:pPr indent="0" marL="0">
+              <a:lnSpc>
+                <a:spcPct val="115000"/>
+              </a:lnSpc>
+              <a:buNone/>
+            </a:pPr>
+            <a:r>
+              <a:rPr lang="en-US" sz="1504" b="1" dirty="0">
                 <a:solidFill>
                   <a:srgbClr val="93C5FD"/>
                 </a:solidFill>
@@ -38198,7 +38198,7 @@
               <a:buNone/>
             </a:pPr>
             <a:r>
-              <a:rPr lang="en-US" sz="1311" dirty="0">
+              <a:rPr lang="en-US" sz="1504" dirty="0">
                 <a:solidFill>
                   <a:srgbClr val="E5E7EB"/>
                 </a:solidFill>
@@ -38215,7 +38215,7 @@
               <a:buNone/>
             </a:pPr>
             <a:r>
-              <a:rPr lang="en-US" sz="1311" dirty="0">
+              <a:rPr lang="en-US" sz="1504" dirty="0">
                 <a:solidFill>
                   <a:srgbClr val="94A3B8"/>
                 </a:solidFill>
@@ -38225,7 +38225,7 @@
               </a:rPr>
               <a:t># False</a:t>
             </a:r>
-            <a:endParaRPr lang="en-US" sz="1311" dirty="0"/>
+            <a:endParaRPr lang="en-US" sz="1504" dirty="0"/>
           </a:p>
         </p:txBody>
       </p:sp>
@@ -39473,7 +39473,7 @@
               <a:buNone/>
             </a:pPr>
             <a:r>
-              <a:rPr lang="en-US" sz="1200" dirty="0">
+              <a:rPr lang="en-US" sz="1213" dirty="0">
                 <a:solidFill>
                   <a:srgbClr val="E5E7EB"/>
                 </a:solidFill>
@@ -39490,7 +39490,7 @@
               <a:buNone/>
             </a:pPr>
             <a:r>
-              <a:rPr lang="en-US" sz="1200" dirty="0">
+              <a:rPr lang="en-US" sz="1213" dirty="0">
                 <a:solidFill>
                   <a:srgbClr val="FCD34D"/>
                 </a:solidFill>
@@ -39506,17 +39506,17 @@
               </a:lnSpc>
               <a:buNone/>
             </a:pPr>
-            <a:endParaRPr lang="en-US" sz="1200" dirty="0"/>
-          </a:p>
-          <a:p>
-            <a:pPr indent="0" marL="0">
-              <a:lnSpc>
-                <a:spcPct val="115000"/>
-              </a:lnSpc>
-              <a:buNone/>
-            </a:pPr>
-            <a:r>
-              <a:rPr lang="en-US" sz="1200" b="1" dirty="0">
+            <a:endParaRPr lang="en-US" sz="1213" dirty="0"/>
+          </a:p>
+          <a:p>
+            <a:pPr indent="0" marL="0">
+              <a:lnSpc>
+                <a:spcPct val="115000"/>
+              </a:lnSpc>
+              <a:buNone/>
+            </a:pPr>
+            <a:r>
+              <a:rPr lang="en-US" sz="1213" b="1" dirty="0">
                 <a:solidFill>
                   <a:srgbClr val="93C5FD"/>
                 </a:solidFill>
@@ -39533,7 +39533,7 @@
               <a:buNone/>
             </a:pPr>
             <a:r>
-              <a:rPr lang="en-US" sz="1200" dirty="0">
+              <a:rPr lang="en-US" sz="1213" dirty="0">
                 <a:solidFill>
                   <a:srgbClr val="E5E7EB"/>
                 </a:solidFill>
@@ -39550,7 +39550,7 @@
               <a:buNone/>
             </a:pPr>
             <a:r>
-              <a:rPr lang="en-US" sz="1200" dirty="0">
+              <a:rPr lang="en-US" sz="1213" dirty="0">
                 <a:solidFill>
                   <a:srgbClr val="FCD34D"/>
                 </a:solidFill>
@@ -39567,7 +39567,7 @@
               <a:buNone/>
             </a:pPr>
             <a:r>
-              <a:rPr lang="en-US" sz="1200" dirty="0">
+              <a:rPr lang="en-US" sz="1213" dirty="0">
                 <a:solidFill>
                   <a:srgbClr val="E5E7EB"/>
                 </a:solidFill>
@@ -39584,7 +39584,7 @@
               <a:buNone/>
             </a:pPr>
             <a:r>
-              <a:rPr lang="en-US" sz="1200" b="1" dirty="0">
+              <a:rPr lang="en-US" sz="1213" b="1" dirty="0">
                 <a:solidFill>
                   <a:srgbClr val="93C5FD"/>
                 </a:solidFill>
@@ -39601,7 +39601,7 @@
               <a:buNone/>
             </a:pPr>
             <a:r>
-              <a:rPr lang="en-US" sz="1200" dirty="0">
+              <a:rPr lang="en-US" sz="1213" dirty="0">
                 <a:solidFill>
                   <a:srgbClr val="E5E7EB"/>
                 </a:solidFill>
@@ -39618,7 +39618,7 @@
               <a:buNone/>
             </a:pPr>
             <a:r>
-              <a:rPr lang="en-US" sz="1200" dirty="0">
+              <a:rPr lang="en-US" sz="1213" dirty="0">
                 <a:solidFill>
                   <a:srgbClr val="94A3B8"/>
                 </a:solidFill>
@@ -39634,17 +39634,17 @@
               </a:lnSpc>
               <a:buNone/>
             </a:pPr>
-            <a:endParaRPr lang="en-US" sz="1200" dirty="0"/>
-          </a:p>
-          <a:p>
-            <a:pPr indent="0" marL="0">
-              <a:lnSpc>
-                <a:spcPct val="115000"/>
-              </a:lnSpc>
-              <a:buNone/>
-            </a:pPr>
-            <a:r>
-              <a:rPr lang="en-US" sz="1200" dirty="0">
+            <a:endParaRPr lang="en-US" sz="1213" dirty="0"/>
+          </a:p>
+          <a:p>
+            <a:pPr indent="0" marL="0">
+              <a:lnSpc>
+                <a:spcPct val="115000"/>
+              </a:lnSpc>
+              <a:buNone/>
+            </a:pPr>
+            <a:r>
+              <a:rPr lang="en-US" sz="1213" dirty="0">
                 <a:solidFill>
                   <a:srgbClr val="E5E7EB"/>
                 </a:solidFill>
@@ -39661,7 +39661,7 @@
               <a:buNone/>
             </a:pPr>
             <a:r>
-              <a:rPr lang="en-US" sz="1200" b="1" dirty="0">
+              <a:rPr lang="en-US" sz="1213" b="1" dirty="0">
                 <a:solidFill>
                   <a:srgbClr val="93C5FD"/>
                 </a:solidFill>
@@ -39678,7 +39678,7 @@
               <a:buNone/>
             </a:pPr>
             <a:r>
-              <a:rPr lang="en-US" sz="1200" dirty="0">
+              <a:rPr lang="en-US" sz="1213" dirty="0">
                 <a:solidFill>
                   <a:srgbClr val="E5E7EB"/>
                 </a:solidFill>
@@ -39694,17 +39694,17 @@
               </a:lnSpc>
               <a:buNone/>
             </a:pPr>
-            <a:endParaRPr lang="en-US" sz="1200" dirty="0"/>
-          </a:p>
-          <a:p>
-            <a:pPr indent="0" marL="0">
-              <a:lnSpc>
-                <a:spcPct val="115000"/>
-              </a:lnSpc>
-              <a:buNone/>
-            </a:pPr>
-            <a:r>
-              <a:rPr lang="en-US" sz="1200" b="1" dirty="0">
+            <a:endParaRPr lang="en-US" sz="1213" dirty="0"/>
+          </a:p>
+          <a:p>
+            <a:pPr indent="0" marL="0">
+              <a:lnSpc>
+                <a:spcPct val="115000"/>
+              </a:lnSpc>
+              <a:buNone/>
+            </a:pPr>
+            <a:r>
+              <a:rPr lang="en-US" sz="1213" b="1" dirty="0">
                 <a:solidFill>
                   <a:srgbClr val="93C5FD"/>
                 </a:solidFill>
@@ -39721,7 +39721,7 @@
               <a:buNone/>
             </a:pPr>
             <a:r>
-              <a:rPr lang="en-US" sz="1200" dirty="0">
+              <a:rPr lang="en-US" sz="1213" dirty="0">
                 <a:solidFill>
                   <a:srgbClr val="E5E7EB"/>
                 </a:solidFill>
@@ -39738,7 +39738,7 @@
               <a:buNone/>
             </a:pPr>
             <a:r>
-              <a:rPr lang="en-US" sz="1200" dirty="0">
+              <a:rPr lang="en-US" sz="1213" dirty="0">
                 <a:solidFill>
                   <a:srgbClr val="FCD34D"/>
                 </a:solidFill>
@@ -39755,7 +39755,7 @@
               <a:buNone/>
             </a:pPr>
             <a:r>
-              <a:rPr lang="en-US" sz="1200" dirty="0">
+              <a:rPr lang="en-US" sz="1213" dirty="0">
                 <a:solidFill>
                   <a:srgbClr val="E5E7EB"/>
                 </a:solidFill>
@@ -39772,7 +39772,7 @@
               <a:buNone/>
             </a:pPr>
             <a:r>
-              <a:rPr lang="en-US" sz="1200" b="1" dirty="0">
+              <a:rPr lang="en-US" sz="1213" b="1" dirty="0">
                 <a:solidFill>
                   <a:srgbClr val="93C5FD"/>
                 </a:solidFill>
@@ -39789,7 +39789,7 @@
               <a:buNone/>
             </a:pPr>
             <a:r>
-              <a:rPr lang="en-US" sz="1200" dirty="0">
+              <a:rPr lang="en-US" sz="1213" dirty="0">
                 <a:solidFill>
                   <a:srgbClr val="E5E7EB"/>
                 </a:solidFill>
@@ -39806,7 +39806,7 @@
               <a:buNone/>
             </a:pPr>
             <a:r>
-              <a:rPr lang="en-US" sz="1200" dirty="0">
+              <a:rPr lang="en-US" sz="1213" dirty="0">
                 <a:solidFill>
                   <a:srgbClr val="94A3B8"/>
                 </a:solidFill>
@@ -39822,17 +39822,17 @@
               </a:lnSpc>
               <a:buNone/>
             </a:pPr>
-            <a:endParaRPr lang="en-US" sz="1200" dirty="0"/>
-          </a:p>
-          <a:p>
-            <a:pPr indent="0" marL="0">
-              <a:lnSpc>
-                <a:spcPct val="115000"/>
-              </a:lnSpc>
-              <a:buNone/>
-            </a:pPr>
-            <a:r>
-              <a:rPr lang="en-US" sz="1200" b="1" dirty="0">
+            <a:endParaRPr lang="en-US" sz="1213" dirty="0"/>
+          </a:p>
+          <a:p>
+            <a:pPr indent="0" marL="0">
+              <a:lnSpc>
+                <a:spcPct val="115000"/>
+              </a:lnSpc>
+              <a:buNone/>
+            </a:pPr>
+            <a:r>
+              <a:rPr lang="en-US" sz="1213" b="1" dirty="0">
                 <a:solidFill>
                   <a:srgbClr val="93C5FD"/>
                 </a:solidFill>
@@ -39849,7 +39849,7 @@
               <a:buNone/>
             </a:pPr>
             <a:r>
-              <a:rPr lang="en-US" sz="1200" dirty="0">
+              <a:rPr lang="en-US" sz="1213" dirty="0">
                 <a:solidFill>
                   <a:srgbClr val="E5E7EB"/>
                 </a:solidFill>
@@ -39866,7 +39866,7 @@
               <a:buNone/>
             </a:pPr>
             <a:r>
-              <a:rPr lang="en-US" sz="1200" dirty="0">
+              <a:rPr lang="en-US" sz="1213" dirty="0">
                 <a:solidFill>
                   <a:srgbClr val="FCD34D"/>
                 </a:solidFill>
@@ -39883,7 +39883,7 @@
               <a:buNone/>
             </a:pPr>
             <a:r>
-              <a:rPr lang="en-US" sz="1200" dirty="0">
+              <a:rPr lang="en-US" sz="1213" dirty="0">
                 <a:solidFill>
                   <a:srgbClr val="E5E7EB"/>
                 </a:solidFill>
@@ -39893,7 +39893,7 @@
               </a:rPr>
               <a:t>, value + 15)</a:t>
             </a:r>
-            <a:endParaRPr lang="en-US" sz="1200" dirty="0"/>
+            <a:endParaRPr lang="en-US" sz="1213" dirty="0"/>
           </a:p>
         </p:txBody>
       </p:sp>
@@ -39991,7 +39991,7 @@
               <a:buNone/>
             </a:pPr>
             <a:r>
-              <a:rPr lang="en-US" sz="1100" dirty="0">
+              <a:rPr lang="en-US" sz="930" dirty="0">
                 <a:solidFill>
                   <a:srgbClr val="0F172A"/>
                 </a:solidFill>
@@ -40001,17 +40001,17 @@
               </a:rPr>
               <a:t>원본: 85 &lt;class 'str'&gt;</a:t>
             </a:r>
-            <a:endParaRPr lang="en-US" sz="1100" dirty="0"/>
-          </a:p>
-          <a:p>
-            <a:pPr indent="0" marL="0">
-              <a:lnSpc>
-                <a:spcPct val="115000"/>
-              </a:lnSpc>
-              <a:buNone/>
-            </a:pPr>
-            <a:r>
-              <a:rPr lang="en-US" sz="1100" dirty="0">
+            <a:endParaRPr lang="en-US" sz="930" dirty="0"/>
+          </a:p>
+          <a:p>
+            <a:pPr indent="0" marL="0">
+              <a:lnSpc>
+                <a:spcPct val="115000"/>
+              </a:lnSpc>
+              <a:buNone/>
+            </a:pPr>
+            <a:r>
+              <a:rPr lang="en-US" sz="930" dirty="0">
                 <a:solidFill>
                   <a:srgbClr val="0F172A"/>
                 </a:solidFill>
@@ -40021,17 +40021,17 @@
               </a:rPr>
               <a:t>변환: 85 &lt;class 'int'&gt;</a:t>
             </a:r>
-            <a:endParaRPr lang="en-US" sz="1100" dirty="0"/>
-          </a:p>
-          <a:p>
-            <a:pPr indent="0" marL="0">
-              <a:lnSpc>
-                <a:spcPct val="115000"/>
-              </a:lnSpc>
-              <a:buNone/>
-            </a:pPr>
-            <a:r>
-              <a:rPr lang="en-US" sz="1100" dirty="0">
+            <a:endParaRPr lang="en-US" sz="930" dirty="0"/>
+          </a:p>
+          <a:p>
+            <a:pPr indent="0" marL="0">
+              <a:lnSpc>
+                <a:spcPct val="115000"/>
+              </a:lnSpc>
+              <a:buNone/>
+            </a:pPr>
+            <a:r>
+              <a:rPr lang="en-US" sz="930" dirty="0">
                 <a:solidFill>
                   <a:srgbClr val="0F172A"/>
                 </a:solidFill>
@@ -40041,7 +40041,7 @@
               </a:rPr>
               <a:t>계산: 100</a:t>
             </a:r>
-            <a:endParaRPr lang="en-US" sz="1100" dirty="0"/>
+            <a:endParaRPr lang="en-US" sz="930" dirty="0"/>
           </a:p>
         </p:txBody>
       </p:sp>

--- a/강의자료/파이썬기초1_1-5차시.pptx
+++ b/강의자료/파이썬기초1_1-5차시.pptx
@@ -5160,8 +5160,8 @@
         </p:nvSpPr>
         <p:spPr>
           <a:xfrm>
-            <a:off x="658368" y="3456432"/>
-            <a:ext cx="1280160" cy="621792"/>
+            <a:off x="658368" y="3438144"/>
+            <a:ext cx="1298448" cy="658368"/>
           </a:xfrm>
           <a:prstGeom prst="rect">
             <a:avLst/>
@@ -5174,10 +5174,13 @@
           <a:lstStyle/>
           <a:p>
             <a:pPr indent="0" marL="0">
-              <a:buNone/>
-            </a:pPr>
-            <a:r>
-              <a:rPr lang="en-US" sz="1200" b="1" dirty="0">
+              <a:lnSpc>
+                <a:spcPct val="105000"/>
+              </a:lnSpc>
+              <a:buNone/>
+            </a:pPr>
+            <a:r>
+              <a:rPr lang="en-US" sz="1100" b="1" dirty="0">
                 <a:solidFill>
                   <a:srgbClr val="FFFFFF"/>
                 </a:solidFill>
@@ -5187,14 +5190,17 @@
               </a:rPr>
               <a:t>print()</a:t>
             </a:r>
-            <a:endParaRPr lang="en-US" sz="1200" dirty="0"/>
-          </a:p>
-          <a:p>
-            <a:pPr indent="0" marL="0">
-              <a:buNone/>
-            </a:pPr>
-            <a:r>
-              <a:rPr lang="en-US" sz="1200" b="1" dirty="0">
+            <a:endParaRPr lang="en-US" sz="1100" dirty="0"/>
+          </a:p>
+          <a:p>
+            <a:pPr indent="0" marL="0">
+              <a:lnSpc>
+                <a:spcPct val="105000"/>
+              </a:lnSpc>
+              <a:buNone/>
+            </a:pPr>
+            <a:r>
+              <a:rPr lang="en-US" sz="1100" b="1" dirty="0">
                 <a:solidFill>
                   <a:srgbClr val="FFFFFF"/>
                 </a:solidFill>
@@ -5204,7 +5210,7 @@
               </a:rPr>
               <a:t>type()</a:t>
             </a:r>
-            <a:endParaRPr lang="en-US" sz="1200" dirty="0"/>
+            <a:endParaRPr lang="en-US" sz="1100" dirty="0"/>
           </a:p>
         </p:txBody>
       </p:sp>
@@ -5282,8 +5288,8 @@
         </p:nvSpPr>
         <p:spPr>
           <a:xfrm>
-            <a:off x="2267712" y="3456432"/>
-            <a:ext cx="1280160" cy="621792"/>
+            <a:off x="2267712" y="3438144"/>
+            <a:ext cx="1298448" cy="658368"/>
           </a:xfrm>
           <a:prstGeom prst="rect">
             <a:avLst/>
@@ -5296,10 +5302,13 @@
           <a:lstStyle/>
           <a:p>
             <a:pPr indent="0" marL="0">
-              <a:buNone/>
-            </a:pPr>
-            <a:r>
-              <a:rPr lang="en-US" sz="1200" b="1" dirty="0">
+              <a:lnSpc>
+                <a:spcPct val="105000"/>
+              </a:lnSpc>
+              <a:buNone/>
+            </a:pPr>
+            <a:r>
+              <a:rPr lang="en-US" sz="1100" b="1" dirty="0">
                 <a:solidFill>
                   <a:srgbClr val="FFFFFF"/>
                 </a:solidFill>
@@ -5309,14 +5318,17 @@
               </a:rPr>
               <a:t>int()</a:t>
             </a:r>
-            <a:endParaRPr lang="en-US" sz="1200" dirty="0"/>
-          </a:p>
-          <a:p>
-            <a:pPr indent="0" marL="0">
-              <a:buNone/>
-            </a:pPr>
-            <a:r>
-              <a:rPr lang="en-US" sz="1200" b="1" dirty="0">
+            <a:endParaRPr lang="en-US" sz="1100" dirty="0"/>
+          </a:p>
+          <a:p>
+            <a:pPr indent="0" marL="0">
+              <a:lnSpc>
+                <a:spcPct val="105000"/>
+              </a:lnSpc>
+              <a:buNone/>
+            </a:pPr>
+            <a:r>
+              <a:rPr lang="en-US" sz="1100" b="1" dirty="0">
                 <a:solidFill>
                   <a:srgbClr val="FFFFFF"/>
                 </a:solidFill>
@@ -5326,7 +5338,7 @@
               </a:rPr>
               <a:t>float()</a:t>
             </a:r>
-            <a:endParaRPr lang="en-US" sz="1200" dirty="0"/>
+            <a:endParaRPr lang="en-US" sz="1100" dirty="0"/>
           </a:p>
         </p:txBody>
       </p:sp>
@@ -5404,8 +5416,8 @@
         </p:nvSpPr>
         <p:spPr>
           <a:xfrm>
-            <a:off x="3877056" y="3456432"/>
-            <a:ext cx="1280160" cy="621792"/>
+            <a:off x="3877056" y="3438144"/>
+            <a:ext cx="1298448" cy="658368"/>
           </a:xfrm>
           <a:prstGeom prst="rect">
             <a:avLst/>
@@ -5418,10 +5430,13 @@
           <a:lstStyle/>
           <a:p>
             <a:pPr indent="0" marL="0">
-              <a:buNone/>
-            </a:pPr>
-            <a:r>
-              <a:rPr lang="en-US" sz="1200" b="1" dirty="0">
+              <a:lnSpc>
+                <a:spcPct val="105000"/>
+              </a:lnSpc>
+              <a:buNone/>
+            </a:pPr>
+            <a:r>
+              <a:rPr lang="en-US" sz="1100" b="1" dirty="0">
                 <a:solidFill>
                   <a:srgbClr val="FFFFFF"/>
                 </a:solidFill>
@@ -5431,14 +5446,17 @@
               </a:rPr>
               <a:t>sum()</a:t>
             </a:r>
-            <a:endParaRPr lang="en-US" sz="1200" dirty="0"/>
-          </a:p>
-          <a:p>
-            <a:pPr indent="0" marL="0">
-              <a:buNone/>
-            </a:pPr>
-            <a:r>
-              <a:rPr lang="en-US" sz="1200" b="1" dirty="0">
+            <a:endParaRPr lang="en-US" sz="1100" dirty="0"/>
+          </a:p>
+          <a:p>
+            <a:pPr indent="0" marL="0">
+              <a:lnSpc>
+                <a:spcPct val="105000"/>
+              </a:lnSpc>
+              <a:buNone/>
+            </a:pPr>
+            <a:r>
+              <a:rPr lang="en-US" sz="1100" b="1" dirty="0">
                 <a:solidFill>
                   <a:srgbClr val="FFFFFF"/>
                 </a:solidFill>
@@ -5448,7 +5466,7 @@
               </a:rPr>
               <a:t>len()</a:t>
             </a:r>
-            <a:endParaRPr lang="en-US" sz="1200" dirty="0"/>
+            <a:endParaRPr lang="en-US" sz="1100" dirty="0"/>
           </a:p>
         </p:txBody>
       </p:sp>
@@ -5526,8 +5544,8 @@
         </p:nvSpPr>
         <p:spPr>
           <a:xfrm>
-            <a:off x="5486400" y="3456432"/>
-            <a:ext cx="1280160" cy="621792"/>
+            <a:off x="5486400" y="3438144"/>
+            <a:ext cx="1298448" cy="658368"/>
           </a:xfrm>
           <a:prstGeom prst="rect">
             <a:avLst/>
@@ -5540,10 +5558,13 @@
           <a:lstStyle/>
           <a:p>
             <a:pPr indent="0" marL="0">
-              <a:buNone/>
-            </a:pPr>
-            <a:r>
-              <a:rPr lang="en-US" sz="1200" b="1" dirty="0">
+              <a:lnSpc>
+                <a:spcPct val="105000"/>
+              </a:lnSpc>
+              <a:buNone/>
+            </a:pPr>
+            <a:r>
+              <a:rPr lang="en-US" sz="1100" b="1" dirty="0">
                 <a:solidFill>
                   <a:srgbClr val="FFFFFF"/>
                 </a:solidFill>
@@ -5553,14 +5574,17 @@
               </a:rPr>
               <a:t>range()</a:t>
             </a:r>
-            <a:endParaRPr lang="en-US" sz="1200" dirty="0"/>
-          </a:p>
-          <a:p>
-            <a:pPr indent="0" marL="0">
-              <a:buNone/>
-            </a:pPr>
-            <a:r>
-              <a:rPr lang="en-US" sz="1200" b="1" dirty="0">
+            <a:endParaRPr lang="en-US" sz="1100" dirty="0"/>
+          </a:p>
+          <a:p>
+            <a:pPr indent="0" marL="0">
+              <a:lnSpc>
+                <a:spcPct val="105000"/>
+              </a:lnSpc>
+              <a:buNone/>
+            </a:pPr>
+            <a:r>
+              <a:rPr lang="en-US" sz="1100" b="1" dirty="0">
                 <a:solidFill>
                   <a:srgbClr val="FFFFFF"/>
                 </a:solidFill>
@@ -5570,7 +5594,7 @@
               </a:rPr>
               <a:t>enumerate()</a:t>
             </a:r>
-            <a:endParaRPr lang="en-US" sz="1200" dirty="0"/>
+            <a:endParaRPr lang="en-US" sz="1100" dirty="0"/>
           </a:p>
         </p:txBody>
       </p:sp>
@@ -5648,8 +5672,8 @@
         </p:nvSpPr>
         <p:spPr>
           <a:xfrm>
-            <a:off x="7095744" y="3456432"/>
-            <a:ext cx="1280160" cy="621792"/>
+            <a:off x="7095744" y="3438144"/>
+            <a:ext cx="1298448" cy="658368"/>
           </a:xfrm>
           <a:prstGeom prst="rect">
             <a:avLst/>
@@ -5662,10 +5686,13 @@
           <a:lstStyle/>
           <a:p>
             <a:pPr indent="0" marL="0">
-              <a:buNone/>
-            </a:pPr>
-            <a:r>
-              <a:rPr lang="en-US" sz="1200" b="1" dirty="0">
+              <a:lnSpc>
+                <a:spcPct val="105000"/>
+              </a:lnSpc>
+              <a:buNone/>
+            </a:pPr>
+            <a:r>
+              <a:rPr lang="en-US" sz="1100" b="1" dirty="0">
                 <a:solidFill>
                   <a:srgbClr val="FFFFFF"/>
                 </a:solidFill>
@@ -5675,14 +5702,17 @@
               </a:rPr>
               <a:t>if-elif</a:t>
             </a:r>
-            <a:endParaRPr lang="en-US" sz="1200" dirty="0"/>
-          </a:p>
-          <a:p>
-            <a:pPr indent="0" marL="0">
-              <a:buNone/>
-            </a:pPr>
-            <a:r>
-              <a:rPr lang="en-US" sz="1200" b="1" dirty="0">
+            <a:endParaRPr lang="en-US" sz="1100" dirty="0"/>
+          </a:p>
+          <a:p>
+            <a:pPr indent="0" marL="0">
+              <a:lnSpc>
+                <a:spcPct val="105000"/>
+              </a:lnSpc>
+              <a:buNone/>
+            </a:pPr>
+            <a:r>
+              <a:rPr lang="en-US" sz="1100" b="1" dirty="0">
                 <a:solidFill>
                   <a:srgbClr val="FFFFFF"/>
                 </a:solidFill>
@@ -5692,7 +5722,7 @@
               </a:rPr>
               <a:t>else</a:t>
             </a:r>
-            <a:endParaRPr lang="en-US" sz="1200" dirty="0"/>
+            <a:endParaRPr lang="en-US" sz="1100" dirty="0"/>
           </a:p>
         </p:txBody>
       </p:sp>
